--- a/caldova-recall-control/presentation/MCP_Community_Connect_Bengaluru_Final_Branded.pptx
+++ b/caldova-recall-control/presentation/MCP_Community_Connect_Bengaluru_Final_Branded.pptx
@@ -2,39 +2,38 @@
 <file path=ppt/presentation.xml><?xml version="1.0" encoding="utf-8"?>
 <p:presentation xmlns:a="http://schemas.openxmlformats.org/drawingml/2006/main" xmlns:r="http://schemas.openxmlformats.org/officeDocument/2006/relationships" xmlns:p="http://schemas.openxmlformats.org/presentationml/2006/main" saveSubsetFonts="1" autoCompressPictures="0">
   <p:sldMasterIdLst>
-    <p:sldMasterId id="2147483648" r:id="rId1"/>
-    <p:sldMasterId id="2147483660" r:id="rId2"/>
+    <p:sldMasterId id="2147483660" r:id="rId1"/>
   </p:sldMasterIdLst>
   <p:notesMasterIdLst>
-    <p:notesMasterId r:id="rId29"/>
+    <p:notesMasterId r:id="rId28"/>
   </p:notesMasterIdLst>
   <p:sldIdLst>
-    <p:sldId id="256" r:id="rId3"/>
-    <p:sldId id="257" r:id="rId4"/>
-    <p:sldId id="258" r:id="rId5"/>
-    <p:sldId id="259" r:id="rId6"/>
-    <p:sldId id="282" r:id="rId7"/>
-    <p:sldId id="260" r:id="rId8"/>
-    <p:sldId id="261" r:id="rId9"/>
-    <p:sldId id="262" r:id="rId10"/>
-    <p:sldId id="263" r:id="rId11"/>
-    <p:sldId id="264" r:id="rId12"/>
-    <p:sldId id="265" r:id="rId13"/>
-    <p:sldId id="266" r:id="rId14"/>
-    <p:sldId id="267" r:id="rId15"/>
-    <p:sldId id="268" r:id="rId16"/>
-    <p:sldId id="269" r:id="rId17"/>
-    <p:sldId id="270" r:id="rId18"/>
-    <p:sldId id="271" r:id="rId19"/>
-    <p:sldId id="272" r:id="rId20"/>
-    <p:sldId id="273" r:id="rId21"/>
-    <p:sldId id="274" r:id="rId22"/>
-    <p:sldId id="275" r:id="rId23"/>
-    <p:sldId id="276" r:id="rId24"/>
-    <p:sldId id="277" r:id="rId25"/>
-    <p:sldId id="278" r:id="rId26"/>
-    <p:sldId id="279" r:id="rId27"/>
-    <p:sldId id="280" r:id="rId28"/>
+    <p:sldId id="256" r:id="rId2"/>
+    <p:sldId id="257" r:id="rId3"/>
+    <p:sldId id="258" r:id="rId4"/>
+    <p:sldId id="259" r:id="rId5"/>
+    <p:sldId id="282" r:id="rId6"/>
+    <p:sldId id="260" r:id="rId7"/>
+    <p:sldId id="261" r:id="rId8"/>
+    <p:sldId id="262" r:id="rId9"/>
+    <p:sldId id="263" r:id="rId10"/>
+    <p:sldId id="264" r:id="rId11"/>
+    <p:sldId id="265" r:id="rId12"/>
+    <p:sldId id="266" r:id="rId13"/>
+    <p:sldId id="267" r:id="rId14"/>
+    <p:sldId id="268" r:id="rId15"/>
+    <p:sldId id="269" r:id="rId16"/>
+    <p:sldId id="270" r:id="rId17"/>
+    <p:sldId id="271" r:id="rId18"/>
+    <p:sldId id="272" r:id="rId19"/>
+    <p:sldId id="273" r:id="rId20"/>
+    <p:sldId id="274" r:id="rId21"/>
+    <p:sldId id="275" r:id="rId22"/>
+    <p:sldId id="276" r:id="rId23"/>
+    <p:sldId id="277" r:id="rId24"/>
+    <p:sldId id="278" r:id="rId25"/>
+    <p:sldId id="279" r:id="rId26"/>
+    <p:sldId id="280" r:id="rId27"/>
   </p:sldIdLst>
   <p:sldSz cx="12192000" cy="6858000"/>
   <p:notesSz cx="6858000" cy="9144000"/>
@@ -322,60 +321,272 @@
           <a:lstStyle/>
           <a:p>
             <a:r>
-              <a:t>TIME: 0:00-0:45. Cover slide. Start with the person, not a product definition.</a:t>
-            </a:r>
-          </a:p>
-          <a:p>
-            <a:endParaRPr/>
-          </a:p>
-          <a:p>
-            <a:r>
-              <a:t>SAY: "Asha receives a cold-chain alert. One batch is spread across four locations.</a:t>
-            </a:r>
-          </a:p>
-          <a:p>
-            <a:r>
-              <a:t>Before she authorises a quarantine, she needs to know where the stock is, what the</a:t>
-            </a:r>
-          </a:p>
-          <a:p>
-            <a:r>
-              <a:t>supplier constraints are, and whether she can trust the proposed action.</a:t>
-            </a:r>
-          </a:p>
-          <a:p>
-            <a:endParaRPr/>
-          </a:p>
-          <a:p>
-            <a:r>
-              <a:t>A chatbot can give her an answer. Her job needs something harder: a decision she can</a:t>
-            </a:r>
-          </a:p>
-          <a:p>
-            <a:r>
-              <a:t>defend, an action she can control, and a record she can inspect.</a:t>
-            </a:r>
-          </a:p>
-          <a:p>
-            <a:endParaRPr/>
-          </a:p>
-          <a:p>
-            <a:r>
-              <a:t>This is a fictional recall with synthetic data. We'll use it to explore a real engineering</a:t>
-            </a:r>
-          </a:p>
-          <a:p>
-            <a:r>
-              <a:t>problem: connecting an agent to a tool is easy. Making the resulting system dependable is not."</a:t>
-            </a:r>
-          </a:p>
-          <a:p>
-            <a:endParaRPr/>
-          </a:p>
-          <a:p>
-            <a:r>
-              <a:t>TRANSITION: "Let's define what success means for Asha before we choose an architecture."</a:t>
-            </a:r>
+              <a:rPr lang="en-GB" dirty="0"/>
+              <a:t>Good morning, and thank you for being here.</a:t>
+            </a:r>
+          </a:p>
+          <a:p>
+            <a:r>
+              <a:rPr lang="en-GB" dirty="0"/>
+              <a:t>I want to start with a person rather than a protocol.</a:t>
+            </a:r>
+          </a:p>
+          <a:p>
+            <a:r>
+              <a:rPr lang="en-GB" dirty="0"/>
+              <a:t>Her name is </a:t>
+            </a:r>
+            <a:r>
+              <a:rPr dirty="0"/>
+              <a:t>Asha </a:t>
+            </a:r>
+            <a:r>
+              <a:rPr lang="en-GB" dirty="0"/>
+              <a:t>Rao, and she runs stock operations for a pharmaceutical distributor.</a:t>
+            </a:r>
+          </a:p>
+          <a:p>
+            <a:r>
+              <a:rPr lang="en-GB" dirty="0"/>
+              <a:t>This morning she got </a:t>
+            </a:r>
+            <a:r>
+              <a:rPr dirty="0"/>
+              <a:t>a cold-chain alert</a:t>
+            </a:r>
+            <a:r>
+              <a:rPr lang="en-GB" dirty="0"/>
+              <a:t> on a single </a:t>
+            </a:r>
+            <a:r>
+              <a:rPr dirty="0"/>
+              <a:t>batch</a:t>
+            </a:r>
+            <a:r>
+              <a:rPr lang="en-GB" dirty="0"/>
+              <a:t>,</a:t>
+            </a:r>
+            <a:r>
+              <a:rPr dirty="0"/>
+              <a:t> </a:t>
+            </a:r>
+            <a:r>
+              <a:rPr lang="en-GB" dirty="0"/>
+              <a:t>and that batch is sitting in </a:t>
+            </a:r>
+            <a:r>
+              <a:rPr dirty="0"/>
+              <a:t>four </a:t>
+            </a:r>
+            <a:r>
+              <a:rPr lang="en-GB" dirty="0"/>
+              <a:t>different </a:t>
+            </a:r>
+            <a:r>
+              <a:rPr dirty="0"/>
+              <a:t>locations</a:t>
+            </a:r>
+            <a:r>
+              <a:rPr lang="en-GB" dirty="0"/>
+              <a:t>.</a:t>
+            </a:r>
+          </a:p>
+          <a:p>
+            <a:r>
+              <a:rPr lang="en-GB" dirty="0"/>
+              <a:t>She has to decide whether to quarantine it</a:t>
+            </a:r>
+            <a:r>
+              <a:rPr dirty="0"/>
+              <a:t>.</a:t>
+            </a:r>
+          </a:p>
+          <a:p>
+            <a:r>
+              <a:rPr lang="en-GB" dirty="0"/>
+              <a:t>Now, any model you like </a:t>
+            </a:r>
+            <a:r>
+              <a:rPr dirty="0"/>
+              <a:t>can give </a:t>
+            </a:r>
+            <a:r>
+              <a:rPr lang="en-GB" dirty="0"/>
+              <a:t>Asha </a:t>
+            </a:r>
+            <a:r>
+              <a:rPr dirty="0"/>
+              <a:t>an answer</a:t>
+            </a:r>
+            <a:r>
+              <a:rPr lang="en-GB" dirty="0"/>
+              <a:t> in about two seconds</a:t>
+            </a:r>
+            <a:r>
+              <a:rPr dirty="0"/>
+              <a:t>.</a:t>
+            </a:r>
+            <a:endParaRPr lang="en-GB" dirty="0"/>
+          </a:p>
+          <a:p>
+            <a:r>
+              <a:rPr lang="en-GB" dirty="0"/>
+              <a:t>But an answer isn't what her</a:t>
+            </a:r>
+            <a:r>
+              <a:rPr dirty="0"/>
+              <a:t> job needs</a:t>
+            </a:r>
+            <a:r>
+              <a:rPr lang="en-GB" dirty="0"/>
+              <a:t>.</a:t>
+            </a:r>
+          </a:p>
+          <a:p>
+            <a:r>
+              <a:rPr lang="en-GB" dirty="0"/>
+              <a:t>She needs</a:t>
+            </a:r>
+            <a:r>
+              <a:rPr dirty="0"/>
+              <a:t> a decision she can</a:t>
+            </a:r>
+            <a:r>
+              <a:rPr lang="en-GB" dirty="0"/>
+              <a:t> </a:t>
+            </a:r>
+            <a:r>
+              <a:rPr dirty="0"/>
+              <a:t>defend</a:t>
+            </a:r>
+            <a:r>
+              <a:rPr lang="en-GB" dirty="0"/>
+              <a:t> to a regulator</a:t>
+            </a:r>
+            <a:r>
+              <a:rPr dirty="0"/>
+              <a:t>, an action she can control, and a record she can </a:t>
+            </a:r>
+            <a:r>
+              <a:rPr lang="en-GB" dirty="0"/>
+              <a:t>go back and </a:t>
+            </a:r>
+            <a:r>
+              <a:rPr dirty="0"/>
+              <a:t>inspect</a:t>
+            </a:r>
+            <a:r>
+              <a:rPr lang="en-GB" dirty="0"/>
+              <a:t> six months later</a:t>
+            </a:r>
+            <a:r>
+              <a:rPr dirty="0"/>
+              <a:t>.</a:t>
+            </a:r>
+          </a:p>
+          <a:p>
+            <a:r>
+              <a:rPr lang="en-GB" dirty="0"/>
+              <a:t>Everything I show you today is a fictional </a:t>
+            </a:r>
+            <a:r>
+              <a:rPr dirty="0"/>
+              <a:t>recall</a:t>
+            </a:r>
+            <a:r>
+              <a:rPr lang="en-GB" dirty="0"/>
+              <a:t> running on </a:t>
+            </a:r>
+            <a:r>
+              <a:rPr dirty="0"/>
+              <a:t>synthetic data</a:t>
+            </a:r>
+            <a:r>
+              <a:rPr lang="en-GB" dirty="0"/>
+              <a:t>.</a:t>
+            </a:r>
+          </a:p>
+          <a:p>
+            <a:r>
+              <a:rPr lang="en-GB" dirty="0"/>
+              <a:t>I'm using it because it makes one </a:t>
+            </a:r>
+            <a:r>
+              <a:rPr dirty="0"/>
+              <a:t>real </a:t>
+            </a:r>
+            <a:r>
+              <a:rPr lang="en-GB" dirty="0"/>
+              <a:t>engineering problem very visible.</a:t>
+            </a:r>
+            <a:endParaRPr dirty="0"/>
+          </a:p>
+          <a:p>
+            <a:r>
+              <a:rPr lang="en-GB" dirty="0"/>
+              <a:t>Wiring </a:t>
+            </a:r>
+            <a:r>
+              <a:rPr dirty="0"/>
+              <a:t>an agent </a:t>
+            </a:r>
+            <a:r>
+              <a:rPr lang="en-GB" dirty="0"/>
+              <a:t>up </a:t>
+            </a:r>
+            <a:r>
+              <a:rPr dirty="0"/>
+              <a:t>to a tool is </a:t>
+            </a:r>
+            <a:r>
+              <a:rPr lang="en-GB" dirty="0"/>
+              <a:t>an afternoon's work</a:t>
+            </a:r>
+            <a:r>
+              <a:rPr dirty="0"/>
+              <a:t>.</a:t>
+            </a:r>
+            <a:endParaRPr lang="en-GB" dirty="0"/>
+          </a:p>
+          <a:p>
+            <a:r>
+              <a:rPr dirty="0"/>
+              <a:t>Making </a:t>
+            </a:r>
+            <a:r>
+              <a:rPr lang="en-GB" dirty="0"/>
+              <a:t>the </a:t>
+            </a:r>
+            <a:r>
+              <a:rPr dirty="0"/>
+              <a:t>system </a:t>
+            </a:r>
+            <a:r>
+              <a:rPr lang="en-GB" dirty="0"/>
+              <a:t>you get afterwards </a:t>
+            </a:r>
+            <a:r>
+              <a:rPr dirty="0"/>
+              <a:t>dependable is </a:t>
+            </a:r>
+            <a:r>
+              <a:rPr lang="en-GB" dirty="0"/>
+              <a:t>the actual job, and that's what the next twenty-five minutes are about.</a:t>
+            </a:r>
+            <a:endParaRPr dirty="0"/>
+          </a:p>
+          <a:p>
+            <a:r>
+              <a:rPr lang="en-GB" dirty="0"/>
+              <a:t>I'm Lee Stott, I'm a Principal Cloud Advocate at Microsoft, and we have five demos to get through.</a:t>
+            </a:r>
+          </a:p>
+          <a:p>
+            <a:r>
+              <a:rPr lang="en-GB" dirty="0"/>
+              <a:t>So before we choose any architecture at all, let's be precise about what success means for Asha.</a:t>
+            </a:r>
+            <a:endParaRPr dirty="0"/>
           </a:p>
         </p:txBody>
       </p:sp>
@@ -444,126 +655,231 @@
           <a:lstStyle/>
           <a:p>
             <a:r>
-              <a:t>TIME: 6:30-9:00. Hosted demonstration; hard limit two and a half minutes.</a:t>
-            </a:r>
-          </a:p>
-          <a:p>
+              <a:rPr lang="en-GB"/>
+              <a:t>Here's the sequence.</a:t>
+            </a:r>
+          </a:p>
+          <a:p>
+            <a:r>
+              <a:t>Triage </a:t>
+            </a:r>
+            <a:r>
+              <a:rPr lang="en-GB"/>
+              <a:t>establishes </a:t>
+            </a:r>
+            <a:r>
+              <a:t>the batch</a:t>
+            </a:r>
+            <a:r>
+              <a:rPr lang="en-GB"/>
+              <a:t>.</a:t>
+            </a:r>
+          </a:p>
+          <a:p>
+            <a:r>
+              <a:rPr lang="en-GB"/>
+              <a:t>Inventory </a:t>
+            </a:r>
+            <a:r>
+              <a:t>measures </a:t>
+            </a:r>
+            <a:r>
+              <a:rPr lang="en-GB"/>
+              <a:t>the </a:t>
+            </a:r>
+            <a:r>
+              <a:t>exposure</a:t>
+            </a:r>
+            <a:r>
+              <a:rPr lang="en-GB"/>
+              <a:t>.</a:t>
+            </a:r>
+          </a:p>
+          <a:p>
+            <a:r>
+              <a:rPr lang="en-GB"/>
+              <a:t>Compliance </a:t>
+            </a:r>
+            <a:r>
+              <a:t>preserves</a:t>
+            </a:r>
+            <a:r>
+              <a:rPr lang="en-GB"/>
+              <a:t> the supplier constraints and, importantly, the things we don't know.</a:t>
+            </a:r>
+          </a:p>
+          <a:p>
+            <a:r>
+              <a:rPr lang="en-GB"/>
+              <a:t>And the </a:t>
+            </a:r>
+            <a:r>
+              <a:t>supervisor synthesises </a:t>
+            </a:r>
+            <a:r>
+              <a:rPr lang="en-GB"/>
+              <a:t>the brief with no</a:t>
+            </a:r>
+            <a:r>
+              <a:t> tools</a:t>
+            </a:r>
+            <a:r>
+              <a:rPr lang="en-GB"/>
+              <a:t> of its own</a:t>
+            </a:r>
+            <a:r>
+              <a:t>.</a:t>
+            </a:r>
+          </a:p>
+          <a:p>
+            <a:r>
+              <a:rPr lang="en-GB"/>
+              <a:t>What's running now is </a:t>
+            </a:r>
+            <a:r>
+              <a:t>the </a:t>
+            </a:r>
+            <a:r>
+              <a:rPr lang="en-GB"/>
+              <a:t>real hosted </a:t>
+            </a:r>
+            <a:r>
+              <a:t>agent</a:t>
+            </a:r>
+            <a:r>
+              <a:rPr lang="en-GB"/>
+              <a:t>, and I want to be clear about what its output </a:t>
+            </a:r>
+            <a:r>
+              <a:t>is</a:t>
+            </a:r>
+            <a:r>
+              <a:rPr lang="en-GB"/>
+              <a:t>.</a:t>
+            </a:r>
+          </a:p>
+          <a:p>
+            <a:r>
+              <a:rPr lang="en-GB"/>
+              <a:t>It's</a:t>
+            </a:r>
+            <a:r>
+              <a:t> advice</a:t>
+            </a:r>
+            <a:r>
+              <a:rPr lang="en-GB"/>
+              <a:t>. It is </a:t>
+            </a:r>
+            <a:r>
+              <a:t>not authority.</a:t>
+            </a:r>
+            <a:endParaRPr lang="en-GB"/>
+          </a:p>
+          <a:p>
+            <a:r>
+              <a:rPr lang="en-GB"/>
+              <a:t>So let's evaluate it together, and I'd like you to check three specific things rather than whether it reads nicely.</a:t>
+            </a:r>
+          </a:p>
+          <a:p>
+            <a:r>
+              <a:rPr lang="en-GB"/>
+              <a:t>Does </a:t>
+            </a:r>
+            <a:r>
+              <a:t>the </a:t>
+            </a:r>
+            <a:r>
+              <a:rPr lang="en-GB"/>
+              <a:t>brief still carry two thousand one hundred and ninety-six units </a:t>
+            </a:r>
+            <a:r>
+              <a:t>and four locations</a:t>
+            </a:r>
+            <a:r>
+              <a:rPr lang="en-GB"/>
+              <a:t>?</a:t>
+            </a:r>
+          </a:p>
+          <a:p>
+            <a:r>
+              <a:rPr lang="en-GB"/>
+              <a:t>Is the </a:t>
+            </a:r>
+            <a:r>
+              <a:t>supplier uncertainty</a:t>
+            </a:r>
+            <a:r>
+              <a:rPr lang="en-GB"/>
+              <a:t> still in there, or did it get smoothed away?</a:t>
+            </a:r>
+          </a:p>
+          <a:p>
+            <a:r>
+              <a:rPr lang="en-GB"/>
+              <a:t>And does it still say that a </a:t>
+            </a:r>
+            <a:r>
+              <a:t>human </a:t>
+            </a:r>
+            <a:r>
+              <a:rPr lang="en-GB"/>
+              <a:t>has to act?</a:t>
+            </a:r>
+          </a:p>
+          <a:p>
+            <a:r>
+              <a:rPr lang="en-GB"/>
+              <a:t>That's evidence preservation, and it's</a:t>
+            </a:r>
+            <a:r>
+              <a:t> a </a:t>
+            </a:r>
+            <a:r>
+              <a:rPr lang="en-GB"/>
+              <a:t>far better evaluation target than fluency, because fluency is the thing these models are already best at.</a:t>
+            </a:r>
+          </a:p>
+          <a:p>
+            <a:r>
+              <a:rPr lang="en-GB"/>
+              <a:t>The value here isn't that four agents had a conversation.</a:t>
+            </a:r>
+          </a:p>
+          <a:p>
+            <a:r>
+              <a:rPr lang="en-GB"/>
+              <a:t>It's that we have a brief grounded in separately verifiable evidence, with the uncertainty still intact at the moment Asha has to decide</a:t>
+            </a:r>
+            <a:r>
+              <a:t>.</a:t>
+            </a:r>
+          </a:p>
+          <a:p>
+            <a:r>
+              <a:rPr lang="en-GB"/>
+              <a:t>One small thing — a model name on a configuration screen is not </a:t>
+            </a:r>
+            <a:r>
+              <a:t>evidence</a:t>
+            </a:r>
+            <a:r>
+              <a:rPr lang="en-GB"/>
+              <a:t> of what ran.</a:t>
+            </a:r>
+          </a:p>
+          <a:p>
+            <a:r>
+              <a:rPr lang="en-GB"/>
+              <a:t>The response ID and the request ID are, which is why I keep them on screen.</a:t>
+            </a:r>
+          </a:p>
+          <a:p>
+            <a:r>
+              <a:rPr lang="en-GB"/>
+              <a:t>So that's the happy path. What happens when the evidence doesn't arrive cleanly?</a:t>
+            </a:r>
             <a:endParaRPr/>
-          </a:p>
-          <a:p>
-            <a:r>
-              <a:t>SAY: "Triage establishes the batch. Inventory measures exposure. Compliance preserves</a:t>
-            </a:r>
-          </a:p>
-          <a:p>
-            <a:r>
-              <a:t>supplier constraints and unknowns. The supervisor synthesises the brief without tools.</a:t>
-            </a:r>
-          </a:p>
-          <a:p>
-            <a:endParaRPr/>
-          </a:p>
-          <a:p>
-            <a:r>
-              <a:t>The Control Tower now calls the actual Foundry-hosted agent. Its response is advice,</a:t>
-            </a:r>
-          </a:p>
-          <a:p>
-            <a:r>
-              <a:t>not authority. We will keep this same session open for the human decision and its outcome."</a:t>
-            </a:r>
-          </a:p>
-          <a:p>
-            <a:endParaRPr/>
-          </a:p>
-          <a:p>
-            <a:r>
-              <a:t>ACTION: Have the hosted Control Tower authenticated before the session. Confirm HOSTED</a:t>
-            </a:r>
-          </a:p>
-          <a:p>
-            <a:r>
-              <a:t>and FOUNDRY HOSTED AGENT. Reset only your own synthetic scenario before beginning.</a:t>
-            </a:r>
-          </a:p>
-          <a:p>
-            <a:r>
-              <a:t>Show the deployed agent version and workload identity in the prepared Foundry view, then</a:t>
-            </a:r>
-          </a:p>
-          <a:p>
-            <a:r>
-              <a:t>select Run analysis in the Control Tower. It sends the fixed B-2408-AX7 assessment request.</a:t>
-            </a:r>
-          </a:p>
-          <a:p>
-            <a:r>
-              <a:t>Use a pre-started request if rehearsed latency requires it; disclose that it started earlier.</a:t>
-            </a:r>
-          </a:p>
-          <a:p>
-            <a:r>
-              <a:t>Keep the response ID and request ID visible. A configured model label is not routing evidence.</a:t>
-            </a:r>
-          </a:p>
-          <a:p>
-            <a:endParaRPr/>
-          </a:p>
-          <a:p>
-            <a:r>
-              <a:t>CHECK: Actual response preserves 2196 units and four locations, supplier uncertainty, and</a:t>
-            </a:r>
-          </a:p>
-          <a:p>
-            <a:r>
-              <a:t>required human action. Compare one real tool result with the final brief. Identify a matching</a:t>
-            </a:r>
-          </a:p>
-          <a:p>
-            <a:r>
-              <a:t>trace only if available. Don't invent trace spans or a successful final answer.</a:t>
-            </a:r>
-          </a:p>
-          <a:p>
-            <a:endParaRPr/>
-          </a:p>
-          <a:p>
-            <a:r>
-              <a:t>SAY: "The value here isn't four agents talking. It's a brief grounded in separate evidence,</a:t>
-            </a:r>
-          </a:p>
-          <a:p>
-            <a:r>
-              <a:t>with the uncertainty still visible when Asha makes her decision."</a:t>
-            </a:r>
-          </a:p>
-          <a:p>
-            <a:endParaRPr/>
-          </a:p>
-          <a:p>
-            <a:r>
-              <a:t>FALLBACK: After 30 seconds without useful output, show genuine saved evidence with date</a:t>
-            </a:r>
-          </a:p>
-          <a:p>
-            <a:r>
-              <a:t>and version, or build_agents and build_workflow as an explicitly labelled source walkthrough.</a:t>
-            </a:r>
-          </a:p>
-          <a:p>
-            <a:r>
-              <a:t>No successful hosted execution claim in a source-only fallback. End at 9:00 regardless.</a:t>
-            </a:r>
-          </a:p>
-          <a:p>
-            <a:r>
-              <a:t>LESSON: Evaluate evidence preservation, not just fluent prose.</a:t>
-            </a:r>
-          </a:p>
-          <a:p>
-            <a:r>
-              <a:t>TRANSITION: "What happens when the evidence doesn't arrive cleanly?"</a:t>
-            </a:r>
           </a:p>
         </p:txBody>
       </p:sp>
@@ -632,25 +948,40 @@
           <a:lstStyle/>
           <a:p>
             <a:r>
-              <a:t>DEMO BREAK 03: Investigate a failure.</a:t>
-            </a:r>
-          </a:p>
-          <a:p>
-            <a:endParaRPr/>
-          </a:p>
-          <a:p>
-            <a:r>
-              <a:t>ACTION: Switch to the prepared MCP terminal.</a:t>
-            </a:r>
-          </a:p>
-          <a:p>
-            <a:r>
-              <a:t>PURPOSE: Separate invalid input from denied authority, then inspect unchanged state.</a:t>
-            </a:r>
-          </a:p>
-          <a:p>
-            <a:r>
-              <a:t>Do not advance until the demonstration surface is ready. Use the scripted fallback if live evidence is unavailable.</a:t>
+              <a:rPr lang="en-GB"/>
+              <a:t>Demo three, and honestly this is the one I think transfers best to your own work.</a:t>
+            </a:r>
+          </a:p>
+          <a:p>
+            <a:r>
+              <a:rPr lang="en-GB"/>
+              <a:t>Back to the terminal</a:t>
+            </a:r>
+            <a:r>
+              <a:t>.</a:t>
+            </a:r>
+          </a:p>
+          <a:p>
+            <a:r>
+              <a:rPr lang="en-GB"/>
+              <a:t>We're going to separate invalid </a:t>
+            </a:r>
+            <a:r>
+              <a:t>input </a:t>
+            </a:r>
+            <a:r>
+              <a:rPr lang="en-GB"/>
+              <a:t>from </a:t>
+            </a:r>
+            <a:r>
+              <a:t>denied authority, </a:t>
+            </a:r>
+            <a:r>
+              <a:rPr lang="en-GB"/>
+              <a:t>and then go and check what actually changed</a:t>
+            </a:r>
+            <a:r>
+              <a:t>.</a:t>
             </a:r>
           </a:p>
         </p:txBody>
@@ -720,165 +1051,352 @@
           <a:lstStyle/>
           <a:p>
             <a:r>
-              <a:t>TIME: 9:00-13:00. Demonstration and audience prediction. Use observed terminal failures.</a:t>
-            </a:r>
-          </a:p>
-          <a:p>
+              <a:rPr lang="en-GB"/>
+              <a:t>Asha can't act on a </a:t>
+            </a:r>
+            <a:r>
+              <a:t>failure</a:t>
+            </a:r>
+            <a:r>
+              <a:rPr lang="en-GB"/>
+              <a:t> nobody has explained.</a:t>
+            </a:r>
+          </a:p>
+          <a:p>
+            <a:r>
+              <a:rPr lang="en-GB"/>
+              <a:t>But retrying everything isn't a recovery strategy either, so let's get precise.</a:t>
+            </a:r>
+          </a:p>
+          <a:p>
+            <a:r>
+              <a:rPr lang="en-GB"/>
+              <a:t>There are three classes of failure here and people conflate them constantly</a:t>
+            </a:r>
+            <a:r>
+              <a:t>.</a:t>
+            </a:r>
+            <a:endParaRPr lang="en-GB"/>
+          </a:p>
+          <a:p>
+            <a:r>
+              <a:rPr lang="en-GB"/>
+              <a:t>First one: a </a:t>
+            </a:r>
+            <a:r>
+              <a:t>malformed batch</a:t>
+            </a:r>
+            <a:r>
+              <a:rPr lang="en-GB"/>
+              <a:t> identifier</a:t>
+            </a:r>
+            <a:r>
+              <a:t>.</a:t>
+            </a:r>
+            <a:endParaRPr lang="en-GB"/>
+          </a:p>
+          <a:p>
+            <a:r>
+              <a:rPr lang="en-GB"/>
+              <a:t>Look at </a:t>
+            </a:r>
+            <a:r>
+              <a:t>the argument </a:t>
+            </a:r>
+            <a:r>
+              <a:rPr lang="en-GB"/>
+              <a:t>that went out, </a:t>
+            </a:r>
+            <a:r>
+              <a:t>and </a:t>
+            </a:r>
+            <a:r>
+              <a:rPr lang="en-GB"/>
+              <a:t>look at the error flag coming back from the tool itself</a:t>
+            </a:r>
+            <a:r>
+              <a:t>.</a:t>
+            </a:r>
+          </a:p>
+          <a:p>
+            <a:r>
+              <a:rPr lang="en-GB"/>
+              <a:t>So — would changing the </a:t>
+            </a:r>
+            <a:r>
+              <a:t>prompt fix this</a:t>
+            </a:r>
+            <a:r>
+              <a:rPr lang="en-GB"/>
+              <a:t>?</a:t>
+            </a:r>
+          </a:p>
+          <a:p>
+            <a:r>
+              <a:rPr lang="en-GB"/>
+              <a:t>No. It wouldn't. The tool was called with an invalid identifier, you fix </a:t>
+            </a:r>
+            <a:r>
+              <a:t>the argument</a:t>
+            </a:r>
+            <a:r>
+              <a:rPr lang="en-GB"/>
+              <a:t> and you re-run the read</a:t>
+            </a:r>
+            <a:r>
+              <a:t>.</a:t>
+            </a:r>
+            <a:endParaRPr lang="en-GB"/>
+          </a:p>
+          <a:p>
+            <a:r>
+              <a:rPr lang="en-GB"/>
+              <a:t>Treating a schema violation as a prompt problem is </a:t>
+            </a:r>
+            <a:r>
+              <a:t>the </a:t>
+            </a:r>
+            <a:r>
+              <a:rPr lang="en-GB"/>
+              <a:t>single most common wrong turn I see teams take, and it costs weeks.</a:t>
+            </a:r>
+          </a:p>
+          <a:p>
+            <a:r>
+              <a:rPr lang="en-GB"/>
+              <a:t>Second one, and it looks superficially identical</a:t>
+            </a:r>
+            <a:r>
+              <a:t>.</a:t>
+            </a:r>
+            <a:endParaRPr lang="en-GB"/>
+          </a:p>
+          <a:p>
+            <a:r>
+              <a:rPr lang="en-GB"/>
+              <a:t>This is a </a:t>
+            </a:r>
+            <a:r>
+              <a:t>schema-valid quarantine </a:t>
+            </a:r>
+            <a:r>
+              <a:rPr lang="en-GB"/>
+              <a:t>request carrying </a:t>
+            </a:r>
+            <a:r>
+              <a:t>an invalid approval credential.</a:t>
+            </a:r>
+            <a:endParaRPr lang="en-GB"/>
+          </a:p>
+          <a:p>
+            <a:r>
+              <a:rPr lang="en-GB"/>
+              <a:t>The shape of the request is perfectly fine. Should it </a:t>
+            </a:r>
+            <a:r>
+              <a:t>succeed</a:t>
+            </a:r>
+            <a:r>
+              <a:rPr lang="en-GB"/>
+              <a:t>?</a:t>
+            </a:r>
             <a:endParaRPr/>
           </a:p>
           <a:p>
             <a:r>
-              <a:t>SAY: "Asha can't act on an unexplained failure. But retrying everything isn't a recovery</a:t>
-            </a:r>
-          </a:p>
-          <a:p>
-            <a:r>
-              <a:t>strategy. We need to know which layer rejected the request and whether anything changed."</a:t>
-            </a:r>
-          </a:p>
-          <a:p>
+              <a:rPr lang="en-GB"/>
+              <a:t>It shouldn't</a:t>
+            </a:r>
+            <a:r>
+              <a:t>, and </a:t>
+            </a:r>
+            <a:r>
+              <a:rPr lang="en-GB"/>
+              <a:t>it doesn't — but the important part is the next line, where I re-read </a:t>
+            </a:r>
+            <a:r>
+              <a:t>the inventory </a:t>
+            </a:r>
+            <a:r>
+              <a:rPr lang="en-GB"/>
+              <a:t>and prove nothing changed</a:t>
+            </a:r>
+            <a:r>
+              <a:t>.</a:t>
+            </a:r>
+            <a:endParaRPr lang="en-GB"/>
+          </a:p>
+          <a:p>
+            <a:r>
+              <a:rPr lang="en-GB"/>
+              <a:t>Valid input</a:t>
+            </a:r>
+            <a:r>
+              <a:t>, </a:t>
+            </a:r>
+            <a:r>
+              <a:rPr lang="en-GB"/>
+              <a:t>missing </a:t>
+            </a:r>
+            <a:r>
+              <a:t>authority.</a:t>
+            </a:r>
+            <a:r>
+              <a:rPr lang="en-GB"/>
+              <a:t> Completely different owner, completely different fix.</a:t>
+            </a:r>
+          </a:p>
+          <a:p>
+            <a:r>
+              <a:rPr lang="en-GB"/>
+              <a:t>And a </a:t>
+            </a:r>
+            <a:r>
+              <a:t>retry with </a:t>
+            </a:r>
+            <a:r>
+              <a:rPr lang="en-GB"/>
+              <a:t>that </a:t>
+            </a:r>
+            <a:r>
+              <a:t>same </a:t>
+            </a:r>
+            <a:r>
+              <a:rPr lang="en-GB"/>
+              <a:t>bad credential must never, under any circumstances, converge on </a:t>
+            </a:r>
+            <a:r>
+              <a:t>a </a:t>
+            </a:r>
+            <a:r>
+              <a:rPr lang="en-GB"/>
+              <a:t>successful </a:t>
+            </a:r>
+            <a:r>
+              <a:t>write.</a:t>
+            </a:r>
+          </a:p>
+          <a:p>
+            <a:r>
+              <a:rPr lang="en-GB"/>
+              <a:t>Third class: the tool result is correct but the final </a:t>
+            </a:r>
+            <a:r>
+              <a:t>brief</a:t>
+            </a:r>
+            <a:r>
+              <a:rPr lang="en-GB"/>
+              <a:t> is wrong</a:t>
+            </a:r>
+            <a:r>
+              <a:t>.</a:t>
+            </a:r>
+            <a:endParaRPr lang="en-GB"/>
+          </a:p>
+          <a:p>
+            <a:r>
+              <a:rPr lang="en-GB"/>
+              <a:t>Then you check the tool output</a:t>
+            </a:r>
+            <a:r>
+              <a:t>, </a:t>
+            </a:r>
+            <a:r>
+              <a:rPr lang="en-GB"/>
+              <a:t>then the </a:t>
+            </a:r>
+            <a:r>
+              <a:t>handoff</a:t>
+            </a:r>
+            <a:r>
+              <a:rPr lang="en-GB"/>
+              <a:t> payload, then the synthesis, in that order, and you stop at </a:t>
+            </a:r>
+            <a:r>
+              <a:t>the first divergence</a:t>
+            </a:r>
+            <a:r>
+              <a:rPr lang="en-GB"/>
+              <a:t>.</a:t>
+            </a:r>
             <a:endParaRPr/>
           </a:p>
           <a:p>
             <a:r>
-              <a:t>ACTION: Return to the inspection output from slide 4. Locate its malformed batch request.</a:t>
-            </a:r>
-          </a:p>
-          <a:p>
-            <a:r>
-              <a:t>Show the actual argument and isError result, not just a screenshot of an error banner.</a:t>
-            </a:r>
-          </a:p>
-          <a:p>
+              <a:rPr lang="en-GB"/>
+              <a:t>One practical note, because this is where people lose hours.</a:t>
+            </a:r>
+          </a:p>
+          <a:p>
+            <a:r>
+              <a:rPr lang="en-GB"/>
+              <a:t>Learn to tell an MCP error result from an HTTP status from an SDK exception.</a:t>
+            </a:r>
+          </a:p>
+          <a:p>
+            <a:r>
+              <a:rPr lang="en-GB"/>
+              <a:t>Three layers, three owners, three different fixes.</a:t>
+            </a:r>
+          </a:p>
+          <a:p>
+            <a:r>
+              <a:rPr lang="en-GB"/>
+              <a:t>And on logging — log the tool name</a:t>
+            </a:r>
+            <a:r>
+              <a:t>, </a:t>
+            </a:r>
+            <a:r>
+              <a:rPr lang="en-GB"/>
+              <a:t>the sanitised arguments</a:t>
+            </a:r>
+            <a:r>
+              <a:t>, </a:t>
+            </a:r>
+            <a:r>
+              <a:rPr lang="en-GB"/>
+              <a:t>the outcome and the duration</a:t>
+            </a:r>
+            <a:r>
+              <a:t>.</a:t>
+            </a:r>
+            <a:endParaRPr lang="en-GB"/>
+          </a:p>
+          <a:p>
+            <a:r>
+              <a:rPr lang="en-GB"/>
+              <a:t>Never log a reusable approval credential</a:t>
+            </a:r>
+            <a:r>
+              <a:t>.</a:t>
+            </a:r>
+          </a:p>
+          <a:p>
+            <a:r>
+              <a:rPr lang="en-GB"/>
+              <a:t>What I'm not showing you today is timeouts, lost responses and cross-replica recovery. Those are real production test requirements and we'll come to them.</a:t>
+            </a:r>
+          </a:p>
+          <a:p>
+            <a:r>
+              <a:rPr lang="en-GB"/>
+              <a:t>Classify the failure, fix the layer that owns it, then go and inspect the state.</a:t>
+            </a:r>
+          </a:p>
+          <a:p>
+            <a:r>
+              <a:rPr lang="en-GB"/>
+              <a:t>Because the brief is only ever a recommendation</a:t>
+            </a:r>
+            <a:r>
+              <a:t>. </a:t>
+            </a:r>
+            <a:r>
+              <a:rPr lang="en-GB"/>
+              <a:t>Asha still owns the decision.</a:t>
+            </a:r>
             <a:endParaRPr/>
-          </a:p>
-          <a:p>
-            <a:r>
-              <a:t>ASK: "Would changing the prompt fix this input?"</a:t>
-            </a:r>
-          </a:p>
-          <a:p>
-            <a:r>
-              <a:t>SAY: "The tool was called with an invalid identifier. Correct the argument and validate</a:t>
-            </a:r>
-          </a:p>
-          <a:p>
-            <a:r>
-              <a:t>the corrected read. This isn't evidence that the model needs a more forceful instruction."</a:t>
-            </a:r>
-          </a:p>
-          <a:p>
-            <a:endParaRPr/>
-          </a:p>
-          <a:p>
-            <a:r>
-              <a:t>ACTION: Contrast the malformed request with the earlier valid read. If repeating the script,</a:t>
-            </a:r>
-          </a:p>
-          <a:p>
-            <a:r>
-              <a:t>state that it creates a new isolated server; it is not continuing the previous process state.</a:t>
-            </a:r>
-          </a:p>
-          <a:p>
-            <a:endParaRPr/>
-          </a:p>
-          <a:p>
-            <a:r>
-              <a:t>ACTION: Show the schema-valid quarantine request with an invalid approval credential.</a:t>
-            </a:r>
-          </a:p>
-          <a:p>
-            <a:r>
-              <a:t>ASK: "The credential has the right shape. Should the action succeed?"</a:t>
-            </a:r>
-          </a:p>
-          <a:p>
-            <a:r>
-              <a:t>Pause, then reveal the policy denial and the follow-up read proving unchanged inventory</a:t>
-            </a:r>
-          </a:p>
-          <a:p>
-            <a:r>
-              <a:t>within that inspection run. No usable approval credential is created by this test.</a:t>
-            </a:r>
-          </a:p>
-          <a:p>
-            <a:endParaRPr/>
-          </a:p>
-          <a:p>
-            <a:r>
-              <a:t>SAY: "That is a different failure. The input shape is acceptable, but the operation lacks</a:t>
-            </a:r>
-          </a:p>
-          <a:p>
-            <a:r>
-              <a:t>authority. A retry with the same invalid approval should not turn into a successful write.</a:t>
-            </a:r>
-          </a:p>
-          <a:p>
-            <a:endParaRPr/>
-          </a:p>
-          <a:p>
-            <a:r>
-              <a:t>Now suppose the inventory result is correct but the final brief is wrong. That's a</a:t>
-            </a:r>
-          </a:p>
-          <a:p>
-            <a:r>
-              <a:t>diagnostic comparison, not an incident we're pretending happened today. Check the handoff</a:t>
-            </a:r>
-          </a:p>
-          <a:p>
-            <a:r>
-              <a:t>and synthesis after checking the tool. Start with the first divergence."</a:t>
-            </a:r>
-          </a:p>
-          <a:p>
-            <a:endParaRPr/>
-          </a:p>
-          <a:p>
-            <a:r>
-              <a:t>POINT: If slide 6 produced a real matching trace, compare one input, result and final claim.</a:t>
-            </a:r>
-          </a:p>
-          <a:p>
-            <a:r>
-              <a:t>Otherwise stay with observed terminal evidence and explain the debugging order. Timeouts,</a:t>
-            </a:r>
-          </a:p>
-          <a:p>
-            <a:r>
-              <a:t>lost responses and cross-replica recovery are production test requirements, not shown here.</a:t>
-            </a:r>
-          </a:p>
-          <a:p>
-            <a:endParaRPr/>
-          </a:p>
-          <a:p>
-            <a:r>
-              <a:t>CHECK: Distinguish MCP isError from a browser API HTTP status and an SDK exception.</a:t>
-            </a:r>
-          </a:p>
-          <a:p>
-            <a:r>
-              <a:t>Log names, sanitised arguments, outcomes and duration; never reusable approval credentials.</a:t>
-            </a:r>
-          </a:p>
-          <a:p>
-            <a:r>
-              <a:t>FALLBACK: Use script source and test assertions, labelled "expected behaviour, not a live pass".</a:t>
-            </a:r>
-          </a:p>
-          <a:p>
-            <a:r>
-              <a:t>LESSON: Classify the failure, fix the owning layer, and inspect the state afterwards.</a:t>
-            </a:r>
-          </a:p>
-          <a:p>
-            <a:r>
-              <a:t>TRANSITION: "The brief is a recommendation. Asha still owns the decision to act."</a:t>
-            </a:r>
           </a:p>
         </p:txBody>
       </p:sp>
@@ -947,25 +1465,27 @@
           <a:lstStyle/>
           <a:p>
             <a:r>
-              <a:t>DEMO BREAK 04: Give authority to the person.</a:t>
-            </a:r>
-          </a:p>
-          <a:p>
-            <a:endParaRPr/>
-          </a:p>
-          <a:p>
-            <a:r>
-              <a:t>ACTION: Switch to the prepared Hosted Control Tower.</a:t>
-            </a:r>
-          </a:p>
-          <a:p>
-            <a:r>
-              <a:t>PURPOSE: Move from recommendation to an authenticated, application-controlled action.</a:t>
-            </a:r>
-          </a:p>
-          <a:p>
-            <a:r>
-              <a:t>Do not advance until the demonstration surface is ready. Use the scripted fallback if live evidence is unavailable.</a:t>
+              <a:rPr lang="en-GB"/>
+              <a:t>Demo four. Now we hand the </a:t>
+            </a:r>
+            <a:r>
+              <a:t>authority to the person.</a:t>
+            </a:r>
+          </a:p>
+          <a:p>
+            <a:r>
+              <a:rPr lang="en-GB"/>
+              <a:t>This is where a recommendation turns into </a:t>
+            </a:r>
+            <a:r>
+              <a:t>an authenticated, application-controlled </a:t>
+            </a:r>
+            <a:r>
+              <a:rPr lang="en-GB"/>
+              <a:t>action</a:t>
+            </a:r>
+            <a:r>
+              <a:t>.</a:t>
             </a:r>
           </a:p>
         </p:txBody>
@@ -1035,116 +1555,246 @@
           <a:lstStyle/>
           <a:p>
             <a:r>
-              <a:t>TIME: 13:00-16:00. Authenticated controls following the live hosted assessment.</a:t>
-            </a:r>
-          </a:p>
-          <a:p>
+              <a:rPr lang="en-GB"/>
+              <a:t>We're in the same </a:t>
+            </a:r>
+            <a:r>
+              <a:t>session</a:t>
+            </a:r>
+            <a:r>
+              <a:rPr lang="en-GB"/>
+              <a:t>, with the same </a:t>
+            </a:r>
+            <a:r>
+              <a:t>brief</a:t>
+            </a:r>
+            <a:r>
+              <a:rPr lang="en-GB"/>
+              <a:t> we got a few minutes ago</a:t>
+            </a:r>
+            <a:r>
+              <a:t>.</a:t>
+            </a:r>
+            <a:endParaRPr lang="en-GB"/>
+          </a:p>
+          <a:p>
+            <a:r>
+              <a:rPr lang="en-GB"/>
+              <a:t>And now</a:t>
+            </a:r>
+            <a:r>
+              <a:t> </a:t>
+            </a:r>
+            <a:r>
+              <a:rPr lang="en-GB"/>
+              <a:t>we're testing </a:t>
+            </a:r>
+            <a:r>
+              <a:t>authority and state</a:t>
+            </a:r>
+            <a:r>
+              <a:rPr lang="en-GB"/>
+              <a:t> — we are </a:t>
+            </a:r>
+            <a:r>
+              <a:t>not </a:t>
+            </a:r>
+            <a:r>
+              <a:rPr lang="en-GB"/>
+              <a:t>asking a model to approve </a:t>
+            </a:r>
+            <a:r>
+              <a:t>its own </a:t>
+            </a:r>
+            <a:r>
+              <a:rPr lang="en-GB"/>
+              <a:t>output</a:t>
+            </a:r>
+            <a:r>
+              <a:t>.</a:t>
+            </a:r>
+          </a:p>
+          <a:p>
+            <a:r>
+              <a:rPr lang="en-GB"/>
+              <a:t>The model-facing </a:t>
+            </a:r>
+            <a:r>
+              <a:t>tools are read-only</a:t>
+            </a:r>
+            <a:r>
+              <a:rPr lang="en-GB"/>
+              <a:t>, and the approval lives in </a:t>
+            </a:r>
+            <a:r>
+              <a:t>application policy</a:t>
+            </a:r>
+            <a:r>
+              <a:rPr lang="en-GB"/>
+              <a:t>.</a:t>
+            </a:r>
+          </a:p>
+          <a:p>
+            <a:r>
+              <a:rPr lang="en-GB"/>
+              <a:t>Not in a second </a:t>
+            </a:r>
+            <a:r>
+              <a:t>model </a:t>
+            </a:r>
+            <a:r>
+              <a:rPr lang="en-GB"/>
+              <a:t>casting a </a:t>
+            </a:r>
+            <a:r>
+              <a:t>vote</a:t>
+            </a:r>
+            <a:r>
+              <a:rPr lang="en-GB"/>
+              <a:t>. And definitely not in a greyed-out button, because a greyed-out </a:t>
+            </a:r>
+            <a:r>
+              <a:t>button</a:t>
+            </a:r>
+            <a:r>
+              <a:rPr lang="en-GB"/>
+              <a:t> enforces nothing</a:t>
+            </a:r>
+            <a:r>
+              <a:t>.</a:t>
+            </a:r>
+          </a:p>
+          <a:p>
+            <a:r>
+              <a:rPr lang="en-GB"/>
+              <a:t>One honest detail while this loads: </a:t>
+            </a:r>
+            <a:r>
+              <a:t>the </a:t>
+            </a:r>
+            <a:r>
+              <a:rPr lang="en-GB"/>
+              <a:t>authenticated </a:t>
+            </a:r>
+            <a:r>
+              <a:t>approver </a:t>
+            </a:r>
+            <a:r>
+              <a:rPr lang="en-GB"/>
+              <a:t>field shows me</a:t>
+            </a:r>
+            <a:r>
+              <a:t>, </a:t>
+            </a:r>
+            <a:r>
+              <a:rPr lang="en-GB"/>
+              <a:t>the signed-in presenter. It isn't the </a:t>
+            </a:r>
+            <a:r>
+              <a:t>fictional Asha.</a:t>
+            </a:r>
+          </a:p>
+          <a:p>
+            <a:r>
+              <a:rPr lang="en-GB"/>
+              <a:t>There's one submit here — it approves and it quarantines. There's no second button to press.</a:t>
+            </a:r>
+          </a:p>
+          <a:p>
+            <a:r>
+              <a:rPr lang="en-GB"/>
+              <a:t>And now watch the quarantine evidence.</a:t>
+            </a:r>
+          </a:p>
+          <a:p>
+            <a:r>
+              <a:rPr lang="en-GB"/>
+              <a:t>Four </a:t>
+            </a:r>
+            <a:r>
+              <a:t>positions changed</a:t>
+            </a:r>
+            <a:r>
+              <a:rPr lang="en-GB"/>
+              <a:t>. Two thousand one hundred and ninety-six </a:t>
+            </a:r>
+            <a:r>
+              <a:t>units processed</a:t>
+            </a:r>
+            <a:r>
+              <a:rPr lang="en-GB"/>
+              <a:t>.</a:t>
+            </a:r>
+          </a:p>
+          <a:p>
+            <a:r>
+              <a:rPr lang="en-GB"/>
+              <a:t>Latest </a:t>
+            </a:r>
+            <a:r>
+              <a:t>replay </a:t>
+            </a:r>
+            <a:r>
+              <a:rPr lang="en-GB"/>
+              <a:t>says not recorded, because we haven't replayed it yet.</a:t>
+            </a:r>
+          </a:p>
+          <a:p>
+            <a:r>
+              <a:rPr lang="en-GB"/>
+              <a:t>The transition I care about on this slide is the one from recommendation to authorised operation</a:t>
+            </a:r>
+            <a:r>
+              <a:t>.</a:t>
+            </a:r>
+          </a:p>
+          <a:p>
+            <a:r>
+              <a:rPr lang="en-GB"/>
+              <a:t>And the reason it holds is that the application checks permission </a:t>
+            </a:r>
+            <a:r>
+              <a:t>even when a caller </a:t>
+            </a:r>
+            <a:r>
+              <a:rPr lang="en-GB"/>
+              <a:t>goes around </a:t>
+            </a:r>
+            <a:r>
+              <a:t>the </a:t>
+            </a:r>
+            <a:r>
+              <a:rPr lang="en-GB"/>
+              <a:t>interface completely</a:t>
+            </a:r>
+            <a:r>
+              <a:t>.</a:t>
+            </a:r>
+            <a:endParaRPr lang="en-GB"/>
+          </a:p>
+          <a:p>
+            <a:r>
+              <a:rPr lang="en-GB"/>
+              <a:t>That's the difference between a control and </a:t>
+            </a:r>
+            <a:r>
+              <a:t>a </a:t>
+            </a:r>
+            <a:r>
+              <a:rPr lang="en-GB"/>
+              <a:t>convention</a:t>
+            </a:r>
+            <a:r>
+              <a:t>.</a:t>
+            </a:r>
+            <a:endParaRPr lang="en-GB"/>
+          </a:p>
+          <a:p>
+            <a:r>
+              <a:rPr lang="en-GB"/>
+              <a:t>But what if Asha presses that button again? Or the response never reaches her at all?</a:t>
+            </a:r>
             <a:endParaRPr/>
-          </a:p>
-          <a:p>
-            <a:r>
-              <a:t>SAY: "We return to the same hosted Control Tower session and the brief we just received.</a:t>
-            </a:r>
-          </a:p>
-          <a:p>
-            <a:r>
-              <a:t>Now we're testing authority and state, not asking the model to approve its own advice.</a:t>
-            </a:r>
-          </a:p>
-          <a:p>
-            <a:endParaRPr/>
-          </a:p>
-          <a:p>
-            <a:r>
-              <a:t>The model-facing tools are read-only. Asha's approval belongs to the application policy,</a:t>
-            </a:r>
-          </a:p>
-          <a:p>
-            <a:r>
-              <a:t>not to another model vote. A disabled button alone would not enforce that policy."</a:t>
-            </a:r>
-          </a:p>
-          <a:p>
-            <a:endParaRPr/>
-          </a:p>
-          <a:p>
-            <a:r>
-              <a:t>ACTION: Return to the same hosted tab, without resetting or starting another assessment.</a:t>
-            </a:r>
-          </a:p>
-          <a:p>
-            <a:r>
-              <a:t>Verify the real response ID and available inventory. Select Approve quarantine. Inspect</a:t>
-            </a:r>
-          </a:p>
-          <a:p>
-            <a:r>
-              <a:t>the read-only Authenticated approver field: this is the signed-in presenter, not fictional Asha.</a:t>
-            </a:r>
-          </a:p>
-          <a:p>
-            <a:r>
-              <a:t>Submission approves and quarantines; there is no second action button. Keep credentials</a:t>
-            </a:r>
-          </a:p>
-          <a:p>
-            <a:r>
-              <a:t>off-screen. The terminal denial on slide 7 proves its own policy path, not deployed EasyAuth.</a:t>
-            </a:r>
-          </a:p>
-          <a:p>
-            <a:endParaRPr/>
-          </a:p>
-          <a:p>
-            <a:r>
-              <a:t>CHECK: Under Quarantine evidence, First authorised call reports four positions changed</a:t>
-            </a:r>
-          </a:p>
-          <a:p>
-            <a:r>
-              <a:t>and 2196 units processed. Latest replay is Not recorded until observed. Inspect the audit.</a:t>
-            </a:r>
-          </a:p>
-          <a:p>
-            <a:r>
-              <a:t>If the counts differ, diagnose or use the fallback; don't narrate expected success.</a:t>
-            </a:r>
-          </a:p>
-          <a:p>
-            <a:endParaRPr/>
-          </a:p>
-          <a:p>
-            <a:r>
-              <a:t>SAY: "The important transition is from recommendation to an authorised operation.</a:t>
-            </a:r>
-          </a:p>
-          <a:p>
-            <a:r>
-              <a:t>The application checks permission even when a caller bypasses the normal interface."</a:t>
-            </a:r>
-          </a:p>
-          <a:p>
-            <a:endParaRPr/>
-          </a:p>
-          <a:p>
-            <a:r>
-              <a:t>FALLBACK: Use the saved view only as illustration, with the expected transition stated</a:t>
-            </a:r>
-          </a:p>
-          <a:p>
-            <a:r>
-              <a:t>explicitly. Do not claim today's operation passed. End by 16:00.</a:t>
-            </a:r>
-          </a:p>
-          <a:p>
-            <a:r>
-              <a:t>LESSON: Approval is an enforceable action policy, not a persuasive sentence.</a:t>
-            </a:r>
-          </a:p>
-          <a:p>
-            <a:r>
-              <a:t>TRANSITION: "But what if Asha presses again, or the first response never reaches her?"</a:t>
-            </a:r>
           </a:p>
         </p:txBody>
       </p:sp>
@@ -1213,25 +1863,27 @@
           <a:lstStyle/>
           <a:p>
             <a:r>
-              <a:t>DEMO BREAK 05: Prove the outcome.</a:t>
-            </a:r>
-          </a:p>
-          <a:p>
-            <a:endParaRPr/>
-          </a:p>
-          <a:p>
-            <a:r>
-              <a:t>ACTION: Switch to the prepared Hosted Control Tower.</a:t>
-            </a:r>
-          </a:p>
-          <a:p>
-            <a:r>
-              <a:t>PURPOSE: Replay the operation and compare the state change with the audit evidence.</a:t>
-            </a:r>
-          </a:p>
-          <a:p>
-            <a:r>
-              <a:t>Do not advance until the demonstration surface is ready. Use the scripted fallback if live evidence is unavailable.</a:t>
+              <a:rPr lang="en-GB"/>
+              <a:t>Demo five, the last one. Let's prove </a:t>
+            </a:r>
+            <a:r>
+              <a:t>the outcome.</a:t>
+            </a:r>
+          </a:p>
+          <a:p>
+            <a:r>
+              <a:rPr lang="en-GB"/>
+              <a:t>We're going to replay that operation and compare what changed against </a:t>
+            </a:r>
+            <a:r>
+              <a:t>the audit</a:t>
+            </a:r>
+            <a:r>
+              <a:rPr lang="en-GB"/>
+              <a:t> record</a:t>
+            </a:r>
+            <a:r>
+              <a:t>.</a:t>
             </a:r>
           </a:p>
         </p:txBody>
@@ -1301,105 +1953,213 @@
           <a:lstStyle/>
           <a:p>
             <a:r>
-              <a:t>TIME: 16:00-17:00. Evidence: replay and audit.</a:t>
-            </a:r>
-          </a:p>
-          <a:p>
-            <a:endParaRPr/>
-          </a:p>
-          <a:p>
-            <a:r>
-              <a:t>ACTION: Keep the same hosted browser tab open. Select Replay</a:t>
-            </a:r>
-          </a:p>
-          <a:p>
-            <a:r>
-              <a:t>quarantine after a successful first operation. Compare First authorised call with Latest</a:t>
-            </a:r>
-          </a:p>
-          <a:p>
-            <a:r>
-              <a:t>replay in Quarantine evidence. The latter must report zero positions changed. Both may</a:t>
-            </a:r>
-          </a:p>
-          <a:p>
-            <a:r>
-              <a:t>report 2196 units processed: this count covers the batch, not additional changes. Don't</a:t>
-            </a:r>
-          </a:p>
-          <a:p>
-            <a:r>
-              <a:t>infer success from a badge. Refresh and check the same brief and response ID alongside both</a:t>
-            </a:r>
-          </a:p>
-          <a:p>
-            <a:r>
-              <a:t>results. Hosted evidence is stored in the actor's Blob session; comparison clears on reset,</a:t>
-            </a:r>
-          </a:p>
-          <a:p>
-            <a:r>
-              <a:t>while earlier audit records remain. This rehearsal does not test replica failover.</a:t>
-            </a:r>
-          </a:p>
-          <a:p>
-            <a:endParaRPr/>
-          </a:p>
-          <a:p>
-            <a:r>
-              <a:t>SAY: "Asha needs to know what happened, not merely that the screen looks finished.</a:t>
-            </a:r>
-          </a:p>
-          <a:p>
-            <a:r>
-              <a:t>The first operation changed the positions. The repeated call should change no additional</a:t>
-            </a:r>
-          </a:p>
-          <a:p>
-            <a:r>
-              <a:t>positions. That's the business effect we check.</a:t>
-            </a:r>
-          </a:p>
-          <a:p>
-            <a:endParaRPr/>
-          </a:p>
-          <a:p>
-            <a:r>
-              <a:t>Different response counts can be correct: they describe new changes. This demonstrates</a:t>
-            </a:r>
-          </a:p>
-          <a:p>
-            <a:r>
-              <a:t>replay and refresh for this hosted session, not every restart or cross-replica failure mode."</a:t>
-            </a:r>
-          </a:p>
-          <a:p>
-            <a:endParaRPr/>
-          </a:p>
-          <a:p>
-            <a:r>
-              <a:t>CHECK: First mutation, zero additional mutation, audit without a reusable token.</a:t>
-            </a:r>
-          </a:p>
-          <a:p>
-            <a:r>
-              <a:t>FALLBACK: If the first action failed, don't attempt to present a replay as proof. Explain</a:t>
-            </a:r>
-          </a:p>
-          <a:p>
-            <a:r>
-              <a:t>the acceptance criterion using the slide's explicitly labelled expected results.</a:t>
-            </a:r>
-          </a:p>
-          <a:p>
-            <a:r>
-              <a:t>LESSON: Check state transitions and replay effects independently of generated prose.</a:t>
-            </a:r>
-          </a:p>
-          <a:p>
-            <a:r>
-              <a:t>TRANSITION: "Let's add the conditions a real operation would face."</a:t>
-            </a:r>
+              <a:rPr lang="en-GB"/>
+              <a:t>The screen looking finished is not </a:t>
+            </a:r>
+            <a:r>
+              <a:rPr dirty="0"/>
+              <a:t>the </a:t>
+            </a:r>
+            <a:r>
+              <a:rPr lang="en-GB"/>
+              <a:t>acceptance test</a:t>
+            </a:r>
+            <a:r>
+              <a:rPr dirty="0"/>
+              <a:t>.</a:t>
+            </a:r>
+          </a:p>
+          <a:p>
+            <a:r>
+              <a:rPr lang="en-GB"/>
+              <a:t>The first authorised </a:t>
+            </a:r>
+            <a:r>
+              <a:rPr dirty="0"/>
+              <a:t>call </a:t>
+            </a:r>
+            <a:r>
+              <a:rPr lang="en-GB"/>
+              <a:t>changed four positions. We saw that.</a:t>
+            </a:r>
+          </a:p>
+          <a:p>
+            <a:r>
+              <a:rPr lang="en-GB"/>
+              <a:t>Now I replay it, and the replay should change </a:t>
+            </a:r>
+            <a:r>
+              <a:rPr dirty="0"/>
+              <a:t>zero </a:t>
+            </a:r>
+            <a:r>
+              <a:rPr lang="en-GB"/>
+              <a:t>additional </a:t>
+            </a:r>
+            <a:r>
+              <a:rPr dirty="0"/>
+              <a:t>positions.</a:t>
+            </a:r>
+            <a:endParaRPr lang="en-GB"/>
+          </a:p>
+          <a:p>
+            <a:r>
+              <a:rPr lang="en-GB"/>
+              <a:t>Here's the subtlety that catches people. </a:t>
+            </a:r>
+            <a:r>
+              <a:rPr dirty="0"/>
+              <a:t>Both </a:t>
+            </a:r>
+            <a:r>
+              <a:rPr lang="en-GB"/>
+              <a:t>of them </a:t>
+            </a:r>
+            <a:r>
+              <a:rPr dirty="0"/>
+              <a:t>may</a:t>
+            </a:r>
+            <a:r>
+              <a:rPr lang="en-GB"/>
+              <a:t> </a:t>
+            </a:r>
+            <a:r>
+              <a:rPr dirty="0"/>
+              <a:t>report </a:t>
+            </a:r>
+            <a:r>
+              <a:rPr lang="en-GB"/>
+              <a:t>two thousand one hundred and ninety-six </a:t>
+            </a:r>
+            <a:r>
+              <a:rPr dirty="0"/>
+              <a:t>units processed</a:t>
+            </a:r>
+            <a:r>
+              <a:rPr lang="en-GB"/>
+              <a:t>, and that's correct.</a:t>
+            </a:r>
+          </a:p>
+          <a:p>
+            <a:r>
+              <a:rPr lang="en-GB"/>
+              <a:t>That count describes </a:t>
+            </a:r>
+            <a:r>
+              <a:rPr dirty="0"/>
+              <a:t>the batch</a:t>
+            </a:r>
+            <a:r>
+              <a:rPr lang="en-GB"/>
+              <a:t> scope</a:t>
+            </a:r>
+            <a:r>
+              <a:rPr dirty="0"/>
+              <a:t>, not </a:t>
+            </a:r>
+            <a:r>
+              <a:rPr lang="en-GB"/>
+              <a:t>new mutations</a:t>
+            </a:r>
+            <a:r>
+              <a:rPr dirty="0"/>
+              <a:t>.</a:t>
+            </a:r>
+            <a:endParaRPr lang="en-GB"/>
+          </a:p>
+          <a:p>
+            <a:r>
+              <a:rPr lang="en-GB"/>
+              <a:t>So read the positions-changed number. Don't read the </a:t>
+            </a:r>
+            <a:r>
+              <a:rPr dirty="0"/>
+              <a:t>badge.</a:t>
+            </a:r>
+            <a:endParaRPr lang="en-GB"/>
+          </a:p>
+          <a:p>
+            <a:r>
+              <a:rPr lang="en-GB"/>
+              <a:t>The audit shows the decision and the outcome, and it hands back no reusable token</a:t>
+            </a:r>
+            <a:r>
+              <a:rPr dirty="0"/>
+              <a:t>.</a:t>
+            </a:r>
+          </a:p>
+          <a:p>
+            <a:r>
+              <a:rPr lang="en-GB"/>
+              <a:t>Let me scope the claim honestly.</a:t>
+            </a:r>
+          </a:p>
+          <a:p>
+            <a:r>
+              <a:rPr lang="en-GB"/>
+              <a:t>This demonstrates </a:t>
+            </a:r>
+            <a:r>
+              <a:rPr dirty="0"/>
+              <a:t>replay </a:t>
+            </a:r>
+            <a:r>
+              <a:rPr lang="en-GB"/>
+              <a:t>and refresh </a:t>
+            </a:r>
+            <a:r>
+              <a:rPr dirty="0"/>
+              <a:t>for </a:t>
+            </a:r>
+            <a:r>
+              <a:rPr lang="en-GB"/>
+              <a:t>one hosted </a:t>
+            </a:r>
+            <a:r>
+              <a:rPr dirty="0"/>
+              <a:t>session</a:t>
+            </a:r>
+            <a:r>
+              <a:rPr lang="en-GB"/>
+              <a:t>.</a:t>
+            </a:r>
+          </a:p>
+          <a:p>
+            <a:r>
+              <a:rPr lang="en-GB"/>
+              <a:t>It does not test a restart, and it does not test replica failover</a:t>
+            </a:r>
+            <a:r>
+              <a:rPr dirty="0"/>
+              <a:t>.</a:t>
+            </a:r>
+          </a:p>
+          <a:p>
+            <a:r>
+              <a:rPr lang="en-GB"/>
+              <a:t>The principle, though, is the one I'd write on the wall.</a:t>
+            </a:r>
+          </a:p>
+          <a:p>
+            <a:r>
+              <a:rPr lang="en-GB"/>
+              <a:t>Measure the business effect</a:t>
+            </a:r>
+            <a:r>
+              <a:rPr dirty="0"/>
+              <a:t>, </a:t>
+            </a:r>
+            <a:r>
+              <a:rPr lang="en-GB"/>
+              <a:t>and measure it independently of the generated prose.</a:t>
+            </a:r>
+          </a:p>
+          <a:p>
+            <a:r>
+              <a:rPr lang="en-GB"/>
+              <a:t>Now let's put real users and real replicas around all of this.</a:t>
+            </a:r>
+            <a:endParaRPr dirty="0"/>
           </a:p>
         </p:txBody>
       </p:sp>
@@ -1468,157 +2228,419 @@
           <a:lstStyle/>
           <a:p>
             <a:r>
-              <a:t>TIME: 17:00-20:00. Three design decisions, each tied to Asha's incident.</a:t>
-            </a:r>
-          </a:p>
-          <a:p>
-            <a:endParaRPr/>
-          </a:p>
-          <a:p>
-            <a:r>
-              <a:t>SAY: "First, who is Asha? Our hosted demo uses the presenter's authenticated identity.</a:t>
-            </a:r>
-          </a:p>
-          <a:p>
-            <a:r>
-              <a:t>Production needs appropriate permission for each batch and action, not just a demo allowlist.</a:t>
-            </a:r>
-          </a:p>
-          <a:p>
-            <a:r>
-              <a:t>The workload also needs least-privilege</a:t>
-            </a:r>
-          </a:p>
-          <a:p>
-            <a:r>
-              <a:t>access. The person who deployed the service isn't necessarily its runtime identity.</a:t>
-            </a:r>
-          </a:p>
-          <a:p>
-            <a:endParaRPr/>
-          </a:p>
-          <a:p>
-            <a:r>
-              <a:t>Second, what survives a retry? Suppose the stock change commits but the response is lost.</a:t>
-            </a:r>
-          </a:p>
-          <a:p>
-            <a:r>
-              <a:t>Another replica receives the retry. The mutation and the idempotency record must be</a:t>
-            </a:r>
-          </a:p>
-          <a:p>
-            <a:r>
-              <a:t>coordinated atomically. Approval scope, expiry, retention and invalidation need explicit rules.</a:t>
-            </a:r>
-          </a:p>
-          <a:p>
-            <a:endParaRPr/>
-          </a:p>
-          <a:p>
-            <a:r>
-              <a:t>Third, what supports release? We need a versioned evidence set: tool tests, policy tests,</a:t>
-            </a:r>
-          </a:p>
-          <a:p>
-            <a:r>
-              <a:t>model evaluations, observed failures, and an available rollback. Hosting the process doesn't</a:t>
-            </a:r>
-          </a:p>
-          <a:p>
-            <a:r>
-              <a:t>establish those guarantees for us."</a:t>
-            </a:r>
-          </a:p>
-          <a:p>
-            <a:endParaRPr/>
-          </a:p>
-          <a:p>
-            <a:r>
-              <a:t>ASK: "Which test would catch the lost-response problem: a prompt evaluation or a state-and-retry test?"</a:t>
-            </a:r>
-          </a:p>
-          <a:p>
-            <a:r>
-              <a:t>Pause and connect the answer to the right ownership boundary.</a:t>
-            </a:r>
-          </a:p>
-          <a:p>
-            <a:endParaRPr/>
-          </a:p>
-          <a:p>
-            <a:r>
-              <a:t>SAY: "The implementation lessons are practical. Incompatible runtime dependencies required</a:t>
-            </a:r>
-          </a:p>
-          <a:p>
-            <a:r>
-              <a:t>an isolated bridge. Child processes need bounded concurrency, timeouts and cleanup.</a:t>
-            </a:r>
-          </a:p>
-          <a:p>
-            <a:r>
-              <a:t>Requests need isolated workflow state. A fluent brief still needs factual evaluation.</a:t>
-            </a:r>
-          </a:p>
-          <a:p>
-            <a:endParaRPr/>
-          </a:p>
-          <a:p>
-            <a:r>
-              <a:t>Those mechanisms can be inspected in source. Calling them production-ready requires</a:t>
-            </a:r>
-          </a:p>
-          <a:p>
-            <a:r>
-              <a:t>failure and integration evidence, not just their presence in code.</a:t>
-            </a:r>
-          </a:p>
-          <a:p>
-            <a:endParaRPr/>
-          </a:p>
-          <a:p>
-            <a:r>
-              <a:t>Governance is equally concrete. If someone changes a tool from read-only to destructive,</a:t>
-            </a:r>
-          </a:p>
-          <a:p>
-            <a:r>
-              <a:t>who reviews its permissions and tests? If external tool text contains instructions, which</a:t>
-            </a:r>
-          </a:p>
-          <a:p>
-            <a:r>
-              <a:t>boundary keeps it from becoming authority? If an evaluation regresses, who stops release?"</a:t>
-            </a:r>
-          </a:p>
-          <a:p>
-            <a:endParaRPr/>
-          </a:p>
-          <a:p>
-            <a:r>
-              <a:t>POINT: This is a production gate checklist, not a claim of current deployed authentication,</a:t>
-            </a:r>
-          </a:p>
-          <a:p>
-            <a:r>
-              <a:t>durable transaction safety, passing hosted evaluation, or observed replica recovery.</a:t>
-            </a:r>
-          </a:p>
-          <a:p>
-            <a:r>
-              <a:t>Keep detailed bridge, identity and transport explanation in the hidden appendices.</a:t>
-            </a:r>
-          </a:p>
-          <a:p>
-            <a:r>
-              <a:t>LESSON: Treat security, observability and governance as testable engineering decisions.</a:t>
-            </a:r>
-          </a:p>
-          <a:p>
-            <a:r>
-              <a:t>TRANSITION: "Now translate those decisions from Asha's workload to yours."</a:t>
-            </a:r>
+              <a:rPr dirty="0"/>
+              <a:t>Three </a:t>
+            </a:r>
+            <a:r>
+              <a:rPr lang="en-GB"/>
+              <a:t>production gates</a:t>
+            </a:r>
+            <a:r>
+              <a:rPr dirty="0"/>
+              <a:t>, </a:t>
+            </a:r>
+            <a:r>
+              <a:rPr lang="en-GB"/>
+              <a:t>and each one falls straight out of Asha's </a:t>
+            </a:r>
+            <a:r>
+              <a:rPr dirty="0"/>
+              <a:t>incident.</a:t>
+            </a:r>
+          </a:p>
+          <a:p>
+            <a:r>
+              <a:rPr lang="en-GB"/>
+              <a:t>First, identity. Who is Asha, really?</a:t>
+            </a:r>
+          </a:p>
+          <a:p>
+            <a:r>
+              <a:rPr lang="en-GB"/>
+              <a:t>Today she's my</a:t>
+            </a:r>
+            <a:r>
+              <a:rPr dirty="0"/>
+              <a:t> </a:t>
+            </a:r>
+            <a:r>
+              <a:rPr lang="en-GB"/>
+              <a:t>signed-in </a:t>
+            </a:r>
+            <a:r>
+              <a:rPr dirty="0"/>
+              <a:t>identity</a:t>
+            </a:r>
+            <a:r>
+              <a:rPr lang="en-GB"/>
+              <a:t>, which is fine for a conference</a:t>
+            </a:r>
+            <a:r>
+              <a:rPr dirty="0"/>
+              <a:t>.</a:t>
+            </a:r>
+            <a:endParaRPr lang="en-GB"/>
+          </a:p>
+          <a:p>
+            <a:r>
+              <a:rPr lang="en-GB"/>
+              <a:t>Production needs approval scoped per </a:t>
+            </a:r>
+            <a:r>
+              <a:rPr dirty="0"/>
+              <a:t>batch and </a:t>
+            </a:r>
+            <a:r>
+              <a:rPr lang="en-GB"/>
+              <a:t>per </a:t>
+            </a:r>
+            <a:r>
+              <a:rPr dirty="0"/>
+              <a:t>action, </a:t>
+            </a:r>
+            <a:r>
+              <a:rPr lang="en-GB"/>
+              <a:t>and it needs a least-privilege workload identity as well</a:t>
+            </a:r>
+            <a:r>
+              <a:rPr dirty="0"/>
+              <a:t>.</a:t>
+            </a:r>
+            <a:endParaRPr lang="en-GB"/>
+          </a:p>
+          <a:p>
+            <a:r>
+              <a:rPr lang="en-GB"/>
+              <a:t>The identity that deployed your service is not the </a:t>
+            </a:r>
+            <a:r>
+              <a:rPr dirty="0"/>
+              <a:t>identity</a:t>
+            </a:r>
+            <a:r>
+              <a:rPr lang="en-GB"/>
+              <a:t> it should run as</a:t>
+            </a:r>
+            <a:r>
+              <a:rPr dirty="0"/>
+              <a:t>.</a:t>
+            </a:r>
+          </a:p>
+          <a:p>
+            <a:r>
+              <a:rPr lang="en-GB"/>
+              <a:t>Second, durability. Picture this: the stock change commits, and then the </a:t>
+            </a:r>
+            <a:r>
+              <a:rPr dirty="0"/>
+              <a:t>response </a:t>
+            </a:r>
+            <a:r>
+              <a:rPr lang="en-GB"/>
+              <a:t>is </a:t>
+            </a:r>
+            <a:r>
+              <a:rPr dirty="0"/>
+              <a:t>lost</a:t>
+            </a:r>
+            <a:r>
+              <a:rPr lang="en-GB"/>
+              <a:t>.</a:t>
+            </a:r>
+          </a:p>
+          <a:p>
+            <a:r>
+              <a:rPr lang="en-GB"/>
+              <a:t>Another </a:t>
+            </a:r>
+            <a:r>
+              <a:rPr dirty="0"/>
+              <a:t>replica </a:t>
+            </a:r>
+            <a:r>
+              <a:rPr lang="en-GB"/>
+              <a:t>picks up </a:t>
+            </a:r>
+            <a:r>
+              <a:rPr dirty="0"/>
+              <a:t>the retry.</a:t>
+            </a:r>
+            <a:endParaRPr lang="en-GB"/>
+          </a:p>
+          <a:p>
+            <a:r>
+              <a:rPr dirty="0"/>
+              <a:t>The mutation and the idempotency record </a:t>
+            </a:r>
+            <a:r>
+              <a:rPr lang="en-GB"/>
+              <a:t>have to commit </a:t>
+            </a:r>
+            <a:r>
+              <a:rPr dirty="0"/>
+              <a:t>atomically</a:t>
+            </a:r>
+            <a:r>
+              <a:rPr lang="en-GB"/>
+              <a:t>, or you'll eventually quarantine the same batch twice.</a:t>
+            </a:r>
+          </a:p>
+          <a:p>
+            <a:r>
+              <a:rPr lang="en-GB"/>
+              <a:t>And the approval itself needs explicit </a:t>
+            </a:r>
+            <a:r>
+              <a:rPr dirty="0"/>
+              <a:t>scope</a:t>
+            </a:r>
+            <a:r>
+              <a:rPr lang="en-GB"/>
+              <a:t>, expiry, retention</a:t>
+            </a:r>
+            <a:r>
+              <a:rPr dirty="0"/>
+              <a:t> and </a:t>
+            </a:r>
+            <a:r>
+              <a:rPr lang="en-GB"/>
+              <a:t>invalidation rules</a:t>
+            </a:r>
+            <a:r>
+              <a:rPr dirty="0"/>
+              <a:t>.</a:t>
+            </a:r>
+          </a:p>
+          <a:p>
+            <a:r>
+              <a:rPr lang="en-GB"/>
+              <a:t>Third, release. You need a versioned evidence set — tool </a:t>
+            </a:r>
+            <a:r>
+              <a:rPr dirty="0"/>
+              <a:t>tests, policy tests,</a:t>
+            </a:r>
+            <a:r>
+              <a:rPr lang="en-GB"/>
+              <a:t> model evaluations</a:t>
+            </a:r>
+            <a:r>
+              <a:rPr dirty="0"/>
+              <a:t>, </a:t>
+            </a:r>
+            <a:r>
+              <a:rPr lang="en-GB"/>
+              <a:t>the failure cases you've actually observed</a:t>
+            </a:r>
+            <a:r>
+              <a:rPr dirty="0"/>
+              <a:t>, and </a:t>
+            </a:r>
+            <a:r>
+              <a:rPr lang="en-GB"/>
+              <a:t>a </a:t>
+            </a:r>
+            <a:r>
+              <a:rPr dirty="0"/>
+              <a:t>rollback</a:t>
+            </a:r>
+            <a:r>
+              <a:rPr lang="en-GB"/>
+              <a:t> you've genuinely exercised</a:t>
+            </a:r>
+            <a:r>
+              <a:rPr dirty="0"/>
+              <a:t>.</a:t>
+            </a:r>
+            <a:endParaRPr lang="en-GB"/>
+          </a:p>
+          <a:p>
+            <a:r>
+              <a:rPr dirty="0"/>
+              <a:t>Hosting </a:t>
+            </a:r>
+            <a:r>
+              <a:rPr lang="en-GB"/>
+              <a:t>the process gives you exactly none of that for free.</a:t>
+            </a:r>
+            <a:endParaRPr dirty="0"/>
+          </a:p>
+          <a:p>
+            <a:r>
+              <a:rPr lang="en-GB"/>
+              <a:t>So, quick one for the room: which of those catches </a:t>
+            </a:r>
+            <a:r>
+              <a:rPr dirty="0"/>
+              <a:t>the </a:t>
+            </a:r>
+            <a:r>
+              <a:rPr lang="en-GB"/>
+              <a:t>lost-response bug — </a:t>
+            </a:r>
+            <a:r>
+              <a:rPr dirty="0"/>
+              <a:t>a prompt </a:t>
+            </a:r>
+            <a:r>
+              <a:rPr lang="en-GB"/>
+              <a:t>evaluation,</a:t>
+            </a:r>
+            <a:r>
+              <a:rPr dirty="0"/>
+              <a:t> or a state-and-retry test</a:t>
+            </a:r>
+            <a:r>
+              <a:rPr lang="en-GB"/>
+              <a:t>?</a:t>
+            </a:r>
+          </a:p>
+          <a:p>
+            <a:r>
+              <a:rPr lang="en-GB"/>
+              <a:t>It's the second, and I think that answer reallocates where a lot of teams are currently spending their effort.</a:t>
+            </a:r>
+          </a:p>
+          <a:p>
+            <a:r>
+              <a:rPr lang="en-GB"/>
+              <a:t>A few implementation lessons worth stealing.</a:t>
+            </a:r>
+          </a:p>
+          <a:p>
+            <a:r>
+              <a:rPr lang="en-GB"/>
+              <a:t>Incompatible runtime dependencies pushed us to an isolated bridge.</a:t>
+            </a:r>
+          </a:p>
+          <a:p>
+            <a:r>
+              <a:rPr lang="en-GB"/>
+              <a:t>Child processes need bounded concurrency, timeouts and cleanup.</a:t>
+            </a:r>
+          </a:p>
+          <a:p>
+            <a:r>
+              <a:rPr lang="en-GB"/>
+              <a:t>And per-request workflow state has to be isolated, or you'll leak one user's evidence into another's brief.</a:t>
+            </a:r>
+            <a:endParaRPr dirty="0"/>
+          </a:p>
+          <a:p>
+            <a:r>
+              <a:rPr dirty="0"/>
+              <a:t>Governance is </a:t>
+            </a:r>
+            <a:r>
+              <a:rPr lang="en-GB"/>
+              <a:t>just as </a:t>
+            </a:r>
+            <a:r>
+              <a:rPr dirty="0"/>
+              <a:t>concrete.</a:t>
+            </a:r>
+            <a:endParaRPr lang="en-GB"/>
+          </a:p>
+          <a:p>
+            <a:r>
+              <a:rPr dirty="0"/>
+              <a:t>If </a:t>
+            </a:r>
+            <a:r>
+              <a:rPr lang="en-GB"/>
+              <a:t>someone changes </a:t>
+            </a:r>
+            <a:r>
+              <a:rPr dirty="0"/>
+              <a:t>a tool from read-only to destructive,</a:t>
+            </a:r>
+            <a:r>
+              <a:rPr lang="en-GB"/>
+              <a:t> </a:t>
+            </a:r>
+            <a:r>
+              <a:rPr dirty="0"/>
+              <a:t>who reviews </a:t>
+            </a:r>
+            <a:r>
+              <a:rPr lang="en-GB"/>
+              <a:t>its permissions and its tests</a:t>
+            </a:r>
+            <a:r>
+              <a:rPr dirty="0"/>
+              <a:t>?</a:t>
+            </a:r>
+            <a:endParaRPr lang="en-GB"/>
+          </a:p>
+          <a:p>
+            <a:r>
+              <a:rPr dirty="0"/>
+              <a:t>If </a:t>
+            </a:r>
+            <a:r>
+              <a:rPr lang="en-GB"/>
+              <a:t>text coming back from an external </a:t>
+            </a:r>
+            <a:r>
+              <a:rPr dirty="0"/>
+              <a:t>tool </a:t>
+            </a:r>
+            <a:r>
+              <a:rPr lang="en-GB"/>
+              <a:t>contains </a:t>
+            </a:r>
+            <a:r>
+              <a:rPr dirty="0"/>
+              <a:t>instructions, </a:t>
+            </a:r>
+            <a:r>
+              <a:rPr lang="en-GB"/>
+              <a:t>which boundary stops that </a:t>
+            </a:r>
+            <a:r>
+              <a:rPr dirty="0"/>
+              <a:t>becoming authority?</a:t>
+            </a:r>
+            <a:endParaRPr lang="en-GB"/>
+          </a:p>
+          <a:p>
+            <a:r>
+              <a:rPr lang="en-GB"/>
+              <a:t>And if an evaluation regresses, who has the power to stop the release?</a:t>
+            </a:r>
+          </a:p>
+          <a:p>
+            <a:r>
+              <a:rPr dirty="0"/>
+              <a:t>This </a:t>
+            </a:r>
+            <a:r>
+              <a:rPr lang="en-GB"/>
+              <a:t>slide </a:t>
+            </a:r>
+            <a:r>
+              <a:rPr dirty="0"/>
+              <a:t>is a checklist, not a claim </a:t>
+            </a:r>
+            <a:r>
+              <a:rPr lang="en-GB"/>
+              <a:t>that I've proved any </a:t>
+            </a:r>
+            <a:r>
+              <a:rPr dirty="0"/>
+              <a:t>of </a:t>
+            </a:r>
+            <a:r>
+              <a:rPr lang="en-GB"/>
+              <a:t>it in front of you today.</a:t>
+            </a:r>
+          </a:p>
+          <a:p>
+            <a:r>
+              <a:rPr lang="en-GB"/>
+              <a:t>So let's take this off my workload and onto yours.</a:t>
+            </a:r>
+            <a:endParaRPr dirty="0"/>
           </a:p>
         </p:txBody>
       </p:sp>
@@ -1687,70 +2709,266 @@
           <a:lstStyle/>
           <a:p>
             <a:r>
-              <a:t>TIME: 20:00-21:00. Reusable lessons, not a tour of the repository.</a:t>
-            </a:r>
-          </a:p>
-          <a:p>
+              <a:rPr lang="en-GB"/>
+              <a:t>Five questions for the </a:t>
+            </a:r>
+            <a:r>
+              <a:t>next </a:t>
+            </a:r>
+            <a:r>
+              <a:rPr lang="en-GB"/>
+              <a:t>agent system you build</a:t>
+            </a:r>
+            <a:r>
+              <a:t>.</a:t>
+            </a:r>
+            <a:endParaRPr lang="en-GB"/>
+          </a:p>
+          <a:p>
+            <a:r>
+              <a:t>What outcome </a:t>
+            </a:r>
+            <a:r>
+              <a:rPr lang="en-GB"/>
+              <a:t>has to </a:t>
+            </a:r>
+            <a:r>
+              <a:t>be correct</a:t>
+            </a:r>
+            <a:r>
+              <a:rPr lang="en-GB"/>
+              <a:t>?</a:t>
+            </a:r>
+          </a:p>
+          <a:p>
+            <a:r>
+              <a:rPr lang="en-GB"/>
+              <a:t>What's </a:t>
+            </a:r>
+            <a:r>
+              <a:t>the smallest workflow that </a:t>
+            </a:r>
+            <a:r>
+              <a:rPr lang="en-GB"/>
+              <a:t>can produce </a:t>
+            </a:r>
+            <a:r>
+              <a:t>it</a:t>
+            </a:r>
+            <a:r>
+              <a:rPr lang="en-GB"/>
+              <a:t>?</a:t>
+            </a:r>
+          </a:p>
+          <a:p>
+            <a:r>
+              <a:t>Which narrow tools expose the evidence</a:t>
+            </a:r>
+            <a:r>
+              <a:rPr lang="en-GB"/>
+              <a:t>?</a:t>
+            </a:r>
+          </a:p>
+          <a:p>
+            <a:r>
+              <a:t>Where </a:t>
+            </a:r>
+            <a:r>
+              <a:rPr lang="en-GB"/>
+              <a:t>will </a:t>
+            </a:r>
+            <a:r>
+              <a:t>you look when </a:t>
+            </a:r>
+            <a:r>
+              <a:rPr lang="en-GB"/>
+              <a:t>the result </a:t>
+            </a:r>
+            <a:r>
+              <a:t>diverges</a:t>
+            </a:r>
+            <a:r>
+              <a:rPr lang="en-GB"/>
+              <a:t>?</a:t>
+            </a:r>
+          </a:p>
+          <a:p>
+            <a:r>
+              <a:rPr lang="en-GB"/>
+              <a:t>And which </a:t>
+            </a:r>
+            <a:r>
+              <a:t>policy </a:t>
+            </a:r>
+            <a:r>
+              <a:rPr lang="en-GB"/>
+              <a:t>gates </a:t>
+            </a:r>
+            <a:r>
+              <a:t>the action</a:t>
+            </a:r>
+            <a:r>
+              <a:rPr lang="en-GB"/>
+              <a:t>?</a:t>
+            </a:r>
             <a:endParaRPr/>
           </a:p>
           <a:p>
             <a:r>
-              <a:t>SAY: "For your next workflow, start with five questions. What outcome must be correct?</a:t>
-            </a:r>
-          </a:p>
-          <a:p>
-            <a:r>
-              <a:t>What is the smallest workflow that can produce it? Which narrow tools expose the evidence?</a:t>
-            </a:r>
-          </a:p>
-          <a:p>
-            <a:r>
-              <a:t>Where will you look when the result diverges? And which policy controls the action?</a:t>
-            </a:r>
-          </a:p>
-          <a:p>
+              <a:rPr lang="en-GB"/>
+              <a:t>We used a product recall, but a refund is exactly </a:t>
+            </a:r>
+            <a:r>
+              <a:t>the same </a:t>
+            </a:r>
+            <a:r>
+              <a:rPr lang="en-GB"/>
+              <a:t>shape.</a:t>
+            </a:r>
+          </a:p>
+          <a:p>
+            <a:r>
+              <a:rPr lang="en-GB"/>
+              <a:t>Find </a:t>
+            </a:r>
+            <a:r>
+              <a:t>the order, gather </a:t>
+            </a:r>
+            <a:r>
+              <a:rPr lang="en-GB"/>
+              <a:t>the </a:t>
+            </a:r>
+            <a:r>
+              <a:t>eligibility</a:t>
+            </a:r>
+            <a:r>
+              <a:rPr lang="en-GB"/>
+              <a:t> evidence</a:t>
+            </a:r>
+            <a:r>
+              <a:t>, </a:t>
+            </a:r>
+            <a:r>
+              <a:rPr lang="en-GB"/>
+              <a:t>prepare the recommendation</a:t>
+            </a:r>
+            <a:r>
+              <a:t>, authorise</a:t>
+            </a:r>
+            <a:r>
+              <a:rPr lang="en-GB"/>
+              <a:t> the refund</a:t>
+            </a:r>
+            <a:r>
+              <a:t>, </a:t>
+            </a:r>
+            <a:r>
+              <a:rPr lang="en-GB"/>
+              <a:t>and </a:t>
+            </a:r>
+            <a:r>
+              <a:t>prove </a:t>
+            </a:r>
+            <a:r>
+              <a:rPr lang="en-GB"/>
+              <a:t>that a retry doesn't </a:t>
+            </a:r>
+            <a:r>
+              <a:t>pay </a:t>
+            </a:r>
+            <a:r>
+              <a:rPr lang="en-GB"/>
+              <a:t>the customer </a:t>
+            </a:r>
+            <a:r>
+              <a:t>twice.</a:t>
+            </a:r>
+          </a:p>
+          <a:p>
+            <a:r>
+              <a:t>MCP </a:t>
+            </a:r>
+            <a:r>
+              <a:rPr lang="en-GB"/>
+              <a:t>gives you a common </a:t>
+            </a:r>
+            <a:r>
+              <a:t>tool contract.</a:t>
+            </a:r>
+            <a:endParaRPr lang="en-GB"/>
+          </a:p>
+          <a:p>
+            <a:r>
+              <a:t>It doesn't remove </a:t>
+            </a:r>
+            <a:r>
+              <a:rPr lang="en-GB"/>
+              <a:t>a single one of those five </a:t>
+            </a:r>
+            <a:r>
+              <a:t>decisions</a:t>
+            </a:r>
+            <a:r>
+              <a:rPr lang="en-GB"/>
+              <a:t>.</a:t>
+            </a:r>
+          </a:p>
+          <a:p>
+            <a:r>
+              <a:rPr lang="en-GB"/>
+              <a:t>What </a:t>
+            </a:r>
+            <a:r>
+              <a:t>it </a:t>
+            </a:r>
+            <a:r>
+              <a:rPr lang="en-GB"/>
+              <a:t>does give you is </a:t>
+            </a:r>
+            <a:r>
+              <a:t>a </a:t>
+            </a:r>
+            <a:r>
+              <a:rPr lang="en-GB"/>
+              <a:t>clearer, more testable </a:t>
+            </a:r>
+            <a:r>
+              <a:t>place to make them.</a:t>
+            </a:r>
+          </a:p>
+          <a:p>
+            <a:r>
+              <a:rPr lang="en-GB"/>
+              <a:t>So please take </a:t>
+            </a:r>
+            <a:r>
+              <a:t>the decisions</a:t>
+            </a:r>
+            <a:r>
+              <a:rPr lang="en-GB"/>
+              <a:t> home with you</a:t>
+            </a:r>
+            <a:r>
+              <a:t>, </a:t>
+            </a:r>
+            <a:r>
+              <a:rPr lang="en-GB"/>
+              <a:t>rather than </a:t>
+            </a:r>
+            <a:r>
+              <a:t>the component names</a:t>
+            </a:r>
+            <a:r>
+              <a:rPr lang="en-GB"/>
+              <a:t>.</a:t>
+            </a:r>
+          </a:p>
+          <a:p>
+            <a:r>
+              <a:rPr lang="en-GB"/>
+              <a:t>Let's go back to where Asha started.</a:t>
+            </a:r>
             <a:endParaRPr/>
-          </a:p>
-          <a:p>
-            <a:r>
-              <a:t>We used a recall, but a refund follows the same logic. Find the order, gather eligibility</a:t>
-            </a:r>
-          </a:p>
-          <a:p>
-            <a:r>
-              <a:t>evidence, prepare the recommendation, authorise the refund, and prove a retry won't pay twice.</a:t>
-            </a:r>
-          </a:p>
-          <a:p>
-            <a:endParaRPr/>
-          </a:p>
-          <a:p>
-            <a:r>
-              <a:t>MCP supplies a common tool contract. It doesn't remove those engineering decisions.</a:t>
-            </a:r>
-          </a:p>
-          <a:p>
-            <a:r>
-              <a:t>What it gives us is a clearer place to make and test them."</a:t>
-            </a:r>
-          </a:p>
-          <a:p>
-            <a:endParaRPr/>
-          </a:p>
-          <a:p>
-            <a:r>
-              <a:t>ACTION: Stop any unfinished demonstration at 21:00. No ecosystem detour; that is appendix 17.</a:t>
-            </a:r>
-          </a:p>
-          <a:p>
-            <a:r>
-              <a:t>LESSON: Transfer the decisions, not just the sample's component names.</a:t>
-            </a:r>
-          </a:p>
-          <a:p>
-            <a:r>
-              <a:t>TRANSITION: "Let's return to the question Asha started with."</a:t>
-            </a:r>
           </a:p>
         </p:txBody>
       </p:sp>
@@ -1819,87 +3037,241 @@
           <a:lstStyle/>
           <a:p>
             <a:r>
-              <a:t>TIME: 21:00-22:00 closing; 22:00-25:00 audience questions. Protect the question slot.</a:t>
-            </a:r>
-          </a:p>
-          <a:p>
+              <a:rPr lang="en-GB"/>
+              <a:t>Facts </a:t>
+            </a:r>
+            <a:r>
+              <a:t>she can inspect</a:t>
+            </a:r>
+            <a:r>
+              <a:rPr lang="en-GB"/>
+              <a:t>. Authority </a:t>
+            </a:r>
+            <a:r>
+              <a:t>she can exercise</a:t>
+            </a:r>
+            <a:r>
+              <a:rPr lang="en-GB"/>
+              <a:t>. An </a:t>
+            </a:r>
+            <a:r>
+              <a:t>outcome she</a:t>
+            </a:r>
+            <a:r>
+              <a:rPr lang="en-GB"/>
+              <a:t> </a:t>
+            </a:r>
+            <a:r>
+              <a:t>can verify.</a:t>
+            </a:r>
+            <a:endParaRPr lang="en-GB"/>
+          </a:p>
+          <a:p>
+            <a:r>
+              <a:rPr lang="en-GB"/>
+              <a:t>And the engineering </a:t>
+            </a:r>
+            <a:r>
+              <a:t>is </a:t>
+            </a:r>
+            <a:r>
+              <a:rPr lang="en-GB"/>
+              <a:t>all in keeping </a:t>
+            </a:r>
+            <a:r>
+              <a:t>that chain </a:t>
+            </a:r>
+            <a:r>
+              <a:rPr lang="en-GB"/>
+              <a:t>intact </a:t>
+            </a:r>
+            <a:r>
+              <a:t>when tools fail, </a:t>
+            </a:r>
+            <a:r>
+              <a:rPr lang="en-GB"/>
+              <a:t>when </a:t>
+            </a:r>
+            <a:r>
+              <a:t>models </a:t>
+            </a:r>
+            <a:r>
+              <a:rPr lang="en-GB"/>
+              <a:t>quietly drop </a:t>
+            </a:r>
+            <a:r>
+              <a:t>evidence, and</a:t>
+            </a:r>
+            <a:r>
+              <a:rPr lang="en-GB"/>
+              <a:t> when </a:t>
+            </a:r>
+            <a:r>
+              <a:t>requests get retried.</a:t>
+            </a:r>
+          </a:p>
+          <a:p>
+            <a:r>
+              <a:rPr lang="en-GB"/>
+              <a:t>You should now be able to choose a workflow, design its tools, investigate a failure, and control its actions.</a:t>
+            </a:r>
+          </a:p>
+          <a:p>
+            <a:r>
+              <a:rPr lang="en-GB"/>
+              <a:t>Not because any one framework makes this safe, but because we've made the responsibilities explicit and testable.</a:t>
+            </a:r>
+          </a:p>
+          <a:p>
+            <a:r>
+              <a:t>The model </a:t>
+            </a:r>
+            <a:r>
+              <a:rPr lang="en-GB"/>
+              <a:t>is what </a:t>
+            </a:r>
+            <a:r>
+              <a:t>makes </a:t>
+            </a:r>
+            <a:r>
+              <a:rPr lang="en-GB"/>
+              <a:t>the system </a:t>
+            </a:r>
+            <a:r>
+              <a:t>capable.</a:t>
+            </a:r>
+            <a:endParaRPr lang="en-GB"/>
+          </a:p>
+          <a:p>
+            <a:r>
+              <a:t>Engineering </a:t>
+            </a:r>
+            <a:r>
+              <a:rPr lang="en-GB"/>
+              <a:t>is what </a:t>
+            </a:r>
+            <a:r>
+              <a:t>makes it accountable.</a:t>
+            </a:r>
+          </a:p>
+          <a:p>
+            <a:r>
+              <a:rPr lang="en-GB"/>
+              <a:t>So, last time: would you authorise the action?</a:t>
+            </a:r>
+          </a:p>
+          <a:p>
+            <a:r>
+              <a:rPr lang="en-GB"/>
+              <a:t>And the question I'd genuinely like to hear the answer to — which link in </a:t>
+            </a:r>
+            <a:r>
+              <a:t>that chain is </a:t>
+            </a:r>
+            <a:r>
+              <a:rPr lang="en-GB"/>
+              <a:t>weakest </a:t>
+            </a:r>
+            <a:r>
+              <a:t>in </a:t>
+            </a:r>
+            <a:r>
+              <a:rPr lang="en-GB"/>
+              <a:t>the system </a:t>
+            </a:r>
+            <a:r>
+              <a:t>you're building</a:t>
+            </a:r>
+            <a:r>
+              <a:rPr lang="en-GB"/>
+              <a:t> right now?</a:t>
+            </a:r>
             <a:endParaRPr/>
           </a:p>
           <a:p>
             <a:r>
-              <a:t>SAY: "Asha needs facts she can inspect, authority she can exercise, and an outcome she</a:t>
-            </a:r>
-          </a:p>
-          <a:p>
-            <a:r>
-              <a:t>can verify. Our job is to preserve that chain when tools fail, models omit evidence, and</a:t>
-            </a:r>
-          </a:p>
-          <a:p>
-            <a:r>
-              <a:t>requests get retried.</a:t>
-            </a:r>
-          </a:p>
-          <a:p>
+              <a:rPr lang="en-GB"/>
+              <a:t>We've got a few minutes, so let's take your questions.</a:t>
+            </a:r>
+          </a:p>
+          <a:p>
+            <a:r>
+              <a:rPr lang="en-GB"/>
+              <a:t>If you're wondering why </a:t>
+            </a:r>
+            <a:r>
+              <a:t>four agents</a:t>
+            </a:r>
+            <a:r>
+              <a:rPr lang="en-GB"/>
+              <a:t> — that's </a:t>
+            </a:r>
+            <a:r>
+              <a:t>a teaching choice</a:t>
+            </a:r>
+            <a:r>
+              <a:rPr lang="en-GB"/>
+              <a:t>, and you should benchmark </a:t>
+            </a:r>
+            <a:r>
+              <a:t>simpler </a:t>
+            </a:r>
+            <a:r>
+              <a:rPr lang="en-GB"/>
+              <a:t>options against it</a:t>
+            </a:r>
+            <a:r>
+              <a:t>.</a:t>
+            </a:r>
+          </a:p>
+          <a:p>
+            <a:r>
+              <a:rPr lang="en-GB"/>
+              <a:t>On routing, </a:t>
+            </a:r>
+            <a:r>
+              <a:t>the graph </a:t>
+            </a:r>
+            <a:r>
+              <a:rPr lang="en-GB"/>
+              <a:t>that ships </a:t>
+            </a:r>
+            <a:r>
+              <a:t>is fixed</a:t>
+            </a:r>
+            <a:r>
+              <a:rPr lang="en-GB"/>
+              <a:t>; routing was a comparison, not a demo.</a:t>
+            </a:r>
             <a:endParaRPr/>
           </a:p>
           <a:p>
             <a:r>
-              <a:t>You should now be able to choose a workflow, design its tools, investigate a failure,</a:t>
-            </a:r>
-          </a:p>
-          <a:p>
-            <a:r>
-              <a:t>and control its actions. Not because one framework makes everything safe, but because</a:t>
-            </a:r>
-          </a:p>
-          <a:p>
-            <a:r>
-              <a:t>we've made the responsibilities explicit.</a:t>
-            </a:r>
-          </a:p>
-          <a:p>
-            <a:endParaRPr/>
-          </a:p>
-          <a:p>
-            <a:r>
-              <a:t>The model makes the system capable. Engineering makes it accountable.</a:t>
-            </a:r>
-          </a:p>
-          <a:p>
-            <a:endParaRPr/>
-          </a:p>
-          <a:p>
-            <a:r>
-              <a:t>What part of that chain is hardest in the system you're building?"</a:t>
-            </a:r>
-          </a:p>
-          <a:p>
-            <a:endParaRPr/>
-          </a:p>
-          <a:p>
-            <a:r>
-              <a:t>ACTION: Take actual audience questions. Do not read prepared questions as an audience transcript.</a:t>
-            </a:r>
-          </a:p>
-          <a:p>
-            <a:r>
-              <a:t>If asked why four agents: a teaching/design choice; compare simpler alternatives empirically.</a:t>
-            </a:r>
-          </a:p>
-          <a:p>
-            <a:r>
-              <a:t>If asked about routing: the implemented graph is fixed; routing was a comparison.</a:t>
-            </a:r>
-          </a:p>
-          <a:p>
-            <a:r>
-              <a:t>If asked about integration: local controls and hosted reasoning are separate execution paths.</a:t>
-            </a:r>
-          </a:p>
-          <a:p>
-            <a:r>
-              <a:t>If asked about distributed safety: identify the tests and durable policy required; no live proof claimed.</a:t>
+              <a:rPr lang="en-GB"/>
+              <a:t>And on distributed </a:t>
+            </a:r>
+            <a:r>
+              <a:t>safety</a:t>
+            </a:r>
+            <a:r>
+              <a:rPr lang="en-GB"/>
+              <a:t>, I can tell you </a:t>
+            </a:r>
+            <a:r>
+              <a:t>the tests </a:t>
+            </a:r>
+            <a:r>
+              <a:rPr lang="en-GB"/>
+              <a:t>and the durable policy you'd need. I'm not claiming to have proved them here.</a:t>
+            </a:r>
+          </a:p>
+          <a:p>
+            <a:r>
+              <a:rPr lang="en-GB"/>
+              <a:t>The repository and all the links are on the final slide</a:t>
+            </a:r>
+            <a:r>
+              <a:t>.</a:t>
             </a:r>
           </a:p>
         </p:txBody>
@@ -1969,86 +3341,342 @@
           <a:lstStyle/>
           <a:p>
             <a:r>
-              <a:t>TIME: 0:45-2:00. Problem and acceptance criteria.</a:t>
-            </a:r>
-          </a:p>
-          <a:p>
-            <a:endParaRPr/>
-          </a:p>
-          <a:p>
-            <a:r>
-              <a:t>SAY: "The incident affects two thousand, one hundred and ninety-six units across four</a:t>
-            </a:r>
-          </a:p>
-          <a:p>
-            <a:r>
-              <a:t>stock positions. That is a fixture value we can check, not a model's estimate.</a:t>
-            </a:r>
-          </a:p>
-          <a:p>
-            <a:endParaRPr/>
-          </a:p>
-          <a:p>
-            <a:r>
-              <a:t>Asha needs three kinds of evidence: recall facts, stock exposure, and supplier constraints.</a:t>
-            </a:r>
-          </a:p>
-          <a:p>
-            <a:r>
-              <a:t>The outcome is a decision brief, followed by a separately authorised action.</a:t>
-            </a:r>
-          </a:p>
-          <a:p>
-            <a:endParaRPr/>
-          </a:p>
-          <a:p>
-            <a:r>
-              <a:t>Here is our definition of success. The brief preserves the facts and uncertainty. No stock</a:t>
-            </a:r>
-          </a:p>
-          <a:p>
-            <a:r>
-              <a:t>changes without approval. And if the request is retried, the same positions don't change twice.</a:t>
-            </a:r>
-          </a:p>
-          <a:p>
-            <a:endParaRPr/>
-          </a:p>
-          <a:p>
-            <a:r>
-              <a:t>Notice that we haven't said how many agents we need. Start with the business guarantee.</a:t>
-            </a:r>
-          </a:p>
-          <a:p>
-            <a:r>
-              <a:t>You can apply exactly this approach to a refund, a cancelled order, or an infrastructure change."</a:t>
-            </a:r>
-          </a:p>
-          <a:p>
-            <a:endParaRPr/>
-          </a:p>
-          <a:p>
-            <a:r>
-              <a:t>ASK: "If the model says 'quarantined', what would you inspect before believing it?"</a:t>
-            </a:r>
-          </a:p>
-          <a:p>
-            <a:r>
-              <a:t>Pause briefly; take one answer, then return to this question on slide 9.</a:t>
-            </a:r>
-          </a:p>
-          <a:p>
-            <a:endParaRPr/>
-          </a:p>
-          <a:p>
-            <a:r>
-              <a:t>LESSON: An operational outcome needs acceptance criteria beyond a convincing response.</a:t>
-            </a:r>
-          </a:p>
-          <a:p>
-            <a:r>
-              <a:t>TRANSITION: "First, Asha needs facts from a system outside the model."</a:t>
-            </a:r>
+              <a:rPr lang="en-GB" dirty="0"/>
+              <a:t>Here's the incident.</a:t>
+            </a:r>
+          </a:p>
+          <a:p>
+            <a:r>
+              <a:rPr lang="en-GB" dirty="0"/>
+              <a:t>One batch, two thousand one hundred and ninety-six </a:t>
+            </a:r>
+            <a:r>
+              <a:rPr dirty="0"/>
+              <a:t>units</a:t>
+            </a:r>
+            <a:r>
+              <a:rPr lang="en-GB" dirty="0"/>
+              <a:t>,</a:t>
+            </a:r>
+            <a:r>
+              <a:rPr dirty="0"/>
+              <a:t> </a:t>
+            </a:r>
+            <a:r>
+              <a:rPr lang="en-GB" dirty="0"/>
+              <a:t>spread across </a:t>
+            </a:r>
+            <a:r>
+              <a:rPr dirty="0"/>
+              <a:t>four</a:t>
+            </a:r>
+            <a:r>
+              <a:rPr lang="en-GB" dirty="0"/>
+              <a:t> stock </a:t>
+            </a:r>
+            <a:r>
+              <a:rPr dirty="0"/>
+              <a:t>positions.</a:t>
+            </a:r>
+            <a:endParaRPr lang="en-GB" dirty="0"/>
+          </a:p>
+          <a:p>
+            <a:r>
+              <a:rPr lang="en-GB" dirty="0"/>
+              <a:t>I want you to notice something about that number straight away.</a:t>
+            </a:r>
+          </a:p>
+          <a:p>
+            <a:r>
+              <a:rPr lang="en-GB" dirty="0"/>
+              <a:t>It's a fixture </a:t>
+            </a:r>
+            <a:r>
+              <a:rPr dirty="0"/>
+              <a:t>value</a:t>
+            </a:r>
+            <a:r>
+              <a:rPr lang="en-GB" dirty="0"/>
+              <a:t>. It comes from the data</a:t>
+            </a:r>
+            <a:r>
+              <a:rPr dirty="0"/>
+              <a:t>, not </a:t>
+            </a:r>
+            <a:r>
+              <a:rPr lang="en-GB" dirty="0"/>
+              <a:t>from </a:t>
+            </a:r>
+            <a:r>
+              <a:rPr dirty="0"/>
+              <a:t>a </a:t>
+            </a:r>
+            <a:r>
+              <a:rPr lang="en-GB" dirty="0"/>
+              <a:t>model's </a:t>
+            </a:r>
+            <a:r>
+              <a:rPr dirty="0"/>
+              <a:t>estimate</a:t>
+            </a:r>
+            <a:r>
+              <a:rPr lang="en-GB" dirty="0"/>
+              <a:t>, which means I can assert on it in a test and so can you</a:t>
+            </a:r>
+            <a:r>
+              <a:rPr dirty="0"/>
+              <a:t>.</a:t>
+            </a:r>
+          </a:p>
+          <a:p>
+            <a:r>
+              <a:rPr lang="en-GB" dirty="0"/>
+              <a:t>To make her call, Asha needs three different kinds of evidence.</a:t>
+            </a:r>
+          </a:p>
+          <a:p>
+            <a:r>
+              <a:rPr lang="en-GB" dirty="0"/>
+              <a:t>The </a:t>
+            </a:r>
+            <a:r>
+              <a:rPr dirty="0"/>
+              <a:t>recall facts</a:t>
+            </a:r>
+            <a:r>
+              <a:rPr lang="en-GB" dirty="0"/>
+              <a:t> themselves</a:t>
+            </a:r>
+            <a:r>
+              <a:rPr dirty="0"/>
+              <a:t>, </a:t>
+            </a:r>
+            <a:r>
+              <a:rPr lang="en-GB" dirty="0"/>
+              <a:t>her actual </a:t>
+            </a:r>
+            <a:r>
+              <a:rPr dirty="0"/>
+              <a:t>stock exposure</a:t>
+            </a:r>
+            <a:r>
+              <a:rPr lang="en-GB" dirty="0"/>
+              <a:t>,</a:t>
+            </a:r>
+            <a:r>
+              <a:rPr dirty="0"/>
+              <a:t> </a:t>
+            </a:r>
+            <a:r>
+              <a:rPr lang="en-GB" dirty="0"/>
+              <a:t>and the </a:t>
+            </a:r>
+            <a:r>
+              <a:rPr dirty="0"/>
+              <a:t>supplier constraints</a:t>
+            </a:r>
+            <a:r>
+              <a:rPr lang="en-GB" dirty="0"/>
+              <a:t> that might limit what she's allowed to do.</a:t>
+            </a:r>
+          </a:p>
+          <a:p>
+            <a:r>
+              <a:rPr lang="en-GB" dirty="0"/>
+              <a:t>What she gets out of the system is </a:t>
+            </a:r>
+            <a:r>
+              <a:rPr dirty="0"/>
+              <a:t>a </a:t>
+            </a:r>
+            <a:r>
+              <a:rPr lang="en-GB" dirty="0"/>
+              <a:t>decision </a:t>
+            </a:r>
+            <a:r>
+              <a:rPr dirty="0"/>
+              <a:t>brief, </a:t>
+            </a:r>
+            <a:r>
+              <a:rPr lang="en-GB" dirty="0"/>
+              <a:t>and then,</a:t>
+            </a:r>
+            <a:r>
+              <a:rPr dirty="0"/>
+              <a:t> separately</a:t>
+            </a:r>
+            <a:r>
+              <a:rPr lang="en-GB" dirty="0"/>
+              <a:t>, an</a:t>
+            </a:r>
+            <a:r>
+              <a:rPr dirty="0"/>
+              <a:t> </a:t>
+            </a:r>
+            <a:r>
+              <a:rPr dirty="0" err="1"/>
+              <a:t>authorised</a:t>
+            </a:r>
+            <a:r>
+              <a:rPr dirty="0"/>
+              <a:t> action.</a:t>
+            </a:r>
+          </a:p>
+          <a:p>
+            <a:r>
+              <a:rPr lang="en-GB" dirty="0"/>
+              <a:t>So let me put my acceptance criteria on the table now, because I'm going to keep coming back to them.</a:t>
+            </a:r>
+          </a:p>
+          <a:p>
+            <a:r>
+              <a:rPr lang="en-GB" dirty="0"/>
+              <a:t>First, the </a:t>
+            </a:r>
+            <a:r>
+              <a:rPr dirty="0"/>
+              <a:t>brief </a:t>
+            </a:r>
+            <a:r>
+              <a:rPr lang="en-GB" dirty="0"/>
+              <a:t>has to preserve both the </a:t>
+            </a:r>
+            <a:r>
+              <a:rPr dirty="0"/>
+              <a:t>facts and </a:t>
+            </a:r>
+            <a:r>
+              <a:rPr lang="en-GB" dirty="0"/>
+              <a:t>the </a:t>
+            </a:r>
+            <a:r>
+              <a:rPr dirty="0"/>
+              <a:t>uncertainty</a:t>
+            </a:r>
+            <a:r>
+              <a:rPr lang="en-GB" dirty="0"/>
+              <a:t>.</a:t>
+            </a:r>
+          </a:p>
+          <a:p>
+            <a:r>
+              <a:rPr lang="en-GB" dirty="0"/>
+              <a:t>Second, no stock changes </a:t>
+            </a:r>
+            <a:r>
+              <a:rPr dirty="0"/>
+              <a:t>without </a:t>
+            </a:r>
+            <a:r>
+              <a:rPr lang="en-GB" dirty="0"/>
+              <a:t>an </a:t>
+            </a:r>
+            <a:r>
+              <a:rPr dirty="0"/>
+              <a:t>approval</a:t>
+            </a:r>
+            <a:r>
+              <a:rPr lang="en-GB" dirty="0"/>
+              <a:t>.</a:t>
+            </a:r>
+          </a:p>
+          <a:p>
+            <a:r>
+              <a:rPr lang="en-GB" dirty="0"/>
+              <a:t>And third, if that request gets retried</a:t>
+            </a:r>
+            <a:r>
+              <a:rPr dirty="0"/>
+              <a:t>, </a:t>
+            </a:r>
+            <a:r>
+              <a:rPr lang="en-GB" dirty="0"/>
+              <a:t>the same positions do not change twice</a:t>
+            </a:r>
+            <a:r>
+              <a:rPr dirty="0"/>
+              <a:t>.</a:t>
+            </a:r>
+          </a:p>
+          <a:p>
+            <a:r>
+              <a:rPr dirty="0"/>
+              <a:t>Notice </a:t>
+            </a:r>
+            <a:r>
+              <a:rPr lang="en-GB" dirty="0"/>
+              <a:t>that not one of those three says anything about how many agents we need.</a:t>
+            </a:r>
+          </a:p>
+          <a:p>
+            <a:r>
+              <a:rPr lang="en-GB" dirty="0"/>
+              <a:t>That's deliberate. You write the guarantee first and you choose the architecture second</a:t>
+            </a:r>
+            <a:r>
+              <a:rPr dirty="0"/>
+              <a:t>.</a:t>
+            </a:r>
+            <a:endParaRPr lang="en-GB" dirty="0"/>
+          </a:p>
+          <a:p>
+            <a:r>
+              <a:rPr lang="en-GB" dirty="0"/>
+              <a:t>And this generalises further than you'd think. A refund, a cancelled order, an infrastructure change — same shape.</a:t>
+            </a:r>
+          </a:p>
+          <a:p>
+            <a:r>
+              <a:rPr lang="en-GB" dirty="0"/>
+              <a:t>So let me ask you something to hold onto for the next twenty minutes.</a:t>
+            </a:r>
+          </a:p>
+          <a:p>
+            <a:r>
+              <a:rPr dirty="0"/>
+              <a:t>If the model </a:t>
+            </a:r>
+            <a:r>
+              <a:rPr lang="en-GB" dirty="0"/>
+              <a:t>told you the batch was quarantined, </a:t>
+            </a:r>
+            <a:r>
+              <a:rPr dirty="0"/>
+              <a:t>what would you </a:t>
+            </a:r>
+            <a:r>
+              <a:rPr lang="en-GB" dirty="0"/>
+              <a:t>actually inspect </a:t>
+            </a:r>
+            <a:r>
+              <a:rPr dirty="0"/>
+              <a:t>before </a:t>
+            </a:r>
+            <a:r>
+              <a:rPr lang="en-GB" dirty="0"/>
+              <a:t>you believed </a:t>
+            </a:r>
+            <a:r>
+              <a:rPr dirty="0"/>
+              <a:t>it</a:t>
+            </a:r>
+            <a:r>
+              <a:rPr lang="en-GB" dirty="0"/>
+              <a:t>?</a:t>
+            </a:r>
+          </a:p>
+          <a:p>
+            <a:r>
+              <a:rPr lang="en-GB" dirty="0"/>
+              <a:t>Keep your answer. We'll test it.</a:t>
+            </a:r>
+          </a:p>
+          <a:p>
+            <a:r>
+              <a:rPr lang="en-GB" dirty="0"/>
+              <a:t>Because first, Asha needs facts from a system that isn't the model.</a:t>
+            </a:r>
+            <a:endParaRPr dirty="0"/>
           </a:p>
         </p:txBody>
       </p:sp>
@@ -3256,175 +4884,89 @@
           <a:lstStyle/>
           <a:p>
             <a:r>
-              <a:t>STORY EDITION APPENDIX: outside the timed show.</a:t>
-            </a:r>
-          </a:p>
-          <a:p>
-            <a:r>
-              <a:t>Original-edition timing and navigation cues below do not apply.</a:t>
-            </a:r>
-          </a:p>
-          <a:p>
-            <a:endParaRPr/>
-          </a:p>
-          <a:p>
-            <a:r>
-              <a:t>APPENDIX: Hidden from the timed show. Use for follow-up and distribution.</a:t>
-            </a:r>
-          </a:p>
-          <a:p>
-            <a:endParaRPr/>
-          </a:p>
-          <a:p>
-            <a:r>
-              <a:t>PURPOSE: Give attendees the original material without turning a 25-minute session</a:t>
-            </a:r>
-          </a:p>
-          <a:p>
-            <a:r>
-              <a:t>into a reading list. Every resource label on this slide is clickable in PowerPoint.</a:t>
-            </a:r>
-          </a:p>
-          <a:p>
-            <a:r>
-              <a:t>The video links jump to the relevant published chapter starts. Encourage people to</a:t>
-            </a:r>
-          </a:p>
-          <a:p>
-            <a:r>
-              <a:t>watch the source sessions for implementation detail rather than treating our design</a:t>
-            </a:r>
-          </a:p>
-          <a:p>
-            <a:r>
-              <a:t>questions as a substitute for the original talks.</a:t>
-            </a:r>
-          </a:p>
-          <a:p>
-            <a:endParaRPr/>
-          </a:p>
-          <a:p>
-            <a:r>
-              <a:t>ATTRIBUTION: The event title, date and artwork are from the Global AI Community</a:t>
-            </a:r>
-          </a:p>
-          <a:p>
-            <a:r>
-              <a:t>event page. MCP Live topic selection is based on its published chapter list, not</a:t>
-            </a:r>
-          </a:p>
-          <a:p>
-            <a:r>
-              <a:t>a complete transcript review. The slide questions are original interpretations and</a:t>
-            </a:r>
-          </a:p>
-          <a:p>
-            <a:r>
-              <a:t>not quotations or endorsements by the speakers. The Agent Framework orchestration</a:t>
-            </a:r>
-          </a:p>
-          <a:p>
-            <a:r>
-              <a:t>reference was checked against current documentation during this deck revision.</a:t>
-            </a:r>
-          </a:p>
-          <a:p>
-            <a:endParaRPr/>
-          </a:p>
-          <a:p>
-            <a:r>
-              <a:t>CAUTION: Documentation evolves. Verify API versions, hosting capabilities and</a:t>
-            </a:r>
-          </a:p>
-          <a:p>
-            <a:r>
-              <a:t>authentication requirements when building, rather than copying a conference diagram</a:t>
-            </a:r>
-          </a:p>
-          <a:p>
-            <a:r>
-              <a:t>as deployment instructions. The diagram deliberately separates local deterministic</a:t>
-            </a:r>
-          </a:p>
-          <a:p>
-            <a:r>
-              <a:t>controls from hosted model execution. Neither the links nor the slide design imply</a:t>
-            </a:r>
-          </a:p>
-          <a:p>
-            <a:r>
-              <a:t>that unimplemented routing, parallel execution or enterprise controls were demonstrated.</a:t>
-            </a:r>
-          </a:p>
-          <a:p>
-            <a:endParaRPr/>
-          </a:p>
-          <a:p>
-            <a:r>
-              <a:t>PRESENTER ACTION: Keep this slide hidden during the main story. Navigate here manually</a:t>
-            </a:r>
-          </a:p>
-          <a:p>
-            <a:r>
-              <a:t>only if a question needs a source. For the live session use the notes and runbook;</a:t>
-            </a:r>
-          </a:p>
-          <a:p>
-            <a:r>
-              <a:t>for later study attendees can follow the links below. Sources accessed 14 September 2026.</a:t>
-            </a:r>
-          </a:p>
-          <a:p>
-            <a:endParaRPr/>
-          </a:p>
-          <a:p>
-            <a:r>
-              <a:t>MCP Community Connect Bengaluru | event and session: https://globalai.community/e/bd1o37ln</a:t>
-            </a:r>
-          </a:p>
-          <a:p>
-            <a:r>
-              <a:t>MCP architecture | clients, servers and tools: https://modelcontextprotocol.io/docs/learn/architecture</a:t>
-            </a:r>
-          </a:p>
-          <a:p>
-            <a:r>
-              <a:t>MCP tools | schemas, results and errors: https://modelcontextprotocol.io/specification/2025-11-25/server/tools</a:t>
-            </a:r>
-          </a:p>
-          <a:p>
-            <a:r>
-              <a:t>MCP lifecycle | initialization and capabilities: https://modelcontextprotocol.io/specification/2025-11-25/basic/lifecycle</a:t>
-            </a:r>
-          </a:p>
-          <a:p>
-            <a:r>
-              <a:t>Agent Framework | orchestration patterns: https://github.com/microsoft/agent-framework/tree/main/python/packages/orchestrations</a:t>
-            </a:r>
-          </a:p>
-          <a:p>
-            <a:r>
-              <a:t>MCP Live! | Toolboxes in Microsoft Foundry | 1:20:23: https://www.youtube.com/watch?v=uydwDk91Y9Y&amp;t=4823s</a:t>
-            </a:r>
-          </a:p>
-          <a:p>
-            <a:r>
-              <a:t>MCP Live! | Evolution of MCP auth | 2:32:29: https://www.youtube.com/watch?v=uydwDk91Y9Y&amp;t=9149s</a:t>
-            </a:r>
-          </a:p>
-          <a:p>
-            <a:r>
-              <a:t>MCP Live! | Building MCP Apps | 3:21:05: https://www.youtube.com/watch?v=uydwDk91Y9Y&amp;t=12065s</a:t>
-            </a:r>
-          </a:p>
-          <a:p>
-            <a:r>
-              <a:t>MCP Live! | Event-driven agents | 3:45:08: https://www.youtube.com/watch?v=uydwDk91Y9Y&amp;t=13508s</a:t>
-            </a:r>
-          </a:p>
-          <a:p>
-            <a:r>
-              <a:t>MCP Live! | official resource collection: https://aka.ms/MCPLiveResources</a:t>
+              <a:rPr lang="en-GB"/>
+              <a:t>Everything on this slide is a live link.</a:t>
+            </a:r>
+          </a:p>
+          <a:p>
+            <a:r>
+              <a:rPr lang="en-GB"/>
+              <a:t>The event page, the MCP architecture overview, the tools and lifecycle specifications, </a:t>
+            </a:r>
+            <a:r>
+              <a:t>the </a:t>
+            </a:r>
+            <a:r>
+              <a:rPr lang="en-GB"/>
+              <a:t>Agent Framework orchestration patterns, and four timestamped chapters from MCP Live</a:t>
+            </a:r>
+            <a:r>
+              <a:t>.</a:t>
+            </a:r>
+          </a:p>
+          <a:p>
+            <a:r>
+              <a:rPr lang="en-GB"/>
+              <a:t>Go to the specifications </a:t>
+            </a:r>
+            <a:r>
+              <a:t>for </a:t>
+            </a:r>
+            <a:r>
+              <a:rPr lang="en-GB"/>
+              <a:t>the </a:t>
+            </a:r>
+            <a:r>
+              <a:t>implementation detail</a:t>
+            </a:r>
+            <a:r>
+              <a:rPr lang="en-GB"/>
+              <a:t> rather than relying on my diagram</a:t>
+            </a:r>
+            <a:r>
+              <a:t>.</a:t>
+            </a:r>
+          </a:p>
+          <a:p>
+            <a:r>
+              <a:rPr lang="en-GB"/>
+              <a:t>And do verify the </a:t>
+            </a:r>
+            <a:r>
+              <a:t>API versions and</a:t>
+            </a:r>
+            <a:r>
+              <a:rPr lang="en-GB"/>
+              <a:t> the authentication </a:t>
+            </a:r>
+            <a:r>
+              <a:t>requirements when </a:t>
+            </a:r>
+            <a:r>
+              <a:rPr lang="en-GB"/>
+              <a:t>you build.</a:t>
+            </a:r>
+          </a:p>
+          <a:p>
+            <a:r>
+              <a:rPr lang="en-GB"/>
+              <a:t>This space moves quickly, and </a:t>
+            </a:r>
+            <a:r>
+              <a:t>a conference diagram</a:t>
+            </a:r>
+            <a:r>
+              <a:rPr lang="en-GB"/>
+              <a:t> is not deployment guidance.</a:t>
+            </a:r>
+          </a:p>
+          <a:p>
+            <a:r>
+              <a:rPr lang="en-GB"/>
+              <a:t>Thank you very much</a:t>
+            </a:r>
+            <a:r>
+              <a:t>.</a:t>
             </a:r>
           </a:p>
         </p:txBody>
@@ -3564,75 +5106,190 @@
           <a:lstStyle/>
           <a:p>
             <a:r>
-              <a:t>TIME: 2:00-3:00. Decision: a common client-facing tool contract.</a:t>
-            </a:r>
-          </a:p>
-          <a:p>
+              <a:rPr lang="en-GB"/>
+              <a:t>So this is where MCP comes in, and I want to be quite precise about what it does and doesn't give us.</a:t>
+            </a:r>
+          </a:p>
+          <a:p>
+            <a:r>
+              <a:t>MCP </a:t>
+            </a:r>
+            <a:r>
+              <a:rPr lang="en-GB"/>
+              <a:t>is </a:t>
+            </a:r>
+            <a:r>
+              <a:t>a </a:t>
+            </a:r>
+            <a:r>
+              <a:rPr lang="en-GB"/>
+              <a:t>discovery and invocation contract.</a:t>
+            </a:r>
+          </a:p>
+          <a:p>
+            <a:r>
+              <a:rPr lang="en-GB"/>
+              <a:t>You list the </a:t>
+            </a:r>
+            <a:r>
+              <a:t>tools, </a:t>
+            </a:r>
+            <a:r>
+              <a:rPr lang="en-GB"/>
+              <a:t>you read the input schema</a:t>
+            </a:r>
+            <a:r>
+              <a:t>, </a:t>
+            </a:r>
+            <a:r>
+              <a:rPr lang="en-GB"/>
+              <a:t>you </a:t>
+            </a:r>
+            <a:r>
+              <a:t>call</a:t>
+            </a:r>
+            <a:r>
+              <a:rPr lang="en-GB"/>
+              <a:t> the tool, and you get a structured result back</a:t>
+            </a:r>
+            <a:r>
+              <a:t>.</a:t>
+            </a:r>
+            <a:endParaRPr lang="en-GB"/>
+          </a:p>
+          <a:p>
+            <a:r>
+              <a:rPr lang="en-GB"/>
+              <a:t>What that buys you is one </a:t>
+            </a:r>
+            <a:r>
+              <a:t>protocol</a:t>
+            </a:r>
+            <a:r>
+              <a:rPr lang="en-GB"/>
+              <a:t>, instead of inventing a different agent-facing integration for every single client application you support</a:t>
+            </a:r>
+            <a:r>
+              <a:t>.</a:t>
+            </a:r>
+          </a:p>
+          <a:p>
+            <a:r>
+              <a:rPr lang="en-GB"/>
+              <a:t>The host application </a:t>
+            </a:r>
+            <a:r>
+              <a:t>owns the </a:t>
+            </a:r>
+            <a:r>
+              <a:rPr lang="en-GB"/>
+              <a:t>client </a:t>
+            </a:r>
+            <a:r>
+              <a:t>session</a:t>
+            </a:r>
+            <a:r>
+              <a:rPr lang="en-GB"/>
+              <a:t>.</a:t>
+            </a:r>
+          </a:p>
+          <a:p>
+            <a:r>
+              <a:rPr lang="en-GB"/>
+              <a:t>The </a:t>
+            </a:r>
+            <a:r>
+              <a:t>server exposes the tool</a:t>
+            </a:r>
+            <a:r>
+              <a:rPr lang="en-GB"/>
+              <a:t>.</a:t>
+            </a:r>
+          </a:p>
+          <a:p>
+            <a:r>
+              <a:rPr lang="en-GB"/>
+              <a:t>And behind that tool is ordinary code calling an ordinary API or domain service.</a:t>
+            </a:r>
+          </a:p>
+          <a:p>
+            <a:r>
+              <a:rPr lang="en-GB"/>
+              <a:t>MCP does not replace your business logic, and it does not decide which workflow you should be running.</a:t>
+            </a:r>
             <a:endParaRPr/>
           </a:p>
           <a:p>
             <a:r>
-              <a:t>SAY: "MCP gives compatible applications a common way to discover tools, inspect their</a:t>
-            </a:r>
-          </a:p>
-          <a:p>
-            <a:r>
-              <a:t>contracts, and call them. Instead of inventing a different agent-facing integration for</a:t>
-            </a:r>
-          </a:p>
-          <a:p>
-            <a:r>
-              <a:t>every client, we expose a narrow capability through a shared protocol.</a:t>
-            </a:r>
-          </a:p>
-          <a:p>
+              <a:rPr lang="en-GB"/>
+              <a:t>So there are three components on this slide with three genuinely different jobs.</a:t>
+            </a:r>
+          </a:p>
+          <a:p>
+            <a:r>
+              <a:t>Agent Framework </a:t>
+            </a:r>
+            <a:r>
+              <a:rPr lang="en-GB"/>
+              <a:t>coordinates the model-backed workflow.</a:t>
+            </a:r>
+          </a:p>
+          <a:p>
+            <a:r>
+              <a:t>Foundry </a:t>
+            </a:r>
+            <a:r>
+              <a:rPr lang="en-GB"/>
+              <a:t>hosts that execution.</a:t>
+            </a:r>
+          </a:p>
+          <a:p>
+            <a:r>
+              <a:rPr lang="en-GB"/>
+              <a:t>And </a:t>
+            </a:r>
+            <a:r>
+              <a:t>MCP supplies the tool contract</a:t>
+            </a:r>
+            <a:r>
+              <a:rPr lang="en-GB"/>
+              <a:t> underneath both.</a:t>
+            </a:r>
+          </a:p>
+          <a:p>
+            <a:r>
+              <a:rPr lang="en-GB"/>
+              <a:t>If you take one line away from this slide, take the one at the bottom</a:t>
+            </a:r>
+            <a:r>
+              <a:t>.</a:t>
+            </a:r>
+          </a:p>
+          <a:p>
+            <a:r>
+              <a:rPr lang="en-GB"/>
+              <a:t>MCP standardises </a:t>
+            </a:r>
+            <a:r>
+              <a:t>access.</a:t>
+            </a:r>
+            <a:r>
+              <a:rPr lang="en-GB"/>
+              <a:t> Your application still owns policy.</a:t>
+            </a:r>
+          </a:p>
+          <a:p>
+            <a:r>
+              <a:rPr lang="en-GB"/>
+              <a:t>That distinction carries the rest of the talk, and I'll show you exactly where it bites.</a:t>
+            </a:r>
+          </a:p>
+          <a:p>
+            <a:r>
+              <a:rPr lang="en-GB"/>
+              <a:t>Let's go and discover one tool, and let's check its answer without a model involved at all.</a:t>
+            </a:r>
             <a:endParaRPr/>
-          </a:p>
-          <a:p>
-            <a:r>
-              <a:t>The host application owns the client session. The server exposes the tool. Behind that</a:t>
-            </a:r>
-          </a:p>
-          <a:p>
-            <a:r>
-              <a:t>tool, ordinary code can call an API or a domain service. MCP doesn't replace that business</a:t>
-            </a:r>
-          </a:p>
-          <a:p>
-            <a:r>
-              <a:t>logic, and it doesn't decide which workflow we should run.</a:t>
-            </a:r>
-          </a:p>
-          <a:p>
-            <a:endParaRPr/>
-          </a:p>
-          <a:p>
-            <a:r>
-              <a:t>Agent Framework will coordinate our model-backed workflow. Foundry will host that agent</a:t>
-            </a:r>
-          </a:p>
-          <a:p>
-            <a:r>
-              <a:t>execution. MCP supplies the tool contract. Each solves a different part of Asha's problem."</a:t>
-            </a:r>
-          </a:p>
-          <a:p>
-            <a:endParaRPr/>
-          </a:p>
-          <a:p>
-            <a:r>
-              <a:t>POINT: Follow the three components. Transport and subprocess details are in appendix 13.</a:t>
-            </a:r>
-          </a:p>
-          <a:p>
-            <a:r>
-              <a:t>LESSON: Standardise access without confusing access with authority.</a:t>
-            </a:r>
-          </a:p>
-          <a:p>
-            <a:r>
-              <a:t>TRANSITION: "Let's discover one tool and check its answer without involving a model."</a:t>
-            </a:r>
           </a:p>
         </p:txBody>
       </p:sp>
@@ -3701,44 +5358,220 @@
           <a:lstStyle/>
           <a:p>
             <a:r>
-              <a:t>TIME: Immediately before Demo 1. Introduce the application architecture.</a:t>
-            </a:r>
-          </a:p>
-          <a:p>
+              <a:rPr lang="en-GB"/>
+              <a:t>Before the demos, here's the application, because the shape of it matters.</a:t>
+            </a:r>
+          </a:p>
+          <a:p>
+            <a:r>
+              <a:rPr lang="en-GB"/>
+              <a:t>There are two lanes here and I've separated them on purpose</a:t>
+            </a:r>
+            <a:r>
+              <a:t>.</a:t>
+            </a:r>
+            <a:endParaRPr lang="en-GB"/>
+          </a:p>
+          <a:p>
+            <a:r>
+              <a:rPr lang="en-GB"/>
+              <a:t>Across the top, the </a:t>
+            </a:r>
+            <a:r>
+              <a:t>browser </a:t>
+            </a:r>
+            <a:r>
+              <a:rPr lang="en-GB"/>
+              <a:t>asks the host for an assessment.</a:t>
+            </a:r>
+          </a:p>
+          <a:p>
+            <a:r>
+              <a:rPr lang="en-GB"/>
+              <a:t>That hosted </a:t>
+            </a:r>
+            <a:r>
+              <a:t>workflow</a:t>
+            </a:r>
+            <a:r>
+              <a:rPr lang="en-GB"/>
+              <a:t> gets </a:t>
+            </a:r>
+            <a:r>
+              <a:t>read tools </a:t>
+            </a:r>
+            <a:r>
+              <a:rPr lang="en-GB"/>
+              <a:t>only, over an isolated bridge</a:t>
+            </a:r>
+            <a:r>
+              <a:t>.</a:t>
+            </a:r>
+            <a:endParaRPr lang="en-GB"/>
+          </a:p>
+          <a:p>
+            <a:r>
+              <a:t>It can </a:t>
+            </a:r>
+            <a:r>
+              <a:rPr lang="en-GB"/>
+              <a:t>prepare a recommendation. It cannot approve anything and </a:t>
+            </a:r>
+            <a:r>
+              <a:t>it cannot </a:t>
+            </a:r>
+            <a:r>
+              <a:rPr lang="en-GB"/>
+              <a:t>move a single unit of </a:t>
+            </a:r>
+            <a:r>
+              <a:t>inventory.</a:t>
+            </a:r>
+          </a:p>
+          <a:p>
+            <a:r>
+              <a:rPr lang="en-GB"/>
+              <a:t>Across the bottom, the identity layer tells us who </a:t>
+            </a:r>
+            <a:r>
+              <a:t>the caller</a:t>
+            </a:r>
+            <a:r>
+              <a:rPr lang="en-GB"/>
+              <a:t> actually is.</a:t>
+            </a:r>
+          </a:p>
+          <a:p>
+            <a:r>
+              <a:rPr lang="en-GB"/>
+              <a:t>Application </a:t>
+            </a:r>
+            <a:r>
+              <a:t>policy </a:t>
+            </a:r>
+            <a:r>
+              <a:rPr lang="en-GB"/>
+              <a:t>then </a:t>
+            </a:r>
+            <a:r>
+              <a:t>binds </a:t>
+            </a:r>
+            <a:r>
+              <a:rPr lang="en-GB"/>
+              <a:t>the </a:t>
+            </a:r>
+            <a:r>
+              <a:t>approval to </a:t>
+            </a:r>
+            <a:r>
+              <a:rPr lang="en-GB"/>
+              <a:t>that </a:t>
+            </a:r>
+            <a:r>
+              <a:t>caller, </a:t>
+            </a:r>
+            <a:r>
+              <a:rPr lang="en-GB"/>
+              <a:t>that </a:t>
+            </a:r>
+            <a:r>
+              <a:t>batch, </a:t>
+            </a:r>
+            <a:r>
+              <a:rPr lang="en-GB"/>
+              <a:t>that </a:t>
+            </a:r>
+            <a:r>
+              <a:t>action</a:t>
+            </a:r>
+            <a:r>
+              <a:rPr lang="en-GB"/>
+              <a:t>,</a:t>
+            </a:r>
+            <a:r>
+              <a:t> and </a:t>
+            </a:r>
+            <a:r>
+              <a:rPr lang="en-GB"/>
+              <a:t>that </a:t>
+            </a:r>
+            <a:r>
+              <a:t>session</a:t>
+            </a:r>
+            <a:r>
+              <a:rPr lang="en-GB"/>
+              <a:t>.</a:t>
+            </a:r>
+          </a:p>
+          <a:p>
+            <a:r>
+              <a:rPr lang="en-GB"/>
+              <a:t>The domain action records the quarantine and writes the audit entry, and the session state carries the concurrency tags and the replay record</a:t>
+            </a:r>
+            <a:r>
+              <a:t>.</a:t>
+            </a:r>
+            <a:endParaRPr lang="en-GB"/>
+          </a:p>
+          <a:p>
+            <a:r>
+              <a:rPr lang="en-GB"/>
+              <a:t>And then there's a third thing, which is the terminal demo.</a:t>
+            </a:r>
+          </a:p>
+          <a:p>
+            <a:r>
+              <a:rPr lang="en-GB"/>
+              <a:t>That one speaks real </a:t>
+            </a:r>
+            <a:r>
+              <a:t>MCP </a:t>
+            </a:r>
+            <a:r>
+              <a:rPr lang="en-GB"/>
+              <a:t>over standard input and output </a:t>
+            </a:r>
+            <a:r>
+              <a:t>to </a:t>
+            </a:r>
+            <a:r>
+              <a:rPr lang="en-GB"/>
+              <a:t>a completely </a:t>
+            </a:r>
+            <a:r>
+              <a:t>isolated server.</a:t>
+            </a:r>
+            <a:endParaRPr lang="en-GB"/>
+          </a:p>
+          <a:p>
+            <a:r>
+              <a:t>Its state is not the </a:t>
+            </a:r>
+            <a:r>
+              <a:rPr lang="en-GB"/>
+              <a:t>browser's state, so please don't read across between the two — I'll flag it each time we switch.</a:t>
+            </a:r>
+          </a:p>
+          <a:p>
+            <a:r>
+              <a:rPr lang="en-GB"/>
+              <a:t>The sentence at the bottom is the design in one line.</a:t>
+            </a:r>
             <a:endParaRPr/>
           </a:p>
           <a:p>
             <a:r>
-              <a:t>SAY: "The Control Tower has two deliberately different paths. Across the top, the browser asks the FastAPI host for an assessment. The Foundry-hosted Agent Framework workflow can use only read tools over the application's isolated MCP bridge. It can prepare a recommendation; it cannot approve or quarantine inventory.</a:t>
-            </a:r>
-          </a:p>
-          <a:p>
-            <a:endParaRPr/>
-          </a:p>
-          <a:p>
-            <a:r>
-              <a:t>Across the second lane, EasyAuth supplies the caller identity. Application policy binds approval to that caller, batch, action and session generation. The domain action records the quarantine and audit result, while the actor-scoped Blob session uses optimistic concurrency and retains replay state.</a:t>
-            </a:r>
-          </a:p>
-          <a:p>
-            <a:endParaRPr/>
-          </a:p>
-          <a:p>
-            <a:r>
-              <a:t>Our terminal demonstration is separate again: the inspector talks genuine MCP stdio to an isolated synthetic server. Its state is not the browser session."</a:t>
-            </a:r>
-          </a:p>
-          <a:p>
-            <a:endParaRPr/>
-          </a:p>
-          <a:p>
-            <a:r>
-              <a:t>POINT: Follow each lane left to right. Do not imply that the model grants authority or that the terminal and hosted browser share live state.</a:t>
-            </a:r>
-          </a:p>
-          <a:p>
-            <a:r>
-              <a:t>TRANSITION: "With those boundaries visible, let's inspect the first tool without a model.</a:t>
+              <a:rPr lang="en-GB"/>
+              <a:t>The hosted agent can recommend. Only application policy can authorise and mutate.</a:t>
+            </a:r>
+          </a:p>
+          <a:p>
+            <a:r>
+              <a:rPr lang="en-GB"/>
+              <a:t>With those boundaries visible, let's go and inspect that first tool</a:t>
+            </a:r>
+            <a:r>
+              <a:t>.</a:t>
             </a:r>
           </a:p>
         </p:txBody>
@@ -3808,26 +5641,50 @@
           <a:lstStyle/>
           <a:p>
             <a:r>
-              <a:rPr sz="1200"/>
-              <a:t>ARCHITECTURE OVERVIEW</a:t>
-            </a:r>
-          </a:p>
-          <a:p>
-            <a:r>
-              <a:rPr sz="1200"/>
-              <a:t>Follow the read-only reasoning path from the authenticated operator through the Control Tower, managed identity, Foundry Agent Service and sequential specialists to the MCP tool boundary.</a:t>
-            </a:r>
-          </a:p>
-          <a:p>
-            <a:r>
-              <a:rPr sz="1200"/>
-              <a:t>The supervisor synthesizes evidence; it does not authorize actions. Human approval and identity are checked by application policy before the recall domain changes state. Blob state retains ETags and audit.</a:t>
-            </a:r>
-          </a:p>
-          <a:p>
-            <a:r>
-              <a:rPr sz="1200"/>
-              <a:t>This is a schematic of the synthetic demo, not a captured execution trace or proof of production readiness.</a:t>
+              <a:rPr lang="en-GB"/>
+              <a:t>This is the same architecture one level down, and I'll only spend a moment on it.</a:t>
+            </a:r>
+          </a:p>
+          <a:p>
+            <a:r>
+              <a:rPr lang="en-GB"/>
+              <a:t>The authenticated operator comes in through the Control Tower, through managed identity, into the hosted agent service, out through a sequence of specialists, and everything stops at the MCP tool boundary.</a:t>
+            </a:r>
+          </a:p>
+          <a:p>
+            <a:r>
+              <a:rPr lang="en-GB"/>
+              <a:t>The supervisor at the end synthesises the evidence.</a:t>
+            </a:r>
+          </a:p>
+          <a:p>
+            <a:r>
+              <a:rPr lang="en-GB"/>
+              <a:t>It has no tools of its own and it has no authority.</a:t>
+            </a:r>
+          </a:p>
+          <a:p>
+            <a:r>
+              <a:rPr lang="en-GB"/>
+              <a:t>Identity and approval get checked by application policy before the recall domain changes any state, and the stored session keeps the concurrency tags and the audit trail.</a:t>
+            </a:r>
+          </a:p>
+          <a:p>
+            <a:r>
+              <a:rPr lang="en-GB"/>
+              <a:t>One caveat before we move on, because it matters.</a:t>
+            </a:r>
+          </a:p>
+          <a:p>
+            <a:r>
+              <a:rPr lang="en-GB"/>
+              <a:t>This is a schematic of a synthetic demo.</a:t>
+            </a:r>
+          </a:p>
+          <a:p>
+            <a:r>
+              <a:rPr lang="en-GB"/>
+              <a:t>It is not a captured execution trace, and it is not a claim that any of this is production-hardened.</a:t>
             </a:r>
           </a:p>
         </p:txBody>
@@ -3897,25 +5754,57 @@
           <a:lstStyle/>
           <a:p>
             <a:r>
-              <a:t>DEMO BREAK 01: Find the stock.</a:t>
-            </a:r>
-          </a:p>
-          <a:p>
-            <a:endParaRPr/>
-          </a:p>
-          <a:p>
-            <a:r>
-              <a:t>ACTION: Switch to the prepared MCP terminal.</a:t>
-            </a:r>
-          </a:p>
-          <a:p>
-            <a:r>
-              <a:t>PURPOSE: Discover the tool, inspect its contract, and verify the inventory facts.</a:t>
-            </a:r>
-          </a:p>
-          <a:p>
-            <a:r>
-              <a:t>Do not advance until the demonstration surface is ready. Use the scripted fallback if live evidence is unavailable.</a:t>
+              <a:rPr lang="en-GB"/>
+              <a:t>Right — demo one. Let's go and find </a:t>
+            </a:r>
+            <a:r>
+              <a:t>the stock.</a:t>
+            </a:r>
+          </a:p>
+          <a:p>
+            <a:r>
+              <a:rPr lang="en-GB"/>
+              <a:t>I'm switching to a terminal, and there is no model anywhere in this first demo</a:t>
+            </a:r>
+            <a:r>
+              <a:t>.</a:t>
+            </a:r>
+          </a:p>
+          <a:p>
+            <a:r>
+              <a:rPr lang="en-GB"/>
+              <a:t>We're going to discover </a:t>
+            </a:r>
+            <a:r>
+              <a:t>the </a:t>
+            </a:r>
+            <a:r>
+              <a:rPr lang="en-GB"/>
+              <a:t>tool, read its contract</a:t>
+            </a:r>
+            <a:r>
+              <a:t>, </a:t>
+            </a:r>
+            <a:r>
+              <a:rPr lang="en-GB"/>
+              <a:t>call it</a:t>
+            </a:r>
+            <a:r>
+              <a:t>, </a:t>
+            </a:r>
+            <a:r>
+              <a:rPr lang="en-GB"/>
+              <a:t>and check </a:t>
+            </a:r>
+            <a:r>
+              <a:t>the </a:t>
+            </a:r>
+            <a:r>
+              <a:rPr lang="en-GB"/>
+              <a:t>numbers ourselves</a:t>
+            </a:r>
+            <a:r>
+              <a:t>.</a:t>
             </a:r>
           </a:p>
         </p:txBody>
@@ -3985,136 +5874,243 @@
           <a:lstStyle/>
           <a:p>
             <a:r>
-              <a:t>TIME: 3:00-5:00. Demonstration: connection, discovery, schema, valid read.</a:t>
-            </a:r>
-          </a:p>
-          <a:p>
-            <a:endParaRPr/>
-          </a:p>
-          <a:p>
-            <a:r>
-              <a:t>SAY: "Asha's broad question becomes one narrow tool call: locate inventory for this batch.</a:t>
-            </a:r>
-          </a:p>
-          <a:p>
-            <a:r>
-              <a:t>Before calling it, we can inspect its input contract. The identifier has a bounded length</a:t>
-            </a:r>
-          </a:p>
-          <a:p>
-            <a:r>
-              <a:t>and a restricted pattern. The tool is much easier to test than an execute-anything endpoint."</a:t>
-            </a:r>
-          </a:p>
-          <a:p>
-            <a:endParaRPr/>
-          </a:p>
-          <a:p>
-            <a:r>
-              <a:t>ACTION: In a prepared terminal at the repository root, run:</a:t>
-            </a:r>
-          </a:p>
-          <a:p>
-            <a:r>
-              <a:t>```powershell</a:t>
-            </a:r>
-          </a:p>
-          <a:p>
-            <a:r>
-              <a:t>Set-Location (git rev-parse --show-toplevel)</a:t>
-            </a:r>
-          </a:p>
-          <a:p>
-            <a:r>
-              <a:t>./caldova-recall-control/.venv/Scripts/python.exe caldova-recall-control/scripts/inspect_mcp.py</a:t>
-            </a:r>
-          </a:p>
-          <a:p>
-            <a:r>
-              <a:t>```</a:t>
-            </a:r>
-          </a:p>
-          <a:p>
-            <a:r>
-              <a:t>The script runs all its checks. Discuss connection/discovery/schema/read output here;</a:t>
-            </a:r>
-          </a:p>
-          <a:p>
-            <a:r>
-              <a:t>leave its failure output ready to revisit on slide 7. Do not claim the script paused itself.</a:t>
-            </a:r>
-          </a:p>
-          <a:p>
-            <a:endParaRPr/>
-          </a:p>
-          <a:p>
-            <a:r>
-              <a:t>POINT: Actual negotiated version; tools/list; locate_inventory inputSchema; tools/call</a:t>
-            </a:r>
-          </a:p>
-          <a:p>
-            <a:r>
-              <a:t>arguments; structuredContent. Seven server tools are discovered, but the agent wrappers</a:t>
-            </a:r>
-          </a:p>
-          <a:p>
-            <a:r>
-              <a:t>expose only three read tools. Discovery is not permission.</a:t>
-            </a:r>
-          </a:p>
-          <a:p>
-            <a:endParaRPr/>
-          </a:p>
-          <a:p>
-            <a:r>
-              <a:t>CHECK: The valid read reports total_units 2196 and locations 4. Inspect positions as well.</a:t>
-            </a:r>
-          </a:p>
-          <a:p>
-            <a:r>
-              <a:t>Say "Here are the returned facts" only after seeing them. The output schema is generic;</a:t>
-            </a:r>
-          </a:p>
-          <a:p>
-            <a:r>
-              <a:t>the client checks the inventory facts. A typed result would strengthen the contract.</a:t>
-            </a:r>
-          </a:p>
-          <a:p>
-            <a:endParaRPr/>
-          </a:p>
-          <a:p>
-            <a:r>
-              <a:t>SAY: "No model produced these rows. That's valuable: we can prove the tool contract</a:t>
-            </a:r>
-          </a:p>
-          <a:p>
-            <a:r>
-              <a:t>independently, then ask whether the agent uses its evidence faithfully."</a:t>
-            </a:r>
-          </a:p>
-          <a:p>
-            <a:endParaRPr/>
-          </a:p>
-          <a:p>
-            <a:r>
-              <a:t>FALLBACK: Show the tool handler and expected fixture, labelled as source evidence. Don't</a:t>
-            </a:r>
-          </a:p>
-          <a:p>
-            <a:r>
-              <a:t>describe a failed inspection as a passing call. Stop this segment at 5:00.</a:t>
-            </a:r>
-          </a:p>
-          <a:p>
-            <a:r>
-              <a:t>LESSON: Narrow input, structured output, and explicit checks make integrations testable.</a:t>
-            </a:r>
-          </a:p>
-          <a:p>
-            <a:r>
-              <a:t>TRANSITION: "Now Asha needs more than stock. How should we coordinate the other evidence?"</a:t>
-            </a:r>
+              <a:rPr lang="en-GB" dirty="0"/>
+              <a:t>So Asha's very broad </a:t>
+            </a:r>
+            <a:r>
+              <a:rPr dirty="0"/>
+              <a:t>question </a:t>
+            </a:r>
+            <a:r>
+              <a:rPr lang="en-GB" dirty="0"/>
+              <a:t>— where is this batch and how exposed are we — collapses down to </a:t>
+            </a:r>
+            <a:r>
+              <a:rPr dirty="0"/>
+              <a:t>one narrow </a:t>
+            </a:r>
+            <a:r>
+              <a:rPr lang="en-GB" dirty="0"/>
+              <a:t>tool </a:t>
+            </a:r>
+            <a:r>
+              <a:rPr dirty="0"/>
+              <a:t>call</a:t>
+            </a:r>
+            <a:r>
+              <a:rPr lang="en-GB" dirty="0"/>
+              <a:t>.</a:t>
+            </a:r>
+          </a:p>
+          <a:p>
+            <a:r>
+              <a:rPr lang="en-GB" dirty="0"/>
+              <a:t>Locate </a:t>
+            </a:r>
+            <a:r>
+              <a:rPr dirty="0"/>
+              <a:t>inventory</a:t>
+            </a:r>
+            <a:r>
+              <a:rPr lang="en-GB" dirty="0"/>
+              <a:t>,</a:t>
+            </a:r>
+            <a:r>
+              <a:rPr dirty="0"/>
+              <a:t> for this batch.</a:t>
+            </a:r>
+          </a:p>
+          <a:p>
+            <a:r>
+              <a:rPr lang="en-GB" dirty="0"/>
+              <a:t>And before I call it, I can read its input schema.</a:t>
+            </a:r>
+          </a:p>
+          <a:p>
+            <a:r>
+              <a:rPr lang="en-GB" dirty="0"/>
+              <a:t>The batch identifier is required, it's bounded between one and sixty-four characters, and it only accepts uppercase letters, digits and hyphens.</a:t>
+            </a:r>
+          </a:p>
+          <a:p>
+            <a:r>
+              <a:rPr lang="en-GB" dirty="0"/>
+              <a:t>That is a surface you can test.</a:t>
+            </a:r>
+          </a:p>
+          <a:p>
+            <a:r>
+              <a:rPr lang="en-GB" dirty="0"/>
+              <a:t>An </a:t>
+            </a:r>
+            <a:r>
+              <a:rPr dirty="0"/>
+              <a:t>execute-anything endpoint</a:t>
+            </a:r>
+            <a:r>
+              <a:rPr lang="en-GB" dirty="0"/>
+              <a:t> is not, and that difference is most of the security story right there.</a:t>
+            </a:r>
+            <a:endParaRPr dirty="0"/>
+          </a:p>
+          <a:p>
+            <a:r>
+              <a:rPr lang="en-GB" dirty="0"/>
+              <a:t>So I call it, and the structured content comes back.</a:t>
+            </a:r>
+          </a:p>
+          <a:p>
+            <a:r>
+              <a:rPr lang="en-GB" dirty="0"/>
+              <a:t>Two thousand one hundred and ninety-six units. Four positions</a:t>
+            </a:r>
+            <a:r>
+              <a:rPr dirty="0"/>
+              <a:t>.</a:t>
+            </a:r>
+            <a:r>
+              <a:rPr lang="en-GB" dirty="0"/>
+              <a:t> Exactly what the slide said.</a:t>
+            </a:r>
+            <a:endParaRPr dirty="0"/>
+          </a:p>
+          <a:p>
+            <a:r>
+              <a:rPr lang="en-GB" dirty="0"/>
+              <a:t>Now I want you to watch one other number while I'm here, which is the tool count.</a:t>
+            </a:r>
+          </a:p>
+          <a:p>
+            <a:r>
+              <a:rPr lang="en-GB" dirty="0"/>
+              <a:t>The server discovers seven tools.</a:t>
+            </a:r>
+          </a:p>
+          <a:p>
+            <a:r>
+              <a:rPr lang="en-GB" dirty="0"/>
+              <a:t>The agent wrappers expose three of them, and all </a:t>
+            </a:r>
+            <a:r>
+              <a:rPr dirty="0"/>
+              <a:t>three </a:t>
+            </a:r>
+            <a:r>
+              <a:rPr lang="en-GB" dirty="0"/>
+              <a:t>are read-only</a:t>
+            </a:r>
+            <a:r>
+              <a:rPr dirty="0"/>
+              <a:t>.</a:t>
+            </a:r>
+            <a:endParaRPr lang="en-GB" dirty="0"/>
+          </a:p>
+          <a:p>
+            <a:r>
+              <a:rPr dirty="0"/>
+              <a:t>Discovery is not permission.</a:t>
+            </a:r>
+            <a:r>
+              <a:rPr lang="en-GB" dirty="0"/>
+              <a:t> Those are separate decisions, and conflating them is how people end up with an agent that can delete things.</a:t>
+            </a:r>
+          </a:p>
+          <a:p>
+            <a:r>
+              <a:rPr lang="en-GB" dirty="0"/>
+              <a:t>Here's why this demo is worth two minutes of a twenty-five minute talk.</a:t>
+            </a:r>
+            <a:endParaRPr dirty="0"/>
+          </a:p>
+          <a:p>
+            <a:r>
+              <a:rPr dirty="0"/>
+              <a:t>No model produced these rows</a:t>
+            </a:r>
+            <a:r>
+              <a:rPr lang="en-GB" dirty="0"/>
+              <a:t>.</a:t>
+            </a:r>
+          </a:p>
+          <a:p>
+            <a:r>
+              <a:rPr lang="en-GB" dirty="0"/>
+              <a:t>Which means I </a:t>
+            </a:r>
+            <a:r>
+              <a:rPr dirty="0"/>
+              <a:t>can prove the </a:t>
+            </a:r>
+            <a:r>
+              <a:rPr lang="en-GB" dirty="0"/>
+              <a:t>tool </a:t>
+            </a:r>
+            <a:r>
+              <a:rPr dirty="0"/>
+              <a:t>contract</a:t>
+            </a:r>
+            <a:r>
+              <a:rPr lang="en-GB" dirty="0"/>
+              <a:t> completely on its own, and then go and ask, separately, whether </a:t>
+            </a:r>
+            <a:r>
+              <a:rPr dirty="0"/>
+              <a:t>the agent </a:t>
+            </a:r>
+            <a:r>
+              <a:rPr lang="en-GB" dirty="0"/>
+              <a:t>uses that evidence faithfully.</a:t>
+            </a:r>
+          </a:p>
+          <a:p>
+            <a:r>
+              <a:rPr lang="en-GB" dirty="0"/>
+              <a:t>Two problems, two test suites.</a:t>
+            </a:r>
+            <a:endParaRPr dirty="0"/>
+          </a:p>
+          <a:p>
+            <a:r>
+              <a:rPr lang="en-GB" dirty="0"/>
+              <a:t>One honest gap while we're here. The output schema is generic</a:t>
+            </a:r>
+            <a:r>
+              <a:rPr dirty="0"/>
+              <a:t>, </a:t>
+            </a:r>
+            <a:r>
+              <a:rPr lang="en-GB" dirty="0"/>
+              <a:t>so it's my client doing the checking</a:t>
+            </a:r>
+            <a:r>
+              <a:rPr dirty="0"/>
+              <a:t>.</a:t>
+            </a:r>
+            <a:endParaRPr lang="en-GB" dirty="0"/>
+          </a:p>
+          <a:p>
+            <a:r>
+              <a:rPr lang="en-GB" dirty="0"/>
+              <a:t>A typed result would make that contract stronger, and if I were shipping this, that's the first thing I'd fix.</a:t>
+            </a:r>
+          </a:p>
+          <a:p>
+            <a:r>
+              <a:rPr lang="en-GB" dirty="0"/>
+              <a:t>So Asha has her stock. She still needs everything else</a:t>
+            </a:r>
+            <a:r>
+              <a:rPr dirty="0"/>
+              <a:t>.</a:t>
+            </a:r>
+            <a:endParaRPr lang="en-GB" dirty="0"/>
+          </a:p>
+          <a:p>
+            <a:r>
+              <a:rPr lang="en-GB" dirty="0"/>
+              <a:t>How should we coordinate the rest of the evidence?</a:t>
+            </a:r>
+            <a:endParaRPr dirty="0"/>
           </a:p>
         </p:txBody>
       </p:sp>
@@ -4183,88 +6179,257 @@
           <a:lstStyle/>
           <a:p>
             <a:r>
-              <a:t>TIME: 5:00-6:30. Decision comparison; only sequential collaboration is implemented.</a:t>
-            </a:r>
-          </a:p>
-          <a:p>
-            <a:endParaRPr/>
-          </a:p>
-          <a:p>
-            <a:r>
-              <a:t>SAY: "For a full recall brief, this example uses a fixed sequence of specialists. Each</a:t>
-            </a:r>
-          </a:p>
-          <a:p>
-            <a:r>
-              <a:t>handoff gives us somewhere to inspect what the next step receives.</a:t>
-            </a:r>
-          </a:p>
-          <a:p>
-            <a:endParaRPr/>
-          </a:p>
-          <a:p>
-            <a:r>
-              <a:t>Change the request to 'just check the supplier', and a routing design might choose one</a:t>
-            </a:r>
-          </a:p>
-          <a:p>
-            <a:r>
-              <a:t>specialist instead. But a router needs bounded choices and a stopping rule. A supervisor</a:t>
-            </a:r>
-          </a:p>
-          <a:p>
-            <a:r>
-              <a:t>that chooses the next worker is different from one that only writes the final summary.</a:t>
-            </a:r>
-          </a:p>
-          <a:p>
-            <a:endParaRPr/>
-          </a:p>
-          <a:p>
-            <a:r>
-              <a:t>If stock and supplier evidence are independent once we know the batch, parallel reads</a:t>
-            </a:r>
-          </a:p>
-          <a:p>
-            <a:r>
-              <a:t>may reduce waiting. Then we need to decide what happens when only one source responds.</a:t>
-            </a:r>
-          </a:p>
-          <a:p>
-            <a:endParaRPr/>
-          </a:p>
-          <a:p>
-            <a:r>
-              <a:t>Those are alternatives, not three names for the same thing. Our live example is sequential.</a:t>
-            </a:r>
-          </a:p>
-          <a:p>
-            <a:r>
-              <a:t>The final agent is a synthesiser, not a dynamic router. More agents aren't automatically better."</a:t>
-            </a:r>
-          </a:p>
-          <a:p>
-            <a:endParaRPr/>
-          </a:p>
-          <a:p>
-            <a:r>
-              <a:t>ASK: "If the only question is the stock count, would you run the entire four-agent sequence?"</a:t>
-            </a:r>
-          </a:p>
-          <a:p>
-            <a:r>
-              <a:t>Take one response. A direct tool call or smaller workflow may be sufficient.</a:t>
-            </a:r>
-          </a:p>
-          <a:p>
-            <a:r>
-              <a:t>LESSON: Choose by evidence dependencies, request variation, and failure policy.</a:t>
-            </a:r>
-          </a:p>
-          <a:p>
-            <a:r>
-              <a:t>TRANSITION: "Let's see what the implemented sequence adds to the raw tool facts."</a:t>
-            </a:r>
+              <a:rPr lang="en-GB" dirty="0"/>
+              <a:t>There are three patterns on this slide and only one of them is running today.</a:t>
+            </a:r>
+          </a:p>
+          <a:p>
+            <a:r>
+              <a:rPr lang="en-GB" dirty="0"/>
+              <a:t>What I've implemented is a fixed sequence of specialists, and I chose that because every </a:t>
+            </a:r>
+            <a:r>
+              <a:rPr dirty="0"/>
+              <a:t>handoff </a:t>
+            </a:r>
+            <a:r>
+              <a:rPr lang="en-GB" dirty="0"/>
+              <a:t>gives me somewhere to look at what the next step actually received.</a:t>
+            </a:r>
+          </a:p>
+          <a:p>
+            <a:r>
+              <a:rPr lang="en-GB" dirty="0"/>
+              <a:t>That's a debugging property, not a performance one</a:t>
+            </a:r>
+            <a:r>
+              <a:rPr dirty="0"/>
+              <a:t>.</a:t>
+            </a:r>
+          </a:p>
+          <a:p>
+            <a:r>
+              <a:rPr lang="en-GB" dirty="0"/>
+              <a:t>Now, change the request to just check </a:t>
+            </a:r>
+            <a:r>
+              <a:rPr dirty="0"/>
+              <a:t>the supplier</a:t>
+            </a:r>
+            <a:r>
+              <a:rPr lang="en-GB" dirty="0"/>
+              <a:t>, </a:t>
+            </a:r>
+            <a:r>
+              <a:rPr dirty="0"/>
+              <a:t>and a </a:t>
+            </a:r>
+            <a:r>
+              <a:rPr lang="en-GB" dirty="0"/>
+              <a:t>routing design could pick a single </a:t>
+            </a:r>
+            <a:r>
+              <a:rPr dirty="0"/>
+              <a:t>specialist</a:t>
+            </a:r>
+            <a:r>
+              <a:rPr lang="en-GB" dirty="0"/>
+              <a:t> instead.</a:t>
+            </a:r>
+          </a:p>
+          <a:p>
+            <a:r>
+              <a:rPr lang="en-GB" dirty="0"/>
+              <a:t>But </a:t>
+            </a:r>
+            <a:r>
+              <a:rPr dirty="0"/>
+              <a:t>a router needs </a:t>
+            </a:r>
+            <a:r>
+              <a:rPr lang="en-GB" dirty="0"/>
+              <a:t>a </a:t>
+            </a:r>
+            <a:r>
+              <a:rPr dirty="0"/>
+              <a:t>bounded </a:t>
+            </a:r>
+            <a:r>
+              <a:rPr lang="en-GB" dirty="0"/>
+              <a:t>set of choices </a:t>
+            </a:r>
+            <a:r>
+              <a:rPr dirty="0"/>
+              <a:t>and a stopping rule</a:t>
+            </a:r>
+            <a:r>
+              <a:rPr lang="en-GB" dirty="0"/>
+              <a:t>, otherwise you've built something that can loop</a:t>
+            </a:r>
+            <a:r>
+              <a:rPr dirty="0"/>
+              <a:t>.</a:t>
+            </a:r>
+            <a:endParaRPr lang="en-GB" dirty="0"/>
+          </a:p>
+          <a:p>
+            <a:r>
+              <a:rPr lang="en-GB" dirty="0"/>
+              <a:t>And notice a supervisor that chooses the next worker is a genuinely different component from one that only writes the final summary.</a:t>
+            </a:r>
+          </a:p>
+          <a:p>
+            <a:r>
+              <a:rPr lang="en-GB" dirty="0"/>
+              <a:t>They get called the same thing in blog posts. They are not the same thing.</a:t>
+            </a:r>
+          </a:p>
+          <a:p>
+            <a:r>
+              <a:rPr lang="en-GB" dirty="0"/>
+              <a:t>Third option: once you know </a:t>
+            </a:r>
+            <a:r>
+              <a:rPr dirty="0"/>
+              <a:t>the </a:t>
+            </a:r>
+            <a:r>
+              <a:rPr lang="en-GB" dirty="0"/>
+              <a:t>batch</a:t>
+            </a:r>
+            <a:r>
+              <a:rPr dirty="0"/>
+              <a:t>, </a:t>
+            </a:r>
+            <a:r>
+              <a:rPr lang="en-GB" dirty="0"/>
+              <a:t>stock and supplier evidence are independent, so you could fetch them in </a:t>
+            </a:r>
+            <a:r>
+              <a:rPr dirty="0"/>
+              <a:t>parallel </a:t>
+            </a:r>
+            <a:r>
+              <a:rPr lang="en-GB" dirty="0"/>
+              <a:t>and cut the waiting.</a:t>
+            </a:r>
+          </a:p>
+          <a:p>
+            <a:r>
+              <a:rPr lang="en-GB" dirty="0"/>
+              <a:t>The moment you do that, you owe yourself a decision about what happens when only one of them comes back</a:t>
+            </a:r>
+            <a:r>
+              <a:rPr dirty="0"/>
+              <a:t>.</a:t>
+            </a:r>
+          </a:p>
+          <a:p>
+            <a:r>
+              <a:rPr lang="en-GB" dirty="0"/>
+              <a:t>So these are three different designs with three different failure modes</a:t>
+            </a:r>
+            <a:r>
+              <a:rPr dirty="0"/>
+              <a:t>, not three </a:t>
+            </a:r>
+            <a:r>
+              <a:rPr lang="en-GB" dirty="0"/>
+              <a:t>names </a:t>
+            </a:r>
+            <a:r>
+              <a:rPr dirty="0"/>
+              <a:t>for the same </a:t>
+            </a:r>
+            <a:r>
+              <a:rPr lang="en-GB" dirty="0"/>
+              <a:t>idea</a:t>
+            </a:r>
+            <a:r>
+              <a:rPr dirty="0"/>
+              <a:t>.</a:t>
+            </a:r>
+            <a:endParaRPr lang="en-GB" dirty="0"/>
+          </a:p>
+          <a:p>
+            <a:r>
+              <a:rPr lang="en-GB" dirty="0"/>
+              <a:t>Ours </a:t>
+            </a:r>
+            <a:r>
+              <a:rPr dirty="0"/>
+              <a:t>is sequential</a:t>
+            </a:r>
+            <a:r>
+              <a:rPr lang="en-GB" dirty="0"/>
+              <a:t>, and the final </a:t>
+            </a:r>
+            <a:r>
+              <a:rPr dirty="0"/>
+              <a:t>agent </a:t>
+            </a:r>
+            <a:r>
+              <a:rPr lang="en-GB" dirty="0"/>
+              <a:t>synthesises — it doesn't route.</a:t>
+            </a:r>
+          </a:p>
+          <a:p>
+            <a:r>
+              <a:rPr lang="en-GB" dirty="0"/>
+              <a:t>Let me ask the uncomfortable version of the question.</a:t>
+            </a:r>
+            <a:endParaRPr dirty="0"/>
+          </a:p>
+          <a:p>
+            <a:r>
+              <a:rPr dirty="0"/>
+              <a:t>If the </a:t>
+            </a:r>
+            <a:r>
+              <a:rPr lang="en-GB" dirty="0"/>
+              <a:t>only thing you needed was </a:t>
+            </a:r>
+            <a:r>
+              <a:rPr dirty="0"/>
+              <a:t>the stock count, would you run </a:t>
+            </a:r>
+            <a:r>
+              <a:rPr lang="en-GB" dirty="0"/>
+              <a:t>the entire four-agent sequence?</a:t>
+            </a:r>
+          </a:p>
+          <a:p>
+            <a:r>
+              <a:rPr lang="en-GB" dirty="0"/>
+              <a:t>Of course not. A single tool call does it.</a:t>
+            </a:r>
+          </a:p>
+          <a:p>
+            <a:r>
+              <a:rPr lang="en-GB" dirty="0"/>
+              <a:t>More agents is not a better architecture, it's a bigger one.</a:t>
+            </a:r>
+          </a:p>
+          <a:p>
+            <a:r>
+              <a:rPr lang="en-GB" dirty="0"/>
+              <a:t>Choose by evidence dependencies, by how much the request varies, and by your failure policy.</a:t>
+            </a:r>
+          </a:p>
+          <a:p>
+            <a:r>
+              <a:rPr lang="en-GB" dirty="0"/>
+              <a:t>Let's go and see what the sequence actually adds on top of </a:t>
+            </a:r>
+            <a:r>
+              <a:rPr dirty="0"/>
+              <a:t>the </a:t>
+            </a:r>
+            <a:r>
+              <a:rPr lang="en-GB" dirty="0"/>
+              <a:t>raw tool facts.</a:t>
+            </a:r>
+            <a:endParaRPr dirty="0"/>
           </a:p>
         </p:txBody>
       </p:sp>
@@ -4333,25 +6498,57 @@
           <a:lstStyle/>
           <a:p>
             <a:r>
-              <a:t>DEMO BREAK 02: Produce the brief.</a:t>
-            </a:r>
-          </a:p>
-          <a:p>
-            <a:endParaRPr/>
-          </a:p>
-          <a:p>
-            <a:r>
-              <a:t>ACTION: Switch to the prepared Hosted Control Tower.</a:t>
-            </a:r>
-          </a:p>
-          <a:p>
-            <a:r>
-              <a:t>PURPOSE: Run the read-only agent workflow and retain its response evidence.</a:t>
-            </a:r>
-          </a:p>
-          <a:p>
-            <a:r>
-              <a:t>Do not advance until the demonstration surface is ready. Use the scripted fallback if live evidence is unavailable.</a:t>
+              <a:rPr lang="en-GB"/>
+              <a:t>Demo two. Let's produce </a:t>
+            </a:r>
+            <a:r>
+              <a:t>the brief.</a:t>
+            </a:r>
+          </a:p>
+          <a:p>
+            <a:r>
+              <a:rPr lang="en-GB"/>
+              <a:t>This is the hosted </a:t>
+            </a:r>
+            <a:r>
+              <a:t>Control Tower</a:t>
+            </a:r>
+            <a:r>
+              <a:rPr lang="en-GB"/>
+              <a:t>, running the </a:t>
+            </a:r>
+            <a:r>
+              <a:t>read-only </a:t>
+            </a:r>
+            <a:r>
+              <a:rPr lang="en-GB"/>
+              <a:t>agent </a:t>
+            </a:r>
+            <a:r>
+              <a:t>workflow</a:t>
+            </a:r>
+            <a:r>
+              <a:rPr lang="en-GB"/>
+              <a:t> against a real hosted agent</a:t>
+            </a:r>
+            <a:r>
+              <a:t>.</a:t>
+            </a:r>
+          </a:p>
+          <a:p>
+            <a:r>
+              <a:rPr lang="en-GB"/>
+              <a:t>Keep half an eye on </a:t>
+            </a:r>
+            <a:r>
+              <a:t>the </a:t>
+            </a:r>
+            <a:r>
+              <a:rPr lang="en-GB"/>
+              <a:t>response ID, because we come back to this same session for the approval in a few minutes</a:t>
+            </a:r>
+            <a:r>
+              <a:t>.</a:t>
             </a:r>
           </a:p>
         </p:txBody>
@@ -4377,592 +6574,6 @@
 </file>
 
 <file path=ppt/slideLayouts/slideLayout1.xml><?xml version="1.0" encoding="utf-8"?>
-<p:sldLayout xmlns:a="http://schemas.openxmlformats.org/drawingml/2006/main" xmlns:r="http://schemas.openxmlformats.org/officeDocument/2006/relationships" xmlns:p="http://schemas.openxmlformats.org/presentationml/2006/main" type="title" preserve="1">
-  <p:cSld name="Title Slide">
-    <p:spTree>
-      <p:nvGrpSpPr>
-        <p:cNvPr id="1" name=""/>
-        <p:cNvGrpSpPr/>
-        <p:nvPr/>
-      </p:nvGrpSpPr>
-      <p:grpSpPr>
-        <a:xfrm>
-          <a:off x="0" y="0"/>
-          <a:ext cx="0" cy="0"/>
-          <a:chOff x="0" y="0"/>
-          <a:chExt cx="0" cy="0"/>
-        </a:xfrm>
-      </p:grpSpPr>
-      <p:sp>
-        <p:nvSpPr>
-          <p:cNvPr id="2" name="Title 1"/>
-          <p:cNvSpPr>
-            <a:spLocks noGrp="1"/>
-          </p:cNvSpPr>
-          <p:nvPr>
-            <p:ph type="ctrTitle"/>
-          </p:nvPr>
-        </p:nvSpPr>
-        <p:spPr>
-          <a:xfrm>
-            <a:off x="685800" y="2130425"/>
-            <a:ext cx="7772400" cy="1470025"/>
-          </a:xfrm>
-        </p:spPr>
-        <p:txBody>
-          <a:bodyPr/>
-          <a:lstStyle/>
-          <a:p>
-            <a:r>
-              <a:rPr lang="en-US"/>
-              <a:t>Click to edit Master title style</a:t>
-            </a:r>
-          </a:p>
-        </p:txBody>
-      </p:sp>
-      <p:sp>
-        <p:nvSpPr>
-          <p:cNvPr id="3" name="Subtitle 2"/>
-          <p:cNvSpPr>
-            <a:spLocks noGrp="1"/>
-          </p:cNvSpPr>
-          <p:nvPr>
-            <p:ph type="subTitle" idx="1"/>
-          </p:nvPr>
-        </p:nvSpPr>
-        <p:spPr>
-          <a:xfrm>
-            <a:off x="1371600" y="3886200"/>
-            <a:ext cx="6400800" cy="1752600"/>
-          </a:xfrm>
-        </p:spPr>
-        <p:txBody>
-          <a:bodyPr/>
-          <a:lstStyle>
-            <a:lvl1pPr marL="0" indent="0" algn="ctr">
-              <a:buNone/>
-              <a:defRPr>
-                <a:solidFill>
-                  <a:schemeClr val="tx1">
-                    <a:tint val="75000"/>
-                  </a:schemeClr>
-                </a:solidFill>
-              </a:defRPr>
-            </a:lvl1pPr>
-            <a:lvl2pPr marL="457200" indent="0" algn="ctr">
-              <a:buNone/>
-              <a:defRPr>
-                <a:solidFill>
-                  <a:schemeClr val="tx1">
-                    <a:tint val="75000"/>
-                  </a:schemeClr>
-                </a:solidFill>
-              </a:defRPr>
-            </a:lvl2pPr>
-            <a:lvl3pPr marL="914400" indent="0" algn="ctr">
-              <a:buNone/>
-              <a:defRPr>
-                <a:solidFill>
-                  <a:schemeClr val="tx1">
-                    <a:tint val="75000"/>
-                  </a:schemeClr>
-                </a:solidFill>
-              </a:defRPr>
-            </a:lvl3pPr>
-            <a:lvl4pPr marL="1371600" indent="0" algn="ctr">
-              <a:buNone/>
-              <a:defRPr>
-                <a:solidFill>
-                  <a:schemeClr val="tx1">
-                    <a:tint val="75000"/>
-                  </a:schemeClr>
-                </a:solidFill>
-              </a:defRPr>
-            </a:lvl4pPr>
-            <a:lvl5pPr marL="1828800" indent="0" algn="ctr">
-              <a:buNone/>
-              <a:defRPr>
-                <a:solidFill>
-                  <a:schemeClr val="tx1">
-                    <a:tint val="75000"/>
-                  </a:schemeClr>
-                </a:solidFill>
-              </a:defRPr>
-            </a:lvl5pPr>
-            <a:lvl6pPr marL="2286000" indent="0" algn="ctr">
-              <a:buNone/>
-              <a:defRPr>
-                <a:solidFill>
-                  <a:schemeClr val="tx1">
-                    <a:tint val="75000"/>
-                  </a:schemeClr>
-                </a:solidFill>
-              </a:defRPr>
-            </a:lvl6pPr>
-            <a:lvl7pPr marL="2743200" indent="0" algn="ctr">
-              <a:buNone/>
-              <a:defRPr>
-                <a:solidFill>
-                  <a:schemeClr val="tx1">
-                    <a:tint val="75000"/>
-                  </a:schemeClr>
-                </a:solidFill>
-              </a:defRPr>
-            </a:lvl7pPr>
-            <a:lvl8pPr marL="3200400" indent="0" algn="ctr">
-              <a:buNone/>
-              <a:defRPr>
-                <a:solidFill>
-                  <a:schemeClr val="tx1">
-                    <a:tint val="75000"/>
-                  </a:schemeClr>
-                </a:solidFill>
-              </a:defRPr>
-            </a:lvl8pPr>
-            <a:lvl9pPr marL="3657600" indent="0" algn="ctr">
-              <a:buNone/>
-              <a:defRPr>
-                <a:solidFill>
-                  <a:schemeClr val="tx1">
-                    <a:tint val="75000"/>
-                  </a:schemeClr>
-                </a:solidFill>
-              </a:defRPr>
-            </a:lvl9pPr>
-          </a:lstStyle>
-          <a:p>
-            <a:r>
-              <a:rPr lang="en-US"/>
-              <a:t>Click to edit Master subtitle style</a:t>
-            </a:r>
-          </a:p>
-        </p:txBody>
-      </p:sp>
-      <p:sp>
-        <p:nvSpPr>
-          <p:cNvPr id="4" name="Date Placeholder 3"/>
-          <p:cNvSpPr>
-            <a:spLocks noGrp="1"/>
-          </p:cNvSpPr>
-          <p:nvPr>
-            <p:ph type="dt" sz="half" idx="10"/>
-          </p:nvPr>
-        </p:nvSpPr>
-        <p:spPr/>
-        <p:txBody>
-          <a:bodyPr/>
-          <a:lstStyle/>
-          <a:p>
-            <a:fld id="{5BCAD085-E8A6-8845-BD4E-CB4CCA059FC4}" type="datetimeFigureOut">
-              <a:rPr lang="en-US" smtClean="0"/>
-              <a:t>9/18/2026</a:t>
-            </a:fld>
-            <a:endParaRPr lang="en-US"/>
-          </a:p>
-        </p:txBody>
-      </p:sp>
-      <p:sp>
-        <p:nvSpPr>
-          <p:cNvPr id="5" name="Footer Placeholder 4"/>
-          <p:cNvSpPr>
-            <a:spLocks noGrp="1"/>
-          </p:cNvSpPr>
-          <p:nvPr>
-            <p:ph type="ftr" sz="quarter" idx="11"/>
-          </p:nvPr>
-        </p:nvSpPr>
-        <p:spPr/>
-        <p:txBody>
-          <a:bodyPr/>
-          <a:lstStyle/>
-          <a:p>
-            <a:endParaRPr lang="en-US"/>
-          </a:p>
-        </p:txBody>
-      </p:sp>
-      <p:sp>
-        <p:nvSpPr>
-          <p:cNvPr id="6" name="Slide Number Placeholder 5"/>
-          <p:cNvSpPr>
-            <a:spLocks noGrp="1"/>
-          </p:cNvSpPr>
-          <p:nvPr>
-            <p:ph type="sldNum" sz="quarter" idx="12"/>
-          </p:nvPr>
-        </p:nvSpPr>
-        <p:spPr/>
-        <p:txBody>
-          <a:bodyPr/>
-          <a:lstStyle/>
-          <a:p>
-            <a:fld id="{C1FF6DA9-008F-8B48-92A6-B652298478BF}" type="slidenum">
-              <a:rPr lang="en-US" smtClean="0"/>
-              <a:t>‹#›</a:t>
-            </a:fld>
-            <a:endParaRPr lang="en-US"/>
-          </a:p>
-        </p:txBody>
-      </p:sp>
-    </p:spTree>
-    <p:extLst>
-      <p:ext uri="{BB962C8B-B14F-4D97-AF65-F5344CB8AC3E}">
-        <p14:creationId xmlns:p14="http://schemas.microsoft.com/office/powerpoint/2010/main" val="3168075583"/>
-      </p:ext>
-    </p:extLst>
-  </p:cSld>
-  <p:clrMapOvr>
-    <a:masterClrMapping/>
-  </p:clrMapOvr>
-</p:sldLayout>
-</file>
-
-<file path=ppt/slideLayouts/slideLayout10.xml><?xml version="1.0" encoding="utf-8"?>
-<p:sldLayout xmlns:a="http://schemas.openxmlformats.org/drawingml/2006/main" xmlns:r="http://schemas.openxmlformats.org/officeDocument/2006/relationships" xmlns:p="http://schemas.openxmlformats.org/presentationml/2006/main" type="vertTx" preserve="1">
-  <p:cSld name="Title and Vertical Text">
-    <p:spTree>
-      <p:nvGrpSpPr>
-        <p:cNvPr id="1" name=""/>
-        <p:cNvGrpSpPr/>
-        <p:nvPr/>
-      </p:nvGrpSpPr>
-      <p:grpSpPr>
-        <a:xfrm>
-          <a:off x="0" y="0"/>
-          <a:ext cx="0" cy="0"/>
-          <a:chOff x="0" y="0"/>
-          <a:chExt cx="0" cy="0"/>
-        </a:xfrm>
-      </p:grpSpPr>
-      <p:sp>
-        <p:nvSpPr>
-          <p:cNvPr id="2" name="Title 1"/>
-          <p:cNvSpPr>
-            <a:spLocks noGrp="1"/>
-          </p:cNvSpPr>
-          <p:nvPr>
-            <p:ph type="title"/>
-          </p:nvPr>
-        </p:nvSpPr>
-        <p:spPr/>
-        <p:txBody>
-          <a:bodyPr/>
-          <a:lstStyle/>
-          <a:p>
-            <a:r>
-              <a:rPr lang="en-US"/>
-              <a:t>Click to edit Master title style</a:t>
-            </a:r>
-          </a:p>
-        </p:txBody>
-      </p:sp>
-      <p:sp>
-        <p:nvSpPr>
-          <p:cNvPr id="3" name="Vertical Text Placeholder 2"/>
-          <p:cNvSpPr>
-            <a:spLocks noGrp="1"/>
-          </p:cNvSpPr>
-          <p:nvPr>
-            <p:ph type="body" orient="vert" idx="1"/>
-          </p:nvPr>
-        </p:nvSpPr>
-        <p:spPr/>
-        <p:txBody>
-          <a:bodyPr vert="eaVert"/>
-          <a:lstStyle/>
-          <a:p>
-            <a:pPr lvl="0"/>
-            <a:r>
-              <a:rPr lang="en-US"/>
-              <a:t>Click to edit Master text styles</a:t>
-            </a:r>
-          </a:p>
-          <a:p>
-            <a:pPr lvl="1"/>
-            <a:r>
-              <a:rPr lang="en-US"/>
-              <a:t>Second level</a:t>
-            </a:r>
-          </a:p>
-          <a:p>
-            <a:pPr lvl="2"/>
-            <a:r>
-              <a:rPr lang="en-US"/>
-              <a:t>Third level</a:t>
-            </a:r>
-          </a:p>
-          <a:p>
-            <a:pPr lvl="3"/>
-            <a:r>
-              <a:rPr lang="en-US"/>
-              <a:t>Fourth level</a:t>
-            </a:r>
-          </a:p>
-          <a:p>
-            <a:pPr lvl="4"/>
-            <a:r>
-              <a:rPr lang="en-US"/>
-              <a:t>Fifth level</a:t>
-            </a:r>
-          </a:p>
-        </p:txBody>
-      </p:sp>
-      <p:sp>
-        <p:nvSpPr>
-          <p:cNvPr id="4" name="Date Placeholder 3"/>
-          <p:cNvSpPr>
-            <a:spLocks noGrp="1"/>
-          </p:cNvSpPr>
-          <p:nvPr>
-            <p:ph type="dt" sz="half" idx="10"/>
-          </p:nvPr>
-        </p:nvSpPr>
-        <p:spPr/>
-        <p:txBody>
-          <a:bodyPr/>
-          <a:lstStyle/>
-          <a:p>
-            <a:fld id="{5BCAD085-E8A6-8845-BD4E-CB4CCA059FC4}" type="datetimeFigureOut">
-              <a:rPr lang="en-US" smtClean="0"/>
-              <a:t>9/18/2026</a:t>
-            </a:fld>
-            <a:endParaRPr lang="en-US"/>
-          </a:p>
-        </p:txBody>
-      </p:sp>
-      <p:sp>
-        <p:nvSpPr>
-          <p:cNvPr id="5" name="Footer Placeholder 4"/>
-          <p:cNvSpPr>
-            <a:spLocks noGrp="1"/>
-          </p:cNvSpPr>
-          <p:nvPr>
-            <p:ph type="ftr" sz="quarter" idx="11"/>
-          </p:nvPr>
-        </p:nvSpPr>
-        <p:spPr/>
-        <p:txBody>
-          <a:bodyPr/>
-          <a:lstStyle/>
-          <a:p>
-            <a:endParaRPr lang="en-US"/>
-          </a:p>
-        </p:txBody>
-      </p:sp>
-      <p:sp>
-        <p:nvSpPr>
-          <p:cNvPr id="6" name="Slide Number Placeholder 5"/>
-          <p:cNvSpPr>
-            <a:spLocks noGrp="1"/>
-          </p:cNvSpPr>
-          <p:nvPr>
-            <p:ph type="sldNum" sz="quarter" idx="12"/>
-          </p:nvPr>
-        </p:nvSpPr>
-        <p:spPr/>
-        <p:txBody>
-          <a:bodyPr/>
-          <a:lstStyle/>
-          <a:p>
-            <a:fld id="{C1FF6DA9-008F-8B48-92A6-B652298478BF}" type="slidenum">
-              <a:rPr lang="en-US" smtClean="0"/>
-              <a:t>‹#›</a:t>
-            </a:fld>
-            <a:endParaRPr lang="en-US"/>
-          </a:p>
-        </p:txBody>
-      </p:sp>
-    </p:spTree>
-    <p:extLst>
-      <p:ext uri="{BB962C8B-B14F-4D97-AF65-F5344CB8AC3E}">
-        <p14:creationId xmlns:p14="http://schemas.microsoft.com/office/powerpoint/2010/main" val="2910927964"/>
-      </p:ext>
-    </p:extLst>
-  </p:cSld>
-  <p:clrMapOvr>
-    <a:masterClrMapping/>
-  </p:clrMapOvr>
-</p:sldLayout>
-</file>
-
-<file path=ppt/slideLayouts/slideLayout11.xml><?xml version="1.0" encoding="utf-8"?>
-<p:sldLayout xmlns:a="http://schemas.openxmlformats.org/drawingml/2006/main" xmlns:r="http://schemas.openxmlformats.org/officeDocument/2006/relationships" xmlns:p="http://schemas.openxmlformats.org/presentationml/2006/main" type="vertTitleAndTx" preserve="1">
-  <p:cSld name="Vertical Title and Text">
-    <p:spTree>
-      <p:nvGrpSpPr>
-        <p:cNvPr id="1" name=""/>
-        <p:cNvGrpSpPr/>
-        <p:nvPr/>
-      </p:nvGrpSpPr>
-      <p:grpSpPr>
-        <a:xfrm>
-          <a:off x="0" y="0"/>
-          <a:ext cx="0" cy="0"/>
-          <a:chOff x="0" y="0"/>
-          <a:chExt cx="0" cy="0"/>
-        </a:xfrm>
-      </p:grpSpPr>
-      <p:sp>
-        <p:nvSpPr>
-          <p:cNvPr id="2" name="Vertical Title 1"/>
-          <p:cNvSpPr>
-            <a:spLocks noGrp="1"/>
-          </p:cNvSpPr>
-          <p:nvPr>
-            <p:ph type="title" orient="vert"/>
-          </p:nvPr>
-        </p:nvSpPr>
-        <p:spPr>
-          <a:xfrm>
-            <a:off x="6629400" y="274638"/>
-            <a:ext cx="2057400" cy="5851525"/>
-          </a:xfrm>
-        </p:spPr>
-        <p:txBody>
-          <a:bodyPr vert="eaVert"/>
-          <a:lstStyle/>
-          <a:p>
-            <a:r>
-              <a:rPr lang="en-US"/>
-              <a:t>Click to edit Master title style</a:t>
-            </a:r>
-          </a:p>
-        </p:txBody>
-      </p:sp>
-      <p:sp>
-        <p:nvSpPr>
-          <p:cNvPr id="3" name="Vertical Text Placeholder 2"/>
-          <p:cNvSpPr>
-            <a:spLocks noGrp="1"/>
-          </p:cNvSpPr>
-          <p:nvPr>
-            <p:ph type="body" orient="vert" idx="1"/>
-          </p:nvPr>
-        </p:nvSpPr>
-        <p:spPr>
-          <a:xfrm>
-            <a:off x="457200" y="274638"/>
-            <a:ext cx="6019800" cy="5851525"/>
-          </a:xfrm>
-        </p:spPr>
-        <p:txBody>
-          <a:bodyPr vert="eaVert"/>
-          <a:lstStyle/>
-          <a:p>
-            <a:pPr lvl="0"/>
-            <a:r>
-              <a:rPr lang="en-US"/>
-              <a:t>Click to edit Master text styles</a:t>
-            </a:r>
-          </a:p>
-          <a:p>
-            <a:pPr lvl="1"/>
-            <a:r>
-              <a:rPr lang="en-US"/>
-              <a:t>Second level</a:t>
-            </a:r>
-          </a:p>
-          <a:p>
-            <a:pPr lvl="2"/>
-            <a:r>
-              <a:rPr lang="en-US"/>
-              <a:t>Third level</a:t>
-            </a:r>
-          </a:p>
-          <a:p>
-            <a:pPr lvl="3"/>
-            <a:r>
-              <a:rPr lang="en-US"/>
-              <a:t>Fourth level</a:t>
-            </a:r>
-          </a:p>
-          <a:p>
-            <a:pPr lvl="4"/>
-            <a:r>
-              <a:rPr lang="en-US"/>
-              <a:t>Fifth level</a:t>
-            </a:r>
-          </a:p>
-        </p:txBody>
-      </p:sp>
-      <p:sp>
-        <p:nvSpPr>
-          <p:cNvPr id="4" name="Date Placeholder 3"/>
-          <p:cNvSpPr>
-            <a:spLocks noGrp="1"/>
-          </p:cNvSpPr>
-          <p:nvPr>
-            <p:ph type="dt" sz="half" idx="10"/>
-          </p:nvPr>
-        </p:nvSpPr>
-        <p:spPr/>
-        <p:txBody>
-          <a:bodyPr/>
-          <a:lstStyle/>
-          <a:p>
-            <a:fld id="{5BCAD085-E8A6-8845-BD4E-CB4CCA059FC4}" type="datetimeFigureOut">
-              <a:rPr lang="en-US" smtClean="0"/>
-              <a:t>9/18/2026</a:t>
-            </a:fld>
-            <a:endParaRPr lang="en-US"/>
-          </a:p>
-        </p:txBody>
-      </p:sp>
-      <p:sp>
-        <p:nvSpPr>
-          <p:cNvPr id="5" name="Footer Placeholder 4"/>
-          <p:cNvSpPr>
-            <a:spLocks noGrp="1"/>
-          </p:cNvSpPr>
-          <p:nvPr>
-            <p:ph type="ftr" sz="quarter" idx="11"/>
-          </p:nvPr>
-        </p:nvSpPr>
-        <p:spPr/>
-        <p:txBody>
-          <a:bodyPr/>
-          <a:lstStyle/>
-          <a:p>
-            <a:endParaRPr lang="en-US"/>
-          </a:p>
-        </p:txBody>
-      </p:sp>
-      <p:sp>
-        <p:nvSpPr>
-          <p:cNvPr id="6" name="Slide Number Placeholder 5"/>
-          <p:cNvSpPr>
-            <a:spLocks noGrp="1"/>
-          </p:cNvSpPr>
-          <p:nvPr>
-            <p:ph type="sldNum" sz="quarter" idx="12"/>
-          </p:nvPr>
-        </p:nvSpPr>
-        <p:spPr/>
-        <p:txBody>
-          <a:bodyPr/>
-          <a:lstStyle/>
-          <a:p>
-            <a:fld id="{C1FF6DA9-008F-8B48-92A6-B652298478BF}" type="slidenum">
-              <a:rPr lang="en-US" smtClean="0"/>
-              <a:t>‹#›</a:t>
-            </a:fld>
-            <a:endParaRPr lang="en-US"/>
-          </a:p>
-        </p:txBody>
-      </p:sp>
-    </p:spTree>
-    <p:extLst>
-      <p:ext uri="{BB962C8B-B14F-4D97-AF65-F5344CB8AC3E}">
-        <p14:creationId xmlns:p14="http://schemas.microsoft.com/office/powerpoint/2010/main" val="3612223792"/>
-      </p:ext>
-    </p:extLst>
-  </p:cSld>
-  <p:clrMapOvr>
-    <a:masterClrMapping/>
-  </p:clrMapOvr>
-</p:sldLayout>
-</file>
-
-<file path=ppt/slideLayouts/slideLayout12.xml><?xml version="1.0" encoding="utf-8"?>
 <p:sldLayout xmlns:a="http://schemas.openxmlformats.org/drawingml/2006/main" xmlns:r="http://schemas.openxmlformats.org/officeDocument/2006/relationships" xmlns:p="http://schemas.openxmlformats.org/presentationml/2006/main" preserve="1">
   <p:cSld name="DEFAULT">
     <p:bg>
@@ -4992,7 +6603,7 @@
 </p:sldLayout>
 </file>
 
-<file path=ppt/slideLayouts/slideLayout13.xml><?xml version="1.0" encoding="utf-8"?>
+<file path=ppt/slideLayouts/slideLayout2.xml><?xml version="1.0" encoding="utf-8"?>
 <p:sldLayout xmlns:a="http://schemas.openxmlformats.org/drawingml/2006/main" xmlns:r="http://schemas.openxmlformats.org/officeDocument/2006/relationships" xmlns:p="http://schemas.openxmlformats.org/presentationml/2006/main" preserve="1">
   <p:cSld name="MCP_DARK">
     <p:bg>
@@ -5106,7 +6717,7 @@
               <a:buNone/>
             </a:pPr>
             <a:r>
-              <a:rPr lang="en-US" sz="750" b="1" kern="0" spc="140" dirty="0">
+              <a:rPr lang="en-US" sz="750" b="1" kern="0" spc="140">
                 <a:solidFill>
                   <a:srgbClr val="7ED9E4"/>
                 </a:solidFill>
@@ -5116,7 +6727,7 @@
               </a:rPr>
               <a:t>MCP COMMUNITY CONNECT · BENGALURU</a:t>
             </a:r>
-            <a:endParaRPr lang="en-US" sz="750" dirty="0"/>
+            <a:endParaRPr lang="en-US" sz="750"/>
           </a:p>
         </p:txBody>
       </p:sp>
@@ -5145,7 +6756,7 @@
               <a:buNone/>
             </a:pPr>
             <a:r>
-              <a:rPr lang="en-US" sz="750" kern="0" spc="110" dirty="0">
+              <a:rPr lang="en-US" sz="750" kern="0" spc="110">
                 <a:solidFill>
                   <a:srgbClr val="AAB7D8"/>
                 </a:solidFill>
@@ -5155,7 +6766,7 @@
               </a:rPr>
               <a:t>26 SEPTEMBER 2026</a:t>
             </a:r>
-            <a:endParaRPr lang="en-US" sz="750" dirty="0"/>
+            <a:endParaRPr lang="en-US" sz="750"/>
           </a:p>
         </p:txBody>
       </p:sp>
@@ -5179,7 +6790,7 @@
           </a:prstGeom>
           <a:extLst>
             <a:ext uri="{C572A759-6A51-4108-AA02-DFA0A04FC94B}">
-              <ma14:wrappingTextBoxFlag xmlns="" xmlns:ma14="http://schemas.microsoft.com/office/mac/drawingml/2011/main" val="0"/>
+              <ma14:wrappingTextBoxFlag xmlns:ma14="http://schemas.microsoft.com/office/mac/drawingml/2011/main" xmlns="" val="0"/>
             </a:ext>
           </a:extLst>
         </p:spPr>
@@ -5208,1862 +6819,6 @@
         </p:txBody>
       </p:sp>
     </p:spTree>
-  </p:cSld>
-  <p:clrMapOvr>
-    <a:masterClrMapping/>
-  </p:clrMapOvr>
-</p:sldLayout>
-</file>
-
-<file path=ppt/slideLayouts/slideLayout2.xml><?xml version="1.0" encoding="utf-8"?>
-<p:sldLayout xmlns:a="http://schemas.openxmlformats.org/drawingml/2006/main" xmlns:r="http://schemas.openxmlformats.org/officeDocument/2006/relationships" xmlns:p="http://schemas.openxmlformats.org/presentationml/2006/main" type="obj" preserve="1">
-  <p:cSld name="Title and Content">
-    <p:spTree>
-      <p:nvGrpSpPr>
-        <p:cNvPr id="1" name=""/>
-        <p:cNvGrpSpPr/>
-        <p:nvPr/>
-      </p:nvGrpSpPr>
-      <p:grpSpPr>
-        <a:xfrm>
-          <a:off x="0" y="0"/>
-          <a:ext cx="0" cy="0"/>
-          <a:chOff x="0" y="0"/>
-          <a:chExt cx="0" cy="0"/>
-        </a:xfrm>
-      </p:grpSpPr>
-      <p:sp>
-        <p:nvSpPr>
-          <p:cNvPr id="2" name="Title 1"/>
-          <p:cNvSpPr>
-            <a:spLocks noGrp="1"/>
-          </p:cNvSpPr>
-          <p:nvPr>
-            <p:ph type="title"/>
-          </p:nvPr>
-        </p:nvSpPr>
-        <p:spPr/>
-        <p:txBody>
-          <a:bodyPr/>
-          <a:lstStyle/>
-          <a:p>
-            <a:r>
-              <a:rPr lang="en-US"/>
-              <a:t>Click to edit Master title style</a:t>
-            </a:r>
-          </a:p>
-        </p:txBody>
-      </p:sp>
-      <p:sp>
-        <p:nvSpPr>
-          <p:cNvPr id="3" name="Content Placeholder 2"/>
-          <p:cNvSpPr>
-            <a:spLocks noGrp="1"/>
-          </p:cNvSpPr>
-          <p:nvPr>
-            <p:ph idx="1"/>
-          </p:nvPr>
-        </p:nvSpPr>
-        <p:spPr/>
-        <p:txBody>
-          <a:bodyPr/>
-          <a:lstStyle/>
-          <a:p>
-            <a:pPr lvl="0"/>
-            <a:r>
-              <a:rPr lang="en-US"/>
-              <a:t>Click to edit Master text styles</a:t>
-            </a:r>
-          </a:p>
-          <a:p>
-            <a:pPr lvl="1"/>
-            <a:r>
-              <a:rPr lang="en-US"/>
-              <a:t>Second level</a:t>
-            </a:r>
-          </a:p>
-          <a:p>
-            <a:pPr lvl="2"/>
-            <a:r>
-              <a:rPr lang="en-US"/>
-              <a:t>Third level</a:t>
-            </a:r>
-          </a:p>
-          <a:p>
-            <a:pPr lvl="3"/>
-            <a:r>
-              <a:rPr lang="en-US"/>
-              <a:t>Fourth level</a:t>
-            </a:r>
-          </a:p>
-          <a:p>
-            <a:pPr lvl="4"/>
-            <a:r>
-              <a:rPr lang="en-US"/>
-              <a:t>Fifth level</a:t>
-            </a:r>
-          </a:p>
-        </p:txBody>
-      </p:sp>
-      <p:sp>
-        <p:nvSpPr>
-          <p:cNvPr id="4" name="Date Placeholder 3"/>
-          <p:cNvSpPr>
-            <a:spLocks noGrp="1"/>
-          </p:cNvSpPr>
-          <p:nvPr>
-            <p:ph type="dt" sz="half" idx="10"/>
-          </p:nvPr>
-        </p:nvSpPr>
-        <p:spPr/>
-        <p:txBody>
-          <a:bodyPr/>
-          <a:lstStyle/>
-          <a:p>
-            <a:fld id="{5BCAD085-E8A6-8845-BD4E-CB4CCA059FC4}" type="datetimeFigureOut">
-              <a:rPr lang="en-US" smtClean="0"/>
-              <a:t>9/18/2026</a:t>
-            </a:fld>
-            <a:endParaRPr lang="en-US"/>
-          </a:p>
-        </p:txBody>
-      </p:sp>
-      <p:sp>
-        <p:nvSpPr>
-          <p:cNvPr id="5" name="Footer Placeholder 4"/>
-          <p:cNvSpPr>
-            <a:spLocks noGrp="1"/>
-          </p:cNvSpPr>
-          <p:nvPr>
-            <p:ph type="ftr" sz="quarter" idx="11"/>
-          </p:nvPr>
-        </p:nvSpPr>
-        <p:spPr/>
-        <p:txBody>
-          <a:bodyPr/>
-          <a:lstStyle/>
-          <a:p>
-            <a:endParaRPr lang="en-US"/>
-          </a:p>
-        </p:txBody>
-      </p:sp>
-      <p:sp>
-        <p:nvSpPr>
-          <p:cNvPr id="6" name="Slide Number Placeholder 5"/>
-          <p:cNvSpPr>
-            <a:spLocks noGrp="1"/>
-          </p:cNvSpPr>
-          <p:nvPr>
-            <p:ph type="sldNum" sz="quarter" idx="12"/>
-          </p:nvPr>
-        </p:nvSpPr>
-        <p:spPr/>
-        <p:txBody>
-          <a:bodyPr/>
-          <a:lstStyle/>
-          <a:p>
-            <a:fld id="{C1FF6DA9-008F-8B48-92A6-B652298478BF}" type="slidenum">
-              <a:rPr lang="en-US" smtClean="0"/>
-              <a:t>‹#›</a:t>
-            </a:fld>
-            <a:endParaRPr lang="en-US"/>
-          </a:p>
-        </p:txBody>
-      </p:sp>
-    </p:spTree>
-    <p:extLst>
-      <p:ext uri="{BB962C8B-B14F-4D97-AF65-F5344CB8AC3E}">
-        <p14:creationId xmlns:p14="http://schemas.microsoft.com/office/powerpoint/2010/main" val="2614314258"/>
-      </p:ext>
-    </p:extLst>
-  </p:cSld>
-  <p:clrMapOvr>
-    <a:masterClrMapping/>
-  </p:clrMapOvr>
-</p:sldLayout>
-</file>
-
-<file path=ppt/slideLayouts/slideLayout3.xml><?xml version="1.0" encoding="utf-8"?>
-<p:sldLayout xmlns:a="http://schemas.openxmlformats.org/drawingml/2006/main" xmlns:r="http://schemas.openxmlformats.org/officeDocument/2006/relationships" xmlns:p="http://schemas.openxmlformats.org/presentationml/2006/main" type="secHead" preserve="1">
-  <p:cSld name="Section Header">
-    <p:spTree>
-      <p:nvGrpSpPr>
-        <p:cNvPr id="1" name=""/>
-        <p:cNvGrpSpPr/>
-        <p:nvPr/>
-      </p:nvGrpSpPr>
-      <p:grpSpPr>
-        <a:xfrm>
-          <a:off x="0" y="0"/>
-          <a:ext cx="0" cy="0"/>
-          <a:chOff x="0" y="0"/>
-          <a:chExt cx="0" cy="0"/>
-        </a:xfrm>
-      </p:grpSpPr>
-      <p:sp>
-        <p:nvSpPr>
-          <p:cNvPr id="2" name="Title 1"/>
-          <p:cNvSpPr>
-            <a:spLocks noGrp="1"/>
-          </p:cNvSpPr>
-          <p:nvPr>
-            <p:ph type="title"/>
-          </p:nvPr>
-        </p:nvSpPr>
-        <p:spPr>
-          <a:xfrm>
-            <a:off x="722313" y="4406900"/>
-            <a:ext cx="7772400" cy="1362075"/>
-          </a:xfrm>
-        </p:spPr>
-        <p:txBody>
-          <a:bodyPr anchor="t"/>
-          <a:lstStyle>
-            <a:lvl1pPr algn="l">
-              <a:defRPr sz="4000" b="1" cap="all"/>
-            </a:lvl1pPr>
-          </a:lstStyle>
-          <a:p>
-            <a:r>
-              <a:rPr lang="en-US"/>
-              <a:t>Click to edit Master title style</a:t>
-            </a:r>
-          </a:p>
-        </p:txBody>
-      </p:sp>
-      <p:sp>
-        <p:nvSpPr>
-          <p:cNvPr id="3" name="Text Placeholder 2"/>
-          <p:cNvSpPr>
-            <a:spLocks noGrp="1"/>
-          </p:cNvSpPr>
-          <p:nvPr>
-            <p:ph type="body" idx="1"/>
-          </p:nvPr>
-        </p:nvSpPr>
-        <p:spPr>
-          <a:xfrm>
-            <a:off x="722313" y="2906713"/>
-            <a:ext cx="7772400" cy="1500187"/>
-          </a:xfrm>
-        </p:spPr>
-        <p:txBody>
-          <a:bodyPr anchor="b"/>
-          <a:lstStyle>
-            <a:lvl1pPr marL="0" indent="0">
-              <a:buNone/>
-              <a:defRPr sz="2000">
-                <a:solidFill>
-                  <a:schemeClr val="tx1">
-                    <a:tint val="75000"/>
-                  </a:schemeClr>
-                </a:solidFill>
-              </a:defRPr>
-            </a:lvl1pPr>
-            <a:lvl2pPr marL="457200" indent="0">
-              <a:buNone/>
-              <a:defRPr sz="1800">
-                <a:solidFill>
-                  <a:schemeClr val="tx1">
-                    <a:tint val="75000"/>
-                  </a:schemeClr>
-                </a:solidFill>
-              </a:defRPr>
-            </a:lvl2pPr>
-            <a:lvl3pPr marL="914400" indent="0">
-              <a:buNone/>
-              <a:defRPr sz="1600">
-                <a:solidFill>
-                  <a:schemeClr val="tx1">
-                    <a:tint val="75000"/>
-                  </a:schemeClr>
-                </a:solidFill>
-              </a:defRPr>
-            </a:lvl3pPr>
-            <a:lvl4pPr marL="1371600" indent="0">
-              <a:buNone/>
-              <a:defRPr sz="1400">
-                <a:solidFill>
-                  <a:schemeClr val="tx1">
-                    <a:tint val="75000"/>
-                  </a:schemeClr>
-                </a:solidFill>
-              </a:defRPr>
-            </a:lvl4pPr>
-            <a:lvl5pPr marL="1828800" indent="0">
-              <a:buNone/>
-              <a:defRPr sz="1400">
-                <a:solidFill>
-                  <a:schemeClr val="tx1">
-                    <a:tint val="75000"/>
-                  </a:schemeClr>
-                </a:solidFill>
-              </a:defRPr>
-            </a:lvl5pPr>
-            <a:lvl6pPr marL="2286000" indent="0">
-              <a:buNone/>
-              <a:defRPr sz="1400">
-                <a:solidFill>
-                  <a:schemeClr val="tx1">
-                    <a:tint val="75000"/>
-                  </a:schemeClr>
-                </a:solidFill>
-              </a:defRPr>
-            </a:lvl6pPr>
-            <a:lvl7pPr marL="2743200" indent="0">
-              <a:buNone/>
-              <a:defRPr sz="1400">
-                <a:solidFill>
-                  <a:schemeClr val="tx1">
-                    <a:tint val="75000"/>
-                  </a:schemeClr>
-                </a:solidFill>
-              </a:defRPr>
-            </a:lvl7pPr>
-            <a:lvl8pPr marL="3200400" indent="0">
-              <a:buNone/>
-              <a:defRPr sz="1400">
-                <a:solidFill>
-                  <a:schemeClr val="tx1">
-                    <a:tint val="75000"/>
-                  </a:schemeClr>
-                </a:solidFill>
-              </a:defRPr>
-            </a:lvl8pPr>
-            <a:lvl9pPr marL="3657600" indent="0">
-              <a:buNone/>
-              <a:defRPr sz="1400">
-                <a:solidFill>
-                  <a:schemeClr val="tx1">
-                    <a:tint val="75000"/>
-                  </a:schemeClr>
-                </a:solidFill>
-              </a:defRPr>
-            </a:lvl9pPr>
-          </a:lstStyle>
-          <a:p>
-            <a:pPr lvl="0"/>
-            <a:r>
-              <a:rPr lang="en-US"/>
-              <a:t>Click to edit Master text styles</a:t>
-            </a:r>
-          </a:p>
-        </p:txBody>
-      </p:sp>
-      <p:sp>
-        <p:nvSpPr>
-          <p:cNvPr id="4" name="Date Placeholder 3"/>
-          <p:cNvSpPr>
-            <a:spLocks noGrp="1"/>
-          </p:cNvSpPr>
-          <p:nvPr>
-            <p:ph type="dt" sz="half" idx="10"/>
-          </p:nvPr>
-        </p:nvSpPr>
-        <p:spPr/>
-        <p:txBody>
-          <a:bodyPr/>
-          <a:lstStyle/>
-          <a:p>
-            <a:fld id="{5BCAD085-E8A6-8845-BD4E-CB4CCA059FC4}" type="datetimeFigureOut">
-              <a:rPr lang="en-US" smtClean="0"/>
-              <a:t>9/18/2026</a:t>
-            </a:fld>
-            <a:endParaRPr lang="en-US"/>
-          </a:p>
-        </p:txBody>
-      </p:sp>
-      <p:sp>
-        <p:nvSpPr>
-          <p:cNvPr id="5" name="Footer Placeholder 4"/>
-          <p:cNvSpPr>
-            <a:spLocks noGrp="1"/>
-          </p:cNvSpPr>
-          <p:nvPr>
-            <p:ph type="ftr" sz="quarter" idx="11"/>
-          </p:nvPr>
-        </p:nvSpPr>
-        <p:spPr/>
-        <p:txBody>
-          <a:bodyPr/>
-          <a:lstStyle/>
-          <a:p>
-            <a:endParaRPr lang="en-US"/>
-          </a:p>
-        </p:txBody>
-      </p:sp>
-      <p:sp>
-        <p:nvSpPr>
-          <p:cNvPr id="6" name="Slide Number Placeholder 5"/>
-          <p:cNvSpPr>
-            <a:spLocks noGrp="1"/>
-          </p:cNvSpPr>
-          <p:nvPr>
-            <p:ph type="sldNum" sz="quarter" idx="12"/>
-          </p:nvPr>
-        </p:nvSpPr>
-        <p:spPr/>
-        <p:txBody>
-          <a:bodyPr/>
-          <a:lstStyle/>
-          <a:p>
-            <a:fld id="{C1FF6DA9-008F-8B48-92A6-B652298478BF}" type="slidenum">
-              <a:rPr lang="en-US" smtClean="0"/>
-              <a:t>‹#›</a:t>
-            </a:fld>
-            <a:endParaRPr lang="en-US"/>
-          </a:p>
-        </p:txBody>
-      </p:sp>
-    </p:spTree>
-    <p:extLst>
-      <p:ext uri="{BB962C8B-B14F-4D97-AF65-F5344CB8AC3E}">
-        <p14:creationId xmlns:p14="http://schemas.microsoft.com/office/powerpoint/2010/main" val="960648375"/>
-      </p:ext>
-    </p:extLst>
-  </p:cSld>
-  <p:clrMapOvr>
-    <a:masterClrMapping/>
-  </p:clrMapOvr>
-</p:sldLayout>
-</file>
-
-<file path=ppt/slideLayouts/slideLayout4.xml><?xml version="1.0" encoding="utf-8"?>
-<p:sldLayout xmlns:a="http://schemas.openxmlformats.org/drawingml/2006/main" xmlns:r="http://schemas.openxmlformats.org/officeDocument/2006/relationships" xmlns:p="http://schemas.openxmlformats.org/presentationml/2006/main" type="twoObj" preserve="1">
-  <p:cSld name="Two Content">
-    <p:spTree>
-      <p:nvGrpSpPr>
-        <p:cNvPr id="1" name=""/>
-        <p:cNvGrpSpPr/>
-        <p:nvPr/>
-      </p:nvGrpSpPr>
-      <p:grpSpPr>
-        <a:xfrm>
-          <a:off x="0" y="0"/>
-          <a:ext cx="0" cy="0"/>
-          <a:chOff x="0" y="0"/>
-          <a:chExt cx="0" cy="0"/>
-        </a:xfrm>
-      </p:grpSpPr>
-      <p:sp>
-        <p:nvSpPr>
-          <p:cNvPr id="2" name="Title 1"/>
-          <p:cNvSpPr>
-            <a:spLocks noGrp="1"/>
-          </p:cNvSpPr>
-          <p:nvPr>
-            <p:ph type="title"/>
-          </p:nvPr>
-        </p:nvSpPr>
-        <p:spPr/>
-        <p:txBody>
-          <a:bodyPr/>
-          <a:lstStyle/>
-          <a:p>
-            <a:r>
-              <a:rPr lang="en-US"/>
-              <a:t>Click to edit Master title style</a:t>
-            </a:r>
-          </a:p>
-        </p:txBody>
-      </p:sp>
-      <p:sp>
-        <p:nvSpPr>
-          <p:cNvPr id="3" name="Content Placeholder 2"/>
-          <p:cNvSpPr>
-            <a:spLocks noGrp="1"/>
-          </p:cNvSpPr>
-          <p:nvPr>
-            <p:ph sz="half" idx="1"/>
-          </p:nvPr>
-        </p:nvSpPr>
-        <p:spPr>
-          <a:xfrm>
-            <a:off x="457200" y="1600200"/>
-            <a:ext cx="4038600" cy="4525963"/>
-          </a:xfrm>
-        </p:spPr>
-        <p:txBody>
-          <a:bodyPr/>
-          <a:lstStyle>
-            <a:lvl1pPr>
-              <a:defRPr sz="2800"/>
-            </a:lvl1pPr>
-            <a:lvl2pPr>
-              <a:defRPr sz="2400"/>
-            </a:lvl2pPr>
-            <a:lvl3pPr>
-              <a:defRPr sz="2000"/>
-            </a:lvl3pPr>
-            <a:lvl4pPr>
-              <a:defRPr sz="1800"/>
-            </a:lvl4pPr>
-            <a:lvl5pPr>
-              <a:defRPr sz="1800"/>
-            </a:lvl5pPr>
-            <a:lvl6pPr>
-              <a:defRPr sz="1800"/>
-            </a:lvl6pPr>
-            <a:lvl7pPr>
-              <a:defRPr sz="1800"/>
-            </a:lvl7pPr>
-            <a:lvl8pPr>
-              <a:defRPr sz="1800"/>
-            </a:lvl8pPr>
-            <a:lvl9pPr>
-              <a:defRPr sz="1800"/>
-            </a:lvl9pPr>
-          </a:lstStyle>
-          <a:p>
-            <a:pPr lvl="0"/>
-            <a:r>
-              <a:rPr lang="en-US"/>
-              <a:t>Click to edit Master text styles</a:t>
-            </a:r>
-          </a:p>
-          <a:p>
-            <a:pPr lvl="1"/>
-            <a:r>
-              <a:rPr lang="en-US"/>
-              <a:t>Second level</a:t>
-            </a:r>
-          </a:p>
-          <a:p>
-            <a:pPr lvl="2"/>
-            <a:r>
-              <a:rPr lang="en-US"/>
-              <a:t>Third level</a:t>
-            </a:r>
-          </a:p>
-          <a:p>
-            <a:pPr lvl="3"/>
-            <a:r>
-              <a:rPr lang="en-US"/>
-              <a:t>Fourth level</a:t>
-            </a:r>
-          </a:p>
-          <a:p>
-            <a:pPr lvl="4"/>
-            <a:r>
-              <a:rPr lang="en-US"/>
-              <a:t>Fifth level</a:t>
-            </a:r>
-          </a:p>
-        </p:txBody>
-      </p:sp>
-      <p:sp>
-        <p:nvSpPr>
-          <p:cNvPr id="4" name="Content Placeholder 3"/>
-          <p:cNvSpPr>
-            <a:spLocks noGrp="1"/>
-          </p:cNvSpPr>
-          <p:nvPr>
-            <p:ph sz="half" idx="2"/>
-          </p:nvPr>
-        </p:nvSpPr>
-        <p:spPr>
-          <a:xfrm>
-            <a:off x="4648200" y="1600200"/>
-            <a:ext cx="4038600" cy="4525963"/>
-          </a:xfrm>
-        </p:spPr>
-        <p:txBody>
-          <a:bodyPr/>
-          <a:lstStyle>
-            <a:lvl1pPr>
-              <a:defRPr sz="2800"/>
-            </a:lvl1pPr>
-            <a:lvl2pPr>
-              <a:defRPr sz="2400"/>
-            </a:lvl2pPr>
-            <a:lvl3pPr>
-              <a:defRPr sz="2000"/>
-            </a:lvl3pPr>
-            <a:lvl4pPr>
-              <a:defRPr sz="1800"/>
-            </a:lvl4pPr>
-            <a:lvl5pPr>
-              <a:defRPr sz="1800"/>
-            </a:lvl5pPr>
-            <a:lvl6pPr>
-              <a:defRPr sz="1800"/>
-            </a:lvl6pPr>
-            <a:lvl7pPr>
-              <a:defRPr sz="1800"/>
-            </a:lvl7pPr>
-            <a:lvl8pPr>
-              <a:defRPr sz="1800"/>
-            </a:lvl8pPr>
-            <a:lvl9pPr>
-              <a:defRPr sz="1800"/>
-            </a:lvl9pPr>
-          </a:lstStyle>
-          <a:p>
-            <a:pPr lvl="0"/>
-            <a:r>
-              <a:rPr lang="en-US"/>
-              <a:t>Click to edit Master text styles</a:t>
-            </a:r>
-          </a:p>
-          <a:p>
-            <a:pPr lvl="1"/>
-            <a:r>
-              <a:rPr lang="en-US"/>
-              <a:t>Second level</a:t>
-            </a:r>
-          </a:p>
-          <a:p>
-            <a:pPr lvl="2"/>
-            <a:r>
-              <a:rPr lang="en-US"/>
-              <a:t>Third level</a:t>
-            </a:r>
-          </a:p>
-          <a:p>
-            <a:pPr lvl="3"/>
-            <a:r>
-              <a:rPr lang="en-US"/>
-              <a:t>Fourth level</a:t>
-            </a:r>
-          </a:p>
-          <a:p>
-            <a:pPr lvl="4"/>
-            <a:r>
-              <a:rPr lang="en-US"/>
-              <a:t>Fifth level</a:t>
-            </a:r>
-          </a:p>
-        </p:txBody>
-      </p:sp>
-      <p:sp>
-        <p:nvSpPr>
-          <p:cNvPr id="5" name="Date Placeholder 4"/>
-          <p:cNvSpPr>
-            <a:spLocks noGrp="1"/>
-          </p:cNvSpPr>
-          <p:nvPr>
-            <p:ph type="dt" sz="half" idx="10"/>
-          </p:nvPr>
-        </p:nvSpPr>
-        <p:spPr/>
-        <p:txBody>
-          <a:bodyPr/>
-          <a:lstStyle/>
-          <a:p>
-            <a:fld id="{5BCAD085-E8A6-8845-BD4E-CB4CCA059FC4}" type="datetimeFigureOut">
-              <a:rPr lang="en-US" smtClean="0"/>
-              <a:t>9/18/2026</a:t>
-            </a:fld>
-            <a:endParaRPr lang="en-US"/>
-          </a:p>
-        </p:txBody>
-      </p:sp>
-      <p:sp>
-        <p:nvSpPr>
-          <p:cNvPr id="6" name="Footer Placeholder 5"/>
-          <p:cNvSpPr>
-            <a:spLocks noGrp="1"/>
-          </p:cNvSpPr>
-          <p:nvPr>
-            <p:ph type="ftr" sz="quarter" idx="11"/>
-          </p:nvPr>
-        </p:nvSpPr>
-        <p:spPr/>
-        <p:txBody>
-          <a:bodyPr/>
-          <a:lstStyle/>
-          <a:p>
-            <a:endParaRPr lang="en-US"/>
-          </a:p>
-        </p:txBody>
-      </p:sp>
-      <p:sp>
-        <p:nvSpPr>
-          <p:cNvPr id="7" name="Slide Number Placeholder 6"/>
-          <p:cNvSpPr>
-            <a:spLocks noGrp="1"/>
-          </p:cNvSpPr>
-          <p:nvPr>
-            <p:ph type="sldNum" sz="quarter" idx="12"/>
-          </p:nvPr>
-        </p:nvSpPr>
-        <p:spPr/>
-        <p:txBody>
-          <a:bodyPr/>
-          <a:lstStyle/>
-          <a:p>
-            <a:fld id="{C1FF6DA9-008F-8B48-92A6-B652298478BF}" type="slidenum">
-              <a:rPr lang="en-US" smtClean="0"/>
-              <a:t>‹#›</a:t>
-            </a:fld>
-            <a:endParaRPr lang="en-US"/>
-          </a:p>
-        </p:txBody>
-      </p:sp>
-    </p:spTree>
-    <p:extLst>
-      <p:ext uri="{BB962C8B-B14F-4D97-AF65-F5344CB8AC3E}">
-        <p14:creationId xmlns:p14="http://schemas.microsoft.com/office/powerpoint/2010/main" val="2782244947"/>
-      </p:ext>
-    </p:extLst>
-  </p:cSld>
-  <p:clrMapOvr>
-    <a:masterClrMapping/>
-  </p:clrMapOvr>
-</p:sldLayout>
-</file>
-
-<file path=ppt/slideLayouts/slideLayout5.xml><?xml version="1.0" encoding="utf-8"?>
-<p:sldLayout xmlns:a="http://schemas.openxmlformats.org/drawingml/2006/main" xmlns:r="http://schemas.openxmlformats.org/officeDocument/2006/relationships" xmlns:p="http://schemas.openxmlformats.org/presentationml/2006/main" type="twoTxTwoObj" preserve="1">
-  <p:cSld name="Comparison">
-    <p:spTree>
-      <p:nvGrpSpPr>
-        <p:cNvPr id="1" name=""/>
-        <p:cNvGrpSpPr/>
-        <p:nvPr/>
-      </p:nvGrpSpPr>
-      <p:grpSpPr>
-        <a:xfrm>
-          <a:off x="0" y="0"/>
-          <a:ext cx="0" cy="0"/>
-          <a:chOff x="0" y="0"/>
-          <a:chExt cx="0" cy="0"/>
-        </a:xfrm>
-      </p:grpSpPr>
-      <p:sp>
-        <p:nvSpPr>
-          <p:cNvPr id="2" name="Title 1"/>
-          <p:cNvSpPr>
-            <a:spLocks noGrp="1"/>
-          </p:cNvSpPr>
-          <p:nvPr>
-            <p:ph type="title"/>
-          </p:nvPr>
-        </p:nvSpPr>
-        <p:spPr/>
-        <p:txBody>
-          <a:bodyPr/>
-          <a:lstStyle>
-            <a:lvl1pPr>
-              <a:defRPr/>
-            </a:lvl1pPr>
-          </a:lstStyle>
-          <a:p>
-            <a:r>
-              <a:rPr lang="en-US"/>
-              <a:t>Click to edit Master title style</a:t>
-            </a:r>
-          </a:p>
-        </p:txBody>
-      </p:sp>
-      <p:sp>
-        <p:nvSpPr>
-          <p:cNvPr id="3" name="Text Placeholder 2"/>
-          <p:cNvSpPr>
-            <a:spLocks noGrp="1"/>
-          </p:cNvSpPr>
-          <p:nvPr>
-            <p:ph type="body" idx="1"/>
-          </p:nvPr>
-        </p:nvSpPr>
-        <p:spPr>
-          <a:xfrm>
-            <a:off x="457200" y="1535113"/>
-            <a:ext cx="4040188" cy="639762"/>
-          </a:xfrm>
-        </p:spPr>
-        <p:txBody>
-          <a:bodyPr anchor="b"/>
-          <a:lstStyle>
-            <a:lvl1pPr marL="0" indent="0">
-              <a:buNone/>
-              <a:defRPr sz="2400" b="1"/>
-            </a:lvl1pPr>
-            <a:lvl2pPr marL="457200" indent="0">
-              <a:buNone/>
-              <a:defRPr sz="2000" b="1"/>
-            </a:lvl2pPr>
-            <a:lvl3pPr marL="914400" indent="0">
-              <a:buNone/>
-              <a:defRPr sz="1800" b="1"/>
-            </a:lvl3pPr>
-            <a:lvl4pPr marL="1371600" indent="0">
-              <a:buNone/>
-              <a:defRPr sz="1600" b="1"/>
-            </a:lvl4pPr>
-            <a:lvl5pPr marL="1828800" indent="0">
-              <a:buNone/>
-              <a:defRPr sz="1600" b="1"/>
-            </a:lvl5pPr>
-            <a:lvl6pPr marL="2286000" indent="0">
-              <a:buNone/>
-              <a:defRPr sz="1600" b="1"/>
-            </a:lvl6pPr>
-            <a:lvl7pPr marL="2743200" indent="0">
-              <a:buNone/>
-              <a:defRPr sz="1600" b="1"/>
-            </a:lvl7pPr>
-            <a:lvl8pPr marL="3200400" indent="0">
-              <a:buNone/>
-              <a:defRPr sz="1600" b="1"/>
-            </a:lvl8pPr>
-            <a:lvl9pPr marL="3657600" indent="0">
-              <a:buNone/>
-              <a:defRPr sz="1600" b="1"/>
-            </a:lvl9pPr>
-          </a:lstStyle>
-          <a:p>
-            <a:pPr lvl="0"/>
-            <a:r>
-              <a:rPr lang="en-US"/>
-              <a:t>Click to edit Master text styles</a:t>
-            </a:r>
-          </a:p>
-        </p:txBody>
-      </p:sp>
-      <p:sp>
-        <p:nvSpPr>
-          <p:cNvPr id="4" name="Content Placeholder 3"/>
-          <p:cNvSpPr>
-            <a:spLocks noGrp="1"/>
-          </p:cNvSpPr>
-          <p:nvPr>
-            <p:ph sz="half" idx="2"/>
-          </p:nvPr>
-        </p:nvSpPr>
-        <p:spPr>
-          <a:xfrm>
-            <a:off x="457200" y="2174875"/>
-            <a:ext cx="4040188" cy="3951288"/>
-          </a:xfrm>
-        </p:spPr>
-        <p:txBody>
-          <a:bodyPr/>
-          <a:lstStyle>
-            <a:lvl1pPr>
-              <a:defRPr sz="2400"/>
-            </a:lvl1pPr>
-            <a:lvl2pPr>
-              <a:defRPr sz="2000"/>
-            </a:lvl2pPr>
-            <a:lvl3pPr>
-              <a:defRPr sz="1800"/>
-            </a:lvl3pPr>
-            <a:lvl4pPr>
-              <a:defRPr sz="1600"/>
-            </a:lvl4pPr>
-            <a:lvl5pPr>
-              <a:defRPr sz="1600"/>
-            </a:lvl5pPr>
-            <a:lvl6pPr>
-              <a:defRPr sz="1600"/>
-            </a:lvl6pPr>
-            <a:lvl7pPr>
-              <a:defRPr sz="1600"/>
-            </a:lvl7pPr>
-            <a:lvl8pPr>
-              <a:defRPr sz="1600"/>
-            </a:lvl8pPr>
-            <a:lvl9pPr>
-              <a:defRPr sz="1600"/>
-            </a:lvl9pPr>
-          </a:lstStyle>
-          <a:p>
-            <a:pPr lvl="0"/>
-            <a:r>
-              <a:rPr lang="en-US"/>
-              <a:t>Click to edit Master text styles</a:t>
-            </a:r>
-          </a:p>
-          <a:p>
-            <a:pPr lvl="1"/>
-            <a:r>
-              <a:rPr lang="en-US"/>
-              <a:t>Second level</a:t>
-            </a:r>
-          </a:p>
-          <a:p>
-            <a:pPr lvl="2"/>
-            <a:r>
-              <a:rPr lang="en-US"/>
-              <a:t>Third level</a:t>
-            </a:r>
-          </a:p>
-          <a:p>
-            <a:pPr lvl="3"/>
-            <a:r>
-              <a:rPr lang="en-US"/>
-              <a:t>Fourth level</a:t>
-            </a:r>
-          </a:p>
-          <a:p>
-            <a:pPr lvl="4"/>
-            <a:r>
-              <a:rPr lang="en-US"/>
-              <a:t>Fifth level</a:t>
-            </a:r>
-          </a:p>
-        </p:txBody>
-      </p:sp>
-      <p:sp>
-        <p:nvSpPr>
-          <p:cNvPr id="5" name="Text Placeholder 4"/>
-          <p:cNvSpPr>
-            <a:spLocks noGrp="1"/>
-          </p:cNvSpPr>
-          <p:nvPr>
-            <p:ph type="body" sz="quarter" idx="3"/>
-          </p:nvPr>
-        </p:nvSpPr>
-        <p:spPr>
-          <a:xfrm>
-            <a:off x="4645025" y="1535113"/>
-            <a:ext cx="4041775" cy="639762"/>
-          </a:xfrm>
-        </p:spPr>
-        <p:txBody>
-          <a:bodyPr anchor="b"/>
-          <a:lstStyle>
-            <a:lvl1pPr marL="0" indent="0">
-              <a:buNone/>
-              <a:defRPr sz="2400" b="1"/>
-            </a:lvl1pPr>
-            <a:lvl2pPr marL="457200" indent="0">
-              <a:buNone/>
-              <a:defRPr sz="2000" b="1"/>
-            </a:lvl2pPr>
-            <a:lvl3pPr marL="914400" indent="0">
-              <a:buNone/>
-              <a:defRPr sz="1800" b="1"/>
-            </a:lvl3pPr>
-            <a:lvl4pPr marL="1371600" indent="0">
-              <a:buNone/>
-              <a:defRPr sz="1600" b="1"/>
-            </a:lvl4pPr>
-            <a:lvl5pPr marL="1828800" indent="0">
-              <a:buNone/>
-              <a:defRPr sz="1600" b="1"/>
-            </a:lvl5pPr>
-            <a:lvl6pPr marL="2286000" indent="0">
-              <a:buNone/>
-              <a:defRPr sz="1600" b="1"/>
-            </a:lvl6pPr>
-            <a:lvl7pPr marL="2743200" indent="0">
-              <a:buNone/>
-              <a:defRPr sz="1600" b="1"/>
-            </a:lvl7pPr>
-            <a:lvl8pPr marL="3200400" indent="0">
-              <a:buNone/>
-              <a:defRPr sz="1600" b="1"/>
-            </a:lvl8pPr>
-            <a:lvl9pPr marL="3657600" indent="0">
-              <a:buNone/>
-              <a:defRPr sz="1600" b="1"/>
-            </a:lvl9pPr>
-          </a:lstStyle>
-          <a:p>
-            <a:pPr lvl="0"/>
-            <a:r>
-              <a:rPr lang="en-US"/>
-              <a:t>Click to edit Master text styles</a:t>
-            </a:r>
-          </a:p>
-        </p:txBody>
-      </p:sp>
-      <p:sp>
-        <p:nvSpPr>
-          <p:cNvPr id="6" name="Content Placeholder 5"/>
-          <p:cNvSpPr>
-            <a:spLocks noGrp="1"/>
-          </p:cNvSpPr>
-          <p:nvPr>
-            <p:ph sz="quarter" idx="4"/>
-          </p:nvPr>
-        </p:nvSpPr>
-        <p:spPr>
-          <a:xfrm>
-            <a:off x="4645025" y="2174875"/>
-            <a:ext cx="4041775" cy="3951288"/>
-          </a:xfrm>
-        </p:spPr>
-        <p:txBody>
-          <a:bodyPr/>
-          <a:lstStyle>
-            <a:lvl1pPr>
-              <a:defRPr sz="2400"/>
-            </a:lvl1pPr>
-            <a:lvl2pPr>
-              <a:defRPr sz="2000"/>
-            </a:lvl2pPr>
-            <a:lvl3pPr>
-              <a:defRPr sz="1800"/>
-            </a:lvl3pPr>
-            <a:lvl4pPr>
-              <a:defRPr sz="1600"/>
-            </a:lvl4pPr>
-            <a:lvl5pPr>
-              <a:defRPr sz="1600"/>
-            </a:lvl5pPr>
-            <a:lvl6pPr>
-              <a:defRPr sz="1600"/>
-            </a:lvl6pPr>
-            <a:lvl7pPr>
-              <a:defRPr sz="1600"/>
-            </a:lvl7pPr>
-            <a:lvl8pPr>
-              <a:defRPr sz="1600"/>
-            </a:lvl8pPr>
-            <a:lvl9pPr>
-              <a:defRPr sz="1600"/>
-            </a:lvl9pPr>
-          </a:lstStyle>
-          <a:p>
-            <a:pPr lvl="0"/>
-            <a:r>
-              <a:rPr lang="en-US"/>
-              <a:t>Click to edit Master text styles</a:t>
-            </a:r>
-          </a:p>
-          <a:p>
-            <a:pPr lvl="1"/>
-            <a:r>
-              <a:rPr lang="en-US"/>
-              <a:t>Second level</a:t>
-            </a:r>
-          </a:p>
-          <a:p>
-            <a:pPr lvl="2"/>
-            <a:r>
-              <a:rPr lang="en-US"/>
-              <a:t>Third level</a:t>
-            </a:r>
-          </a:p>
-          <a:p>
-            <a:pPr lvl="3"/>
-            <a:r>
-              <a:rPr lang="en-US"/>
-              <a:t>Fourth level</a:t>
-            </a:r>
-          </a:p>
-          <a:p>
-            <a:pPr lvl="4"/>
-            <a:r>
-              <a:rPr lang="en-US"/>
-              <a:t>Fifth level</a:t>
-            </a:r>
-          </a:p>
-        </p:txBody>
-      </p:sp>
-      <p:sp>
-        <p:nvSpPr>
-          <p:cNvPr id="7" name="Date Placeholder 6"/>
-          <p:cNvSpPr>
-            <a:spLocks noGrp="1"/>
-          </p:cNvSpPr>
-          <p:nvPr>
-            <p:ph type="dt" sz="half" idx="10"/>
-          </p:nvPr>
-        </p:nvSpPr>
-        <p:spPr/>
-        <p:txBody>
-          <a:bodyPr/>
-          <a:lstStyle/>
-          <a:p>
-            <a:fld id="{5BCAD085-E8A6-8845-BD4E-CB4CCA059FC4}" type="datetimeFigureOut">
-              <a:rPr lang="en-US" smtClean="0"/>
-              <a:t>9/18/2026</a:t>
-            </a:fld>
-            <a:endParaRPr lang="en-US"/>
-          </a:p>
-        </p:txBody>
-      </p:sp>
-      <p:sp>
-        <p:nvSpPr>
-          <p:cNvPr id="8" name="Footer Placeholder 7"/>
-          <p:cNvSpPr>
-            <a:spLocks noGrp="1"/>
-          </p:cNvSpPr>
-          <p:nvPr>
-            <p:ph type="ftr" sz="quarter" idx="11"/>
-          </p:nvPr>
-        </p:nvSpPr>
-        <p:spPr/>
-        <p:txBody>
-          <a:bodyPr/>
-          <a:lstStyle/>
-          <a:p>
-            <a:endParaRPr lang="en-US"/>
-          </a:p>
-        </p:txBody>
-      </p:sp>
-      <p:sp>
-        <p:nvSpPr>
-          <p:cNvPr id="9" name="Slide Number Placeholder 8"/>
-          <p:cNvSpPr>
-            <a:spLocks noGrp="1"/>
-          </p:cNvSpPr>
-          <p:nvPr>
-            <p:ph type="sldNum" sz="quarter" idx="12"/>
-          </p:nvPr>
-        </p:nvSpPr>
-        <p:spPr/>
-        <p:txBody>
-          <a:bodyPr/>
-          <a:lstStyle/>
-          <a:p>
-            <a:fld id="{C1FF6DA9-008F-8B48-92A6-B652298478BF}" type="slidenum">
-              <a:rPr lang="en-US" smtClean="0"/>
-              <a:t>‹#›</a:t>
-            </a:fld>
-            <a:endParaRPr lang="en-US"/>
-          </a:p>
-        </p:txBody>
-      </p:sp>
-    </p:spTree>
-    <p:extLst>
-      <p:ext uri="{BB962C8B-B14F-4D97-AF65-F5344CB8AC3E}">
-        <p14:creationId xmlns:p14="http://schemas.microsoft.com/office/powerpoint/2010/main" val="990158736"/>
-      </p:ext>
-    </p:extLst>
-  </p:cSld>
-  <p:clrMapOvr>
-    <a:masterClrMapping/>
-  </p:clrMapOvr>
-</p:sldLayout>
-</file>
-
-<file path=ppt/slideLayouts/slideLayout6.xml><?xml version="1.0" encoding="utf-8"?>
-<p:sldLayout xmlns:a="http://schemas.openxmlformats.org/drawingml/2006/main" xmlns:r="http://schemas.openxmlformats.org/officeDocument/2006/relationships" xmlns:p="http://schemas.openxmlformats.org/presentationml/2006/main" type="titleOnly" preserve="1">
-  <p:cSld name="Title Only">
-    <p:spTree>
-      <p:nvGrpSpPr>
-        <p:cNvPr id="1" name=""/>
-        <p:cNvGrpSpPr/>
-        <p:nvPr/>
-      </p:nvGrpSpPr>
-      <p:grpSpPr>
-        <a:xfrm>
-          <a:off x="0" y="0"/>
-          <a:ext cx="0" cy="0"/>
-          <a:chOff x="0" y="0"/>
-          <a:chExt cx="0" cy="0"/>
-        </a:xfrm>
-      </p:grpSpPr>
-      <p:sp>
-        <p:nvSpPr>
-          <p:cNvPr id="2" name="Title 1"/>
-          <p:cNvSpPr>
-            <a:spLocks noGrp="1"/>
-          </p:cNvSpPr>
-          <p:nvPr>
-            <p:ph type="title"/>
-          </p:nvPr>
-        </p:nvSpPr>
-        <p:spPr/>
-        <p:txBody>
-          <a:bodyPr/>
-          <a:lstStyle/>
-          <a:p>
-            <a:r>
-              <a:rPr lang="en-US"/>
-              <a:t>Click to edit Master title style</a:t>
-            </a:r>
-          </a:p>
-        </p:txBody>
-      </p:sp>
-      <p:sp>
-        <p:nvSpPr>
-          <p:cNvPr id="3" name="Date Placeholder 2"/>
-          <p:cNvSpPr>
-            <a:spLocks noGrp="1"/>
-          </p:cNvSpPr>
-          <p:nvPr>
-            <p:ph type="dt" sz="half" idx="10"/>
-          </p:nvPr>
-        </p:nvSpPr>
-        <p:spPr/>
-        <p:txBody>
-          <a:bodyPr/>
-          <a:lstStyle/>
-          <a:p>
-            <a:fld id="{5BCAD085-E8A6-8845-BD4E-CB4CCA059FC4}" type="datetimeFigureOut">
-              <a:rPr lang="en-US" smtClean="0"/>
-              <a:t>9/18/2026</a:t>
-            </a:fld>
-            <a:endParaRPr lang="en-US"/>
-          </a:p>
-        </p:txBody>
-      </p:sp>
-      <p:sp>
-        <p:nvSpPr>
-          <p:cNvPr id="4" name="Footer Placeholder 3"/>
-          <p:cNvSpPr>
-            <a:spLocks noGrp="1"/>
-          </p:cNvSpPr>
-          <p:nvPr>
-            <p:ph type="ftr" sz="quarter" idx="11"/>
-          </p:nvPr>
-        </p:nvSpPr>
-        <p:spPr/>
-        <p:txBody>
-          <a:bodyPr/>
-          <a:lstStyle/>
-          <a:p>
-            <a:endParaRPr lang="en-US"/>
-          </a:p>
-        </p:txBody>
-      </p:sp>
-      <p:sp>
-        <p:nvSpPr>
-          <p:cNvPr id="5" name="Slide Number Placeholder 4"/>
-          <p:cNvSpPr>
-            <a:spLocks noGrp="1"/>
-          </p:cNvSpPr>
-          <p:nvPr>
-            <p:ph type="sldNum" sz="quarter" idx="12"/>
-          </p:nvPr>
-        </p:nvSpPr>
-        <p:spPr/>
-        <p:txBody>
-          <a:bodyPr/>
-          <a:lstStyle/>
-          <a:p>
-            <a:fld id="{C1FF6DA9-008F-8B48-92A6-B652298478BF}" type="slidenum">
-              <a:rPr lang="en-US" smtClean="0"/>
-              <a:t>‹#›</a:t>
-            </a:fld>
-            <a:endParaRPr lang="en-US"/>
-          </a:p>
-        </p:txBody>
-      </p:sp>
-    </p:spTree>
-    <p:extLst>
-      <p:ext uri="{BB962C8B-B14F-4D97-AF65-F5344CB8AC3E}">
-        <p14:creationId xmlns:p14="http://schemas.microsoft.com/office/powerpoint/2010/main" val="727027711"/>
-      </p:ext>
-    </p:extLst>
-  </p:cSld>
-  <p:clrMapOvr>
-    <a:masterClrMapping/>
-  </p:clrMapOvr>
-</p:sldLayout>
-</file>
-
-<file path=ppt/slideLayouts/slideLayout7.xml><?xml version="1.0" encoding="utf-8"?>
-<p:sldLayout xmlns:a="http://schemas.openxmlformats.org/drawingml/2006/main" xmlns:r="http://schemas.openxmlformats.org/officeDocument/2006/relationships" xmlns:p="http://schemas.openxmlformats.org/presentationml/2006/main" type="blank" preserve="1">
-  <p:cSld name="Blank">
-    <p:spTree>
-      <p:nvGrpSpPr>
-        <p:cNvPr id="1" name=""/>
-        <p:cNvGrpSpPr/>
-        <p:nvPr/>
-      </p:nvGrpSpPr>
-      <p:grpSpPr>
-        <a:xfrm>
-          <a:off x="0" y="0"/>
-          <a:ext cx="0" cy="0"/>
-          <a:chOff x="0" y="0"/>
-          <a:chExt cx="0" cy="0"/>
-        </a:xfrm>
-      </p:grpSpPr>
-      <p:sp>
-        <p:nvSpPr>
-          <p:cNvPr id="2" name="Date Placeholder 1"/>
-          <p:cNvSpPr>
-            <a:spLocks noGrp="1"/>
-          </p:cNvSpPr>
-          <p:nvPr>
-            <p:ph type="dt" sz="half" idx="10"/>
-          </p:nvPr>
-        </p:nvSpPr>
-        <p:spPr/>
-        <p:txBody>
-          <a:bodyPr/>
-          <a:lstStyle/>
-          <a:p>
-            <a:fld id="{5BCAD085-E8A6-8845-BD4E-CB4CCA059FC4}" type="datetimeFigureOut">
-              <a:rPr lang="en-US" smtClean="0"/>
-              <a:t>9/18/2026</a:t>
-            </a:fld>
-            <a:endParaRPr lang="en-US"/>
-          </a:p>
-        </p:txBody>
-      </p:sp>
-      <p:sp>
-        <p:nvSpPr>
-          <p:cNvPr id="3" name="Footer Placeholder 2"/>
-          <p:cNvSpPr>
-            <a:spLocks noGrp="1"/>
-          </p:cNvSpPr>
-          <p:nvPr>
-            <p:ph type="ftr" sz="quarter" idx="11"/>
-          </p:nvPr>
-        </p:nvSpPr>
-        <p:spPr/>
-        <p:txBody>
-          <a:bodyPr/>
-          <a:lstStyle/>
-          <a:p>
-            <a:endParaRPr lang="en-US"/>
-          </a:p>
-        </p:txBody>
-      </p:sp>
-      <p:sp>
-        <p:nvSpPr>
-          <p:cNvPr id="4" name="Slide Number Placeholder 3"/>
-          <p:cNvSpPr>
-            <a:spLocks noGrp="1"/>
-          </p:cNvSpPr>
-          <p:nvPr>
-            <p:ph type="sldNum" sz="quarter" idx="12"/>
-          </p:nvPr>
-        </p:nvSpPr>
-        <p:spPr/>
-        <p:txBody>
-          <a:bodyPr/>
-          <a:lstStyle/>
-          <a:p>
-            <a:fld id="{C1FF6DA9-008F-8B48-92A6-B652298478BF}" type="slidenum">
-              <a:rPr lang="en-US" smtClean="0"/>
-              <a:t>‹#›</a:t>
-            </a:fld>
-            <a:endParaRPr lang="en-US"/>
-          </a:p>
-        </p:txBody>
-      </p:sp>
-    </p:spTree>
-    <p:extLst>
-      <p:ext uri="{BB962C8B-B14F-4D97-AF65-F5344CB8AC3E}">
-        <p14:creationId xmlns:p14="http://schemas.microsoft.com/office/powerpoint/2010/main" val="1212999818"/>
-      </p:ext>
-    </p:extLst>
-  </p:cSld>
-  <p:clrMapOvr>
-    <a:masterClrMapping/>
-  </p:clrMapOvr>
-</p:sldLayout>
-</file>
-
-<file path=ppt/slideLayouts/slideLayout8.xml><?xml version="1.0" encoding="utf-8"?>
-<p:sldLayout xmlns:a="http://schemas.openxmlformats.org/drawingml/2006/main" xmlns:r="http://schemas.openxmlformats.org/officeDocument/2006/relationships" xmlns:p="http://schemas.openxmlformats.org/presentationml/2006/main" type="objTx" preserve="1">
-  <p:cSld name="Content with Caption">
-    <p:spTree>
-      <p:nvGrpSpPr>
-        <p:cNvPr id="1" name=""/>
-        <p:cNvGrpSpPr/>
-        <p:nvPr/>
-      </p:nvGrpSpPr>
-      <p:grpSpPr>
-        <a:xfrm>
-          <a:off x="0" y="0"/>
-          <a:ext cx="0" cy="0"/>
-          <a:chOff x="0" y="0"/>
-          <a:chExt cx="0" cy="0"/>
-        </a:xfrm>
-      </p:grpSpPr>
-      <p:sp>
-        <p:nvSpPr>
-          <p:cNvPr id="2" name="Title 1"/>
-          <p:cNvSpPr>
-            <a:spLocks noGrp="1"/>
-          </p:cNvSpPr>
-          <p:nvPr>
-            <p:ph type="title"/>
-          </p:nvPr>
-        </p:nvSpPr>
-        <p:spPr>
-          <a:xfrm>
-            <a:off x="457200" y="273050"/>
-            <a:ext cx="3008313" cy="1162050"/>
-          </a:xfrm>
-        </p:spPr>
-        <p:txBody>
-          <a:bodyPr anchor="b"/>
-          <a:lstStyle>
-            <a:lvl1pPr algn="l">
-              <a:defRPr sz="2000" b="1"/>
-            </a:lvl1pPr>
-          </a:lstStyle>
-          <a:p>
-            <a:r>
-              <a:rPr lang="en-US"/>
-              <a:t>Click to edit Master title style</a:t>
-            </a:r>
-          </a:p>
-        </p:txBody>
-      </p:sp>
-      <p:sp>
-        <p:nvSpPr>
-          <p:cNvPr id="3" name="Content Placeholder 2"/>
-          <p:cNvSpPr>
-            <a:spLocks noGrp="1"/>
-          </p:cNvSpPr>
-          <p:nvPr>
-            <p:ph idx="1"/>
-          </p:nvPr>
-        </p:nvSpPr>
-        <p:spPr>
-          <a:xfrm>
-            <a:off x="3575050" y="273050"/>
-            <a:ext cx="5111750" cy="5853113"/>
-          </a:xfrm>
-        </p:spPr>
-        <p:txBody>
-          <a:bodyPr/>
-          <a:lstStyle>
-            <a:lvl1pPr>
-              <a:defRPr sz="3200"/>
-            </a:lvl1pPr>
-            <a:lvl2pPr>
-              <a:defRPr sz="2800"/>
-            </a:lvl2pPr>
-            <a:lvl3pPr>
-              <a:defRPr sz="2400"/>
-            </a:lvl3pPr>
-            <a:lvl4pPr>
-              <a:defRPr sz="2000"/>
-            </a:lvl4pPr>
-            <a:lvl5pPr>
-              <a:defRPr sz="2000"/>
-            </a:lvl5pPr>
-            <a:lvl6pPr>
-              <a:defRPr sz="2000"/>
-            </a:lvl6pPr>
-            <a:lvl7pPr>
-              <a:defRPr sz="2000"/>
-            </a:lvl7pPr>
-            <a:lvl8pPr>
-              <a:defRPr sz="2000"/>
-            </a:lvl8pPr>
-            <a:lvl9pPr>
-              <a:defRPr sz="2000"/>
-            </a:lvl9pPr>
-          </a:lstStyle>
-          <a:p>
-            <a:pPr lvl="0"/>
-            <a:r>
-              <a:rPr lang="en-US"/>
-              <a:t>Click to edit Master text styles</a:t>
-            </a:r>
-          </a:p>
-          <a:p>
-            <a:pPr lvl="1"/>
-            <a:r>
-              <a:rPr lang="en-US"/>
-              <a:t>Second level</a:t>
-            </a:r>
-          </a:p>
-          <a:p>
-            <a:pPr lvl="2"/>
-            <a:r>
-              <a:rPr lang="en-US"/>
-              <a:t>Third level</a:t>
-            </a:r>
-          </a:p>
-          <a:p>
-            <a:pPr lvl="3"/>
-            <a:r>
-              <a:rPr lang="en-US"/>
-              <a:t>Fourth level</a:t>
-            </a:r>
-          </a:p>
-          <a:p>
-            <a:pPr lvl="4"/>
-            <a:r>
-              <a:rPr lang="en-US"/>
-              <a:t>Fifth level</a:t>
-            </a:r>
-          </a:p>
-        </p:txBody>
-      </p:sp>
-      <p:sp>
-        <p:nvSpPr>
-          <p:cNvPr id="4" name="Text Placeholder 3"/>
-          <p:cNvSpPr>
-            <a:spLocks noGrp="1"/>
-          </p:cNvSpPr>
-          <p:nvPr>
-            <p:ph type="body" sz="half" idx="2"/>
-          </p:nvPr>
-        </p:nvSpPr>
-        <p:spPr>
-          <a:xfrm>
-            <a:off x="457200" y="1435100"/>
-            <a:ext cx="3008313" cy="4691063"/>
-          </a:xfrm>
-        </p:spPr>
-        <p:txBody>
-          <a:bodyPr/>
-          <a:lstStyle>
-            <a:lvl1pPr marL="0" indent="0">
-              <a:buNone/>
-              <a:defRPr sz="1400"/>
-            </a:lvl1pPr>
-            <a:lvl2pPr marL="457200" indent="0">
-              <a:buNone/>
-              <a:defRPr sz="1200"/>
-            </a:lvl2pPr>
-            <a:lvl3pPr marL="914400" indent="0">
-              <a:buNone/>
-              <a:defRPr sz="1000"/>
-            </a:lvl3pPr>
-            <a:lvl4pPr marL="1371600" indent="0">
-              <a:buNone/>
-              <a:defRPr sz="900"/>
-            </a:lvl4pPr>
-            <a:lvl5pPr marL="1828800" indent="0">
-              <a:buNone/>
-              <a:defRPr sz="900"/>
-            </a:lvl5pPr>
-            <a:lvl6pPr marL="2286000" indent="0">
-              <a:buNone/>
-              <a:defRPr sz="900"/>
-            </a:lvl6pPr>
-            <a:lvl7pPr marL="2743200" indent="0">
-              <a:buNone/>
-              <a:defRPr sz="900"/>
-            </a:lvl7pPr>
-            <a:lvl8pPr marL="3200400" indent="0">
-              <a:buNone/>
-              <a:defRPr sz="900"/>
-            </a:lvl8pPr>
-            <a:lvl9pPr marL="3657600" indent="0">
-              <a:buNone/>
-              <a:defRPr sz="900"/>
-            </a:lvl9pPr>
-          </a:lstStyle>
-          <a:p>
-            <a:pPr lvl="0"/>
-            <a:r>
-              <a:rPr lang="en-US"/>
-              <a:t>Click to edit Master text styles</a:t>
-            </a:r>
-          </a:p>
-        </p:txBody>
-      </p:sp>
-      <p:sp>
-        <p:nvSpPr>
-          <p:cNvPr id="5" name="Date Placeholder 4"/>
-          <p:cNvSpPr>
-            <a:spLocks noGrp="1"/>
-          </p:cNvSpPr>
-          <p:nvPr>
-            <p:ph type="dt" sz="half" idx="10"/>
-          </p:nvPr>
-        </p:nvSpPr>
-        <p:spPr/>
-        <p:txBody>
-          <a:bodyPr/>
-          <a:lstStyle/>
-          <a:p>
-            <a:fld id="{5BCAD085-E8A6-8845-BD4E-CB4CCA059FC4}" type="datetimeFigureOut">
-              <a:rPr lang="en-US" smtClean="0"/>
-              <a:t>9/18/2026</a:t>
-            </a:fld>
-            <a:endParaRPr lang="en-US"/>
-          </a:p>
-        </p:txBody>
-      </p:sp>
-      <p:sp>
-        <p:nvSpPr>
-          <p:cNvPr id="6" name="Footer Placeholder 5"/>
-          <p:cNvSpPr>
-            <a:spLocks noGrp="1"/>
-          </p:cNvSpPr>
-          <p:nvPr>
-            <p:ph type="ftr" sz="quarter" idx="11"/>
-          </p:nvPr>
-        </p:nvSpPr>
-        <p:spPr/>
-        <p:txBody>
-          <a:bodyPr/>
-          <a:lstStyle/>
-          <a:p>
-            <a:endParaRPr lang="en-US"/>
-          </a:p>
-        </p:txBody>
-      </p:sp>
-      <p:sp>
-        <p:nvSpPr>
-          <p:cNvPr id="7" name="Slide Number Placeholder 6"/>
-          <p:cNvSpPr>
-            <a:spLocks noGrp="1"/>
-          </p:cNvSpPr>
-          <p:nvPr>
-            <p:ph type="sldNum" sz="quarter" idx="12"/>
-          </p:nvPr>
-        </p:nvSpPr>
-        <p:spPr/>
-        <p:txBody>
-          <a:bodyPr/>
-          <a:lstStyle/>
-          <a:p>
-            <a:fld id="{C1FF6DA9-008F-8B48-92A6-B652298478BF}" type="slidenum">
-              <a:rPr lang="en-US" smtClean="0"/>
-              <a:t>‹#›</a:t>
-            </a:fld>
-            <a:endParaRPr lang="en-US"/>
-          </a:p>
-        </p:txBody>
-      </p:sp>
-    </p:spTree>
-    <p:extLst>
-      <p:ext uri="{BB962C8B-B14F-4D97-AF65-F5344CB8AC3E}">
-        <p14:creationId xmlns:p14="http://schemas.microsoft.com/office/powerpoint/2010/main" val="1840726560"/>
-      </p:ext>
-    </p:extLst>
-  </p:cSld>
-  <p:clrMapOvr>
-    <a:masterClrMapping/>
-  </p:clrMapOvr>
-</p:sldLayout>
-</file>
-
-<file path=ppt/slideLayouts/slideLayout9.xml><?xml version="1.0" encoding="utf-8"?>
-<p:sldLayout xmlns:a="http://schemas.openxmlformats.org/drawingml/2006/main" xmlns:r="http://schemas.openxmlformats.org/officeDocument/2006/relationships" xmlns:p="http://schemas.openxmlformats.org/presentationml/2006/main" type="picTx" preserve="1">
-  <p:cSld name="Picture with Caption">
-    <p:spTree>
-      <p:nvGrpSpPr>
-        <p:cNvPr id="1" name=""/>
-        <p:cNvGrpSpPr/>
-        <p:nvPr/>
-      </p:nvGrpSpPr>
-      <p:grpSpPr>
-        <a:xfrm>
-          <a:off x="0" y="0"/>
-          <a:ext cx="0" cy="0"/>
-          <a:chOff x="0" y="0"/>
-          <a:chExt cx="0" cy="0"/>
-        </a:xfrm>
-      </p:grpSpPr>
-      <p:sp>
-        <p:nvSpPr>
-          <p:cNvPr id="2" name="Title 1"/>
-          <p:cNvSpPr>
-            <a:spLocks noGrp="1"/>
-          </p:cNvSpPr>
-          <p:nvPr>
-            <p:ph type="title"/>
-          </p:nvPr>
-        </p:nvSpPr>
-        <p:spPr>
-          <a:xfrm>
-            <a:off x="1792288" y="4800600"/>
-            <a:ext cx="5486400" cy="566738"/>
-          </a:xfrm>
-        </p:spPr>
-        <p:txBody>
-          <a:bodyPr anchor="b"/>
-          <a:lstStyle>
-            <a:lvl1pPr algn="l">
-              <a:defRPr sz="2000" b="1"/>
-            </a:lvl1pPr>
-          </a:lstStyle>
-          <a:p>
-            <a:r>
-              <a:rPr lang="en-US"/>
-              <a:t>Click to edit Master title style</a:t>
-            </a:r>
-          </a:p>
-        </p:txBody>
-      </p:sp>
-      <p:sp>
-        <p:nvSpPr>
-          <p:cNvPr id="3" name="Picture Placeholder 2"/>
-          <p:cNvSpPr>
-            <a:spLocks noGrp="1"/>
-          </p:cNvSpPr>
-          <p:nvPr>
-            <p:ph type="pic" idx="1"/>
-          </p:nvPr>
-        </p:nvSpPr>
-        <p:spPr>
-          <a:xfrm>
-            <a:off x="1792288" y="612775"/>
-            <a:ext cx="5486400" cy="4114800"/>
-          </a:xfrm>
-        </p:spPr>
-        <p:txBody>
-          <a:bodyPr/>
-          <a:lstStyle>
-            <a:lvl1pPr marL="0" indent="0">
-              <a:buNone/>
-              <a:defRPr sz="3200"/>
-            </a:lvl1pPr>
-            <a:lvl2pPr marL="457200" indent="0">
-              <a:buNone/>
-              <a:defRPr sz="2800"/>
-            </a:lvl2pPr>
-            <a:lvl3pPr marL="914400" indent="0">
-              <a:buNone/>
-              <a:defRPr sz="2400"/>
-            </a:lvl3pPr>
-            <a:lvl4pPr marL="1371600" indent="0">
-              <a:buNone/>
-              <a:defRPr sz="2000"/>
-            </a:lvl4pPr>
-            <a:lvl5pPr marL="1828800" indent="0">
-              <a:buNone/>
-              <a:defRPr sz="2000"/>
-            </a:lvl5pPr>
-            <a:lvl6pPr marL="2286000" indent="0">
-              <a:buNone/>
-              <a:defRPr sz="2000"/>
-            </a:lvl6pPr>
-            <a:lvl7pPr marL="2743200" indent="0">
-              <a:buNone/>
-              <a:defRPr sz="2000"/>
-            </a:lvl7pPr>
-            <a:lvl8pPr marL="3200400" indent="0">
-              <a:buNone/>
-              <a:defRPr sz="2000"/>
-            </a:lvl8pPr>
-            <a:lvl9pPr marL="3657600" indent="0">
-              <a:buNone/>
-              <a:defRPr sz="2000"/>
-            </a:lvl9pPr>
-          </a:lstStyle>
-          <a:p>
-            <a:endParaRPr lang="en-US"/>
-          </a:p>
-        </p:txBody>
-      </p:sp>
-      <p:sp>
-        <p:nvSpPr>
-          <p:cNvPr id="4" name="Text Placeholder 3"/>
-          <p:cNvSpPr>
-            <a:spLocks noGrp="1"/>
-          </p:cNvSpPr>
-          <p:nvPr>
-            <p:ph type="body" sz="half" idx="2"/>
-          </p:nvPr>
-        </p:nvSpPr>
-        <p:spPr>
-          <a:xfrm>
-            <a:off x="1792288" y="5367338"/>
-            <a:ext cx="5486400" cy="804862"/>
-          </a:xfrm>
-        </p:spPr>
-        <p:txBody>
-          <a:bodyPr/>
-          <a:lstStyle>
-            <a:lvl1pPr marL="0" indent="0">
-              <a:buNone/>
-              <a:defRPr sz="1400"/>
-            </a:lvl1pPr>
-            <a:lvl2pPr marL="457200" indent="0">
-              <a:buNone/>
-              <a:defRPr sz="1200"/>
-            </a:lvl2pPr>
-            <a:lvl3pPr marL="914400" indent="0">
-              <a:buNone/>
-              <a:defRPr sz="1000"/>
-            </a:lvl3pPr>
-            <a:lvl4pPr marL="1371600" indent="0">
-              <a:buNone/>
-              <a:defRPr sz="900"/>
-            </a:lvl4pPr>
-            <a:lvl5pPr marL="1828800" indent="0">
-              <a:buNone/>
-              <a:defRPr sz="900"/>
-            </a:lvl5pPr>
-            <a:lvl6pPr marL="2286000" indent="0">
-              <a:buNone/>
-              <a:defRPr sz="900"/>
-            </a:lvl6pPr>
-            <a:lvl7pPr marL="2743200" indent="0">
-              <a:buNone/>
-              <a:defRPr sz="900"/>
-            </a:lvl7pPr>
-            <a:lvl8pPr marL="3200400" indent="0">
-              <a:buNone/>
-              <a:defRPr sz="900"/>
-            </a:lvl8pPr>
-            <a:lvl9pPr marL="3657600" indent="0">
-              <a:buNone/>
-              <a:defRPr sz="900"/>
-            </a:lvl9pPr>
-          </a:lstStyle>
-          <a:p>
-            <a:pPr lvl="0"/>
-            <a:r>
-              <a:rPr lang="en-US"/>
-              <a:t>Click to edit Master text styles</a:t>
-            </a:r>
-          </a:p>
-        </p:txBody>
-      </p:sp>
-      <p:sp>
-        <p:nvSpPr>
-          <p:cNvPr id="5" name="Date Placeholder 4"/>
-          <p:cNvSpPr>
-            <a:spLocks noGrp="1"/>
-          </p:cNvSpPr>
-          <p:nvPr>
-            <p:ph type="dt" sz="half" idx="10"/>
-          </p:nvPr>
-        </p:nvSpPr>
-        <p:spPr/>
-        <p:txBody>
-          <a:bodyPr/>
-          <a:lstStyle/>
-          <a:p>
-            <a:fld id="{5BCAD085-E8A6-8845-BD4E-CB4CCA059FC4}" type="datetimeFigureOut">
-              <a:rPr lang="en-US" smtClean="0"/>
-              <a:t>9/18/2026</a:t>
-            </a:fld>
-            <a:endParaRPr lang="en-US"/>
-          </a:p>
-        </p:txBody>
-      </p:sp>
-      <p:sp>
-        <p:nvSpPr>
-          <p:cNvPr id="6" name="Footer Placeholder 5"/>
-          <p:cNvSpPr>
-            <a:spLocks noGrp="1"/>
-          </p:cNvSpPr>
-          <p:nvPr>
-            <p:ph type="ftr" sz="quarter" idx="11"/>
-          </p:nvPr>
-        </p:nvSpPr>
-        <p:spPr/>
-        <p:txBody>
-          <a:bodyPr/>
-          <a:lstStyle/>
-          <a:p>
-            <a:endParaRPr lang="en-US"/>
-          </a:p>
-        </p:txBody>
-      </p:sp>
-      <p:sp>
-        <p:nvSpPr>
-          <p:cNvPr id="7" name="Slide Number Placeholder 6"/>
-          <p:cNvSpPr>
-            <a:spLocks noGrp="1"/>
-          </p:cNvSpPr>
-          <p:nvPr>
-            <p:ph type="sldNum" sz="quarter" idx="12"/>
-          </p:nvPr>
-        </p:nvSpPr>
-        <p:spPr/>
-        <p:txBody>
-          <a:bodyPr/>
-          <a:lstStyle/>
-          <a:p>
-            <a:fld id="{C1FF6DA9-008F-8B48-92A6-B652298478BF}" type="slidenum">
-              <a:rPr lang="en-US" smtClean="0"/>
-              <a:t>‹#›</a:t>
-            </a:fld>
-            <a:endParaRPr lang="en-US"/>
-          </a:p>
-        </p:txBody>
-      </p:sp>
-    </p:spTree>
-    <p:extLst>
-      <p:ext uri="{BB962C8B-B14F-4D97-AF65-F5344CB8AC3E}">
-        <p14:creationId xmlns:p14="http://schemas.microsoft.com/office/powerpoint/2010/main" val="3889236939"/>
-      </p:ext>
-    </p:extLst>
   </p:cSld>
   <p:clrMapOvr>
     <a:masterClrMapping/>
@@ -7095,514 +6850,6 @@
       </p:grpSpPr>
       <p:sp>
         <p:nvSpPr>
-          <p:cNvPr id="2" name="Title Placeholder 1"/>
-          <p:cNvSpPr>
-            <a:spLocks noGrp="1"/>
-          </p:cNvSpPr>
-          <p:nvPr>
-            <p:ph type="title"/>
-          </p:nvPr>
-        </p:nvSpPr>
-        <p:spPr>
-          <a:xfrm>
-            <a:off x="457200" y="274638"/>
-            <a:ext cx="8229600" cy="1143000"/>
-          </a:xfrm>
-          <a:prstGeom prst="rect">
-            <a:avLst/>
-          </a:prstGeom>
-        </p:spPr>
-        <p:txBody>
-          <a:bodyPr vert="horz" lIns="91440" tIns="45720" rIns="91440" bIns="45720" rtlCol="0" anchor="ctr">
-            <a:normAutofit/>
-          </a:bodyPr>
-          <a:lstStyle/>
-          <a:p>
-            <a:r>
-              <a:rPr lang="en-US"/>
-              <a:t>Click to edit Master title style</a:t>
-            </a:r>
-          </a:p>
-        </p:txBody>
-      </p:sp>
-      <p:sp>
-        <p:nvSpPr>
-          <p:cNvPr id="3" name="Text Placeholder 2"/>
-          <p:cNvSpPr>
-            <a:spLocks noGrp="1"/>
-          </p:cNvSpPr>
-          <p:nvPr>
-            <p:ph type="body" idx="1"/>
-          </p:nvPr>
-        </p:nvSpPr>
-        <p:spPr>
-          <a:xfrm>
-            <a:off x="457200" y="1600200"/>
-            <a:ext cx="8229600" cy="4525963"/>
-          </a:xfrm>
-          <a:prstGeom prst="rect">
-            <a:avLst/>
-          </a:prstGeom>
-        </p:spPr>
-        <p:txBody>
-          <a:bodyPr vert="horz" lIns="91440" tIns="45720" rIns="91440" bIns="45720" rtlCol="0">
-            <a:normAutofit/>
-          </a:bodyPr>
-          <a:lstStyle/>
-          <a:p>
-            <a:pPr lvl="0"/>
-            <a:r>
-              <a:rPr lang="en-US"/>
-              <a:t>Click to edit Master text styles</a:t>
-            </a:r>
-          </a:p>
-          <a:p>
-            <a:pPr lvl="1"/>
-            <a:r>
-              <a:rPr lang="en-US"/>
-              <a:t>Second level</a:t>
-            </a:r>
-          </a:p>
-          <a:p>
-            <a:pPr lvl="2"/>
-            <a:r>
-              <a:rPr lang="en-US"/>
-              <a:t>Third level</a:t>
-            </a:r>
-          </a:p>
-          <a:p>
-            <a:pPr lvl="3"/>
-            <a:r>
-              <a:rPr lang="en-US"/>
-              <a:t>Fourth level</a:t>
-            </a:r>
-          </a:p>
-          <a:p>
-            <a:pPr lvl="4"/>
-            <a:r>
-              <a:rPr lang="en-US"/>
-              <a:t>Fifth level</a:t>
-            </a:r>
-          </a:p>
-        </p:txBody>
-      </p:sp>
-      <p:sp>
-        <p:nvSpPr>
-          <p:cNvPr id="4" name="Date Placeholder 3"/>
-          <p:cNvSpPr>
-            <a:spLocks noGrp="1"/>
-          </p:cNvSpPr>
-          <p:nvPr>
-            <p:ph type="dt" sz="half" idx="2"/>
-          </p:nvPr>
-        </p:nvSpPr>
-        <p:spPr>
-          <a:xfrm>
-            <a:off x="457200" y="6356350"/>
-            <a:ext cx="2133600" cy="365125"/>
-          </a:xfrm>
-          <a:prstGeom prst="rect">
-            <a:avLst/>
-          </a:prstGeom>
-        </p:spPr>
-        <p:txBody>
-          <a:bodyPr vert="horz" lIns="91440" tIns="45720" rIns="91440" bIns="45720" rtlCol="0" anchor="ctr"/>
-          <a:lstStyle>
-            <a:lvl1pPr algn="l">
-              <a:defRPr sz="1200">
-                <a:solidFill>
-                  <a:schemeClr val="tx1">
-                    <a:tint val="75000"/>
-                  </a:schemeClr>
-                </a:solidFill>
-              </a:defRPr>
-            </a:lvl1pPr>
-          </a:lstStyle>
-          <a:p>
-            <a:fld id="{5BCAD085-E8A6-8845-BD4E-CB4CCA059FC4}" type="datetimeFigureOut">
-              <a:rPr lang="en-US" smtClean="0"/>
-              <a:t>9/18/2026</a:t>
-            </a:fld>
-            <a:endParaRPr lang="en-US"/>
-          </a:p>
-        </p:txBody>
-      </p:sp>
-      <p:sp>
-        <p:nvSpPr>
-          <p:cNvPr id="5" name="Footer Placeholder 4"/>
-          <p:cNvSpPr>
-            <a:spLocks noGrp="1"/>
-          </p:cNvSpPr>
-          <p:nvPr>
-            <p:ph type="ftr" sz="quarter" idx="3"/>
-          </p:nvPr>
-        </p:nvSpPr>
-        <p:spPr>
-          <a:xfrm>
-            <a:off x="3124200" y="6356350"/>
-            <a:ext cx="2895600" cy="365125"/>
-          </a:xfrm>
-          <a:prstGeom prst="rect">
-            <a:avLst/>
-          </a:prstGeom>
-        </p:spPr>
-        <p:txBody>
-          <a:bodyPr vert="horz" lIns="91440" tIns="45720" rIns="91440" bIns="45720" rtlCol="0" anchor="ctr"/>
-          <a:lstStyle>
-            <a:lvl1pPr algn="ctr">
-              <a:defRPr sz="1200">
-                <a:solidFill>
-                  <a:schemeClr val="tx1">
-                    <a:tint val="75000"/>
-                  </a:schemeClr>
-                </a:solidFill>
-              </a:defRPr>
-            </a:lvl1pPr>
-          </a:lstStyle>
-          <a:p>
-            <a:endParaRPr lang="en-US"/>
-          </a:p>
-        </p:txBody>
-      </p:sp>
-      <p:sp>
-        <p:nvSpPr>
-          <p:cNvPr id="6" name="Slide Number Placeholder 5"/>
-          <p:cNvSpPr>
-            <a:spLocks noGrp="1"/>
-          </p:cNvSpPr>
-          <p:nvPr>
-            <p:ph type="sldNum" sz="quarter" idx="4"/>
-          </p:nvPr>
-        </p:nvSpPr>
-        <p:spPr>
-          <a:xfrm>
-            <a:off x="6553200" y="6356350"/>
-            <a:ext cx="2133600" cy="365125"/>
-          </a:xfrm>
-          <a:prstGeom prst="rect">
-            <a:avLst/>
-          </a:prstGeom>
-        </p:spPr>
-        <p:txBody>
-          <a:bodyPr vert="horz" lIns="91440" tIns="45720" rIns="91440" bIns="45720" rtlCol="0" anchor="ctr"/>
-          <a:lstStyle>
-            <a:lvl1pPr algn="r">
-              <a:defRPr sz="1200">
-                <a:solidFill>
-                  <a:schemeClr val="tx1">
-                    <a:tint val="75000"/>
-                  </a:schemeClr>
-                </a:solidFill>
-              </a:defRPr>
-            </a:lvl1pPr>
-          </a:lstStyle>
-          <a:p>
-            <a:fld id="{C1FF6DA9-008F-8B48-92A6-B652298478BF}" type="slidenum">
-              <a:rPr lang="en-US" smtClean="0"/>
-              <a:t>‹#›</a:t>
-            </a:fld>
-            <a:endParaRPr lang="en-US"/>
-          </a:p>
-        </p:txBody>
-      </p:sp>
-    </p:spTree>
-    <p:extLst>
-      <p:ext uri="{BB962C8B-B14F-4D97-AF65-F5344CB8AC3E}">
-        <p14:creationId xmlns:p14="http://schemas.microsoft.com/office/powerpoint/2010/main" val="2209977519"/>
-      </p:ext>
-    </p:extLst>
-  </p:cSld>
-  <p:clrMap bg1="lt1" tx1="dk1" bg2="lt2" tx2="dk2" accent1="accent1" accent2="accent2" accent3="accent3" accent4="accent4" accent5="accent5" accent6="accent6" hlink="hlink" folHlink="folHlink"/>
-  <p:sldLayoutIdLst>
-    <p:sldLayoutId id="2147483649" r:id="rId1"/>
-    <p:sldLayoutId id="2147483650" r:id="rId2"/>
-    <p:sldLayoutId id="2147483651" r:id="rId3"/>
-    <p:sldLayoutId id="2147483652" r:id="rId4"/>
-    <p:sldLayoutId id="2147483653" r:id="rId5"/>
-    <p:sldLayoutId id="2147483654" r:id="rId6"/>
-    <p:sldLayoutId id="2147483655" r:id="rId7"/>
-    <p:sldLayoutId id="2147483656" r:id="rId8"/>
-    <p:sldLayoutId id="2147483657" r:id="rId9"/>
-    <p:sldLayoutId id="2147483658" r:id="rId10"/>
-    <p:sldLayoutId id="2147483659" r:id="rId11"/>
-  </p:sldLayoutIdLst>
-  <p:txStyles>
-    <p:titleStyle>
-      <a:lvl1pPr algn="ctr" defTabSz="457200" rtl="0" eaLnBrk="1" latinLnBrk="0" hangingPunct="1">
-        <a:spcBef>
-          <a:spcPct val="0"/>
-        </a:spcBef>
-        <a:buNone/>
-        <a:defRPr sz="4400" kern="1200">
-          <a:solidFill>
-            <a:schemeClr val="tx1"/>
-          </a:solidFill>
-          <a:latin typeface="+mj-lt"/>
-          <a:ea typeface="+mj-ea"/>
-          <a:cs typeface="+mj-cs"/>
-        </a:defRPr>
-      </a:lvl1pPr>
-    </p:titleStyle>
-    <p:bodyStyle>
-      <a:lvl1pPr marL="342900" indent="-342900" algn="l" defTabSz="457200" rtl="0" eaLnBrk="1" latinLnBrk="0" hangingPunct="1">
-        <a:spcBef>
-          <a:spcPct val="20000"/>
-        </a:spcBef>
-        <a:buFont typeface="Arial"/>
-        <a:buChar char="•"/>
-        <a:defRPr sz="3200" kern="1200">
-          <a:solidFill>
-            <a:schemeClr val="tx1"/>
-          </a:solidFill>
-          <a:latin typeface="+mn-lt"/>
-          <a:ea typeface="+mn-ea"/>
-          <a:cs typeface="+mn-cs"/>
-        </a:defRPr>
-      </a:lvl1pPr>
-      <a:lvl2pPr marL="742950" indent="-285750" algn="l" defTabSz="457200" rtl="0" eaLnBrk="1" latinLnBrk="0" hangingPunct="1">
-        <a:spcBef>
-          <a:spcPct val="20000"/>
-        </a:spcBef>
-        <a:buFont typeface="Arial"/>
-        <a:buChar char="–"/>
-        <a:defRPr sz="2800" kern="1200">
-          <a:solidFill>
-            <a:schemeClr val="tx1"/>
-          </a:solidFill>
-          <a:latin typeface="+mn-lt"/>
-          <a:ea typeface="+mn-ea"/>
-          <a:cs typeface="+mn-cs"/>
-        </a:defRPr>
-      </a:lvl2pPr>
-      <a:lvl3pPr marL="1143000" indent="-228600" algn="l" defTabSz="457200" rtl="0" eaLnBrk="1" latinLnBrk="0" hangingPunct="1">
-        <a:spcBef>
-          <a:spcPct val="20000"/>
-        </a:spcBef>
-        <a:buFont typeface="Arial"/>
-        <a:buChar char="•"/>
-        <a:defRPr sz="2400" kern="1200">
-          <a:solidFill>
-            <a:schemeClr val="tx1"/>
-          </a:solidFill>
-          <a:latin typeface="+mn-lt"/>
-          <a:ea typeface="+mn-ea"/>
-          <a:cs typeface="+mn-cs"/>
-        </a:defRPr>
-      </a:lvl3pPr>
-      <a:lvl4pPr marL="1600200" indent="-228600" algn="l" defTabSz="457200" rtl="0" eaLnBrk="1" latinLnBrk="0" hangingPunct="1">
-        <a:spcBef>
-          <a:spcPct val="20000"/>
-        </a:spcBef>
-        <a:buFont typeface="Arial"/>
-        <a:buChar char="–"/>
-        <a:defRPr sz="2000" kern="1200">
-          <a:solidFill>
-            <a:schemeClr val="tx1"/>
-          </a:solidFill>
-          <a:latin typeface="+mn-lt"/>
-          <a:ea typeface="+mn-ea"/>
-          <a:cs typeface="+mn-cs"/>
-        </a:defRPr>
-      </a:lvl4pPr>
-      <a:lvl5pPr marL="2057400" indent="-228600" algn="l" defTabSz="457200" rtl="0" eaLnBrk="1" latinLnBrk="0" hangingPunct="1">
-        <a:spcBef>
-          <a:spcPct val="20000"/>
-        </a:spcBef>
-        <a:buFont typeface="Arial"/>
-        <a:buChar char="»"/>
-        <a:defRPr sz="2000" kern="1200">
-          <a:solidFill>
-            <a:schemeClr val="tx1"/>
-          </a:solidFill>
-          <a:latin typeface="+mn-lt"/>
-          <a:ea typeface="+mn-ea"/>
-          <a:cs typeface="+mn-cs"/>
-        </a:defRPr>
-      </a:lvl5pPr>
-      <a:lvl6pPr marL="2514600" indent="-228600" algn="l" defTabSz="457200" rtl="0" eaLnBrk="1" latinLnBrk="0" hangingPunct="1">
-        <a:spcBef>
-          <a:spcPct val="20000"/>
-        </a:spcBef>
-        <a:buFont typeface="Arial"/>
-        <a:buChar char="•"/>
-        <a:defRPr sz="2000" kern="1200">
-          <a:solidFill>
-            <a:schemeClr val="tx1"/>
-          </a:solidFill>
-          <a:latin typeface="+mn-lt"/>
-          <a:ea typeface="+mn-ea"/>
-          <a:cs typeface="+mn-cs"/>
-        </a:defRPr>
-      </a:lvl6pPr>
-      <a:lvl7pPr marL="2971800" indent="-228600" algn="l" defTabSz="457200" rtl="0" eaLnBrk="1" latinLnBrk="0" hangingPunct="1">
-        <a:spcBef>
-          <a:spcPct val="20000"/>
-        </a:spcBef>
-        <a:buFont typeface="Arial"/>
-        <a:buChar char="•"/>
-        <a:defRPr sz="2000" kern="1200">
-          <a:solidFill>
-            <a:schemeClr val="tx1"/>
-          </a:solidFill>
-          <a:latin typeface="+mn-lt"/>
-          <a:ea typeface="+mn-ea"/>
-          <a:cs typeface="+mn-cs"/>
-        </a:defRPr>
-      </a:lvl7pPr>
-      <a:lvl8pPr marL="3429000" indent="-228600" algn="l" defTabSz="457200" rtl="0" eaLnBrk="1" latinLnBrk="0" hangingPunct="1">
-        <a:spcBef>
-          <a:spcPct val="20000"/>
-        </a:spcBef>
-        <a:buFont typeface="Arial"/>
-        <a:buChar char="•"/>
-        <a:defRPr sz="2000" kern="1200">
-          <a:solidFill>
-            <a:schemeClr val="tx1"/>
-          </a:solidFill>
-          <a:latin typeface="+mn-lt"/>
-          <a:ea typeface="+mn-ea"/>
-          <a:cs typeface="+mn-cs"/>
-        </a:defRPr>
-      </a:lvl8pPr>
-      <a:lvl9pPr marL="3886200" indent="-228600" algn="l" defTabSz="457200" rtl="0" eaLnBrk="1" latinLnBrk="0" hangingPunct="1">
-        <a:spcBef>
-          <a:spcPct val="20000"/>
-        </a:spcBef>
-        <a:buFont typeface="Arial"/>
-        <a:buChar char="•"/>
-        <a:defRPr sz="2000" kern="1200">
-          <a:solidFill>
-            <a:schemeClr val="tx1"/>
-          </a:solidFill>
-          <a:latin typeface="+mn-lt"/>
-          <a:ea typeface="+mn-ea"/>
-          <a:cs typeface="+mn-cs"/>
-        </a:defRPr>
-      </a:lvl9pPr>
-    </p:bodyStyle>
-    <p:otherStyle>
-      <a:defPPr>
-        <a:defRPr lang="en-US"/>
-      </a:defPPr>
-      <a:lvl1pPr marL="0" algn="l" defTabSz="457200" rtl="0" eaLnBrk="1" latinLnBrk="0" hangingPunct="1">
-        <a:defRPr sz="1800" kern="1200">
-          <a:solidFill>
-            <a:schemeClr val="tx1"/>
-          </a:solidFill>
-          <a:latin typeface="+mn-lt"/>
-          <a:ea typeface="+mn-ea"/>
-          <a:cs typeface="+mn-cs"/>
-        </a:defRPr>
-      </a:lvl1pPr>
-      <a:lvl2pPr marL="457200" algn="l" defTabSz="457200" rtl="0" eaLnBrk="1" latinLnBrk="0" hangingPunct="1">
-        <a:defRPr sz="1800" kern="1200">
-          <a:solidFill>
-            <a:schemeClr val="tx1"/>
-          </a:solidFill>
-          <a:latin typeface="+mn-lt"/>
-          <a:ea typeface="+mn-ea"/>
-          <a:cs typeface="+mn-cs"/>
-        </a:defRPr>
-      </a:lvl2pPr>
-      <a:lvl3pPr marL="914400" algn="l" defTabSz="457200" rtl="0" eaLnBrk="1" latinLnBrk="0" hangingPunct="1">
-        <a:defRPr sz="1800" kern="1200">
-          <a:solidFill>
-            <a:schemeClr val="tx1"/>
-          </a:solidFill>
-          <a:latin typeface="+mn-lt"/>
-          <a:ea typeface="+mn-ea"/>
-          <a:cs typeface="+mn-cs"/>
-        </a:defRPr>
-      </a:lvl3pPr>
-      <a:lvl4pPr marL="1371600" algn="l" defTabSz="457200" rtl="0" eaLnBrk="1" latinLnBrk="0" hangingPunct="1">
-        <a:defRPr sz="1800" kern="1200">
-          <a:solidFill>
-            <a:schemeClr val="tx1"/>
-          </a:solidFill>
-          <a:latin typeface="+mn-lt"/>
-          <a:ea typeface="+mn-ea"/>
-          <a:cs typeface="+mn-cs"/>
-        </a:defRPr>
-      </a:lvl4pPr>
-      <a:lvl5pPr marL="1828800" algn="l" defTabSz="457200" rtl="0" eaLnBrk="1" latinLnBrk="0" hangingPunct="1">
-        <a:defRPr sz="1800" kern="1200">
-          <a:solidFill>
-            <a:schemeClr val="tx1"/>
-          </a:solidFill>
-          <a:latin typeface="+mn-lt"/>
-          <a:ea typeface="+mn-ea"/>
-          <a:cs typeface="+mn-cs"/>
-        </a:defRPr>
-      </a:lvl5pPr>
-      <a:lvl6pPr marL="2286000" algn="l" defTabSz="457200" rtl="0" eaLnBrk="1" latinLnBrk="0" hangingPunct="1">
-        <a:defRPr sz="1800" kern="1200">
-          <a:solidFill>
-            <a:schemeClr val="tx1"/>
-          </a:solidFill>
-          <a:latin typeface="+mn-lt"/>
-          <a:ea typeface="+mn-ea"/>
-          <a:cs typeface="+mn-cs"/>
-        </a:defRPr>
-      </a:lvl6pPr>
-      <a:lvl7pPr marL="2743200" algn="l" defTabSz="457200" rtl="0" eaLnBrk="1" latinLnBrk="0" hangingPunct="1">
-        <a:defRPr sz="1800" kern="1200">
-          <a:solidFill>
-            <a:schemeClr val="tx1"/>
-          </a:solidFill>
-          <a:latin typeface="+mn-lt"/>
-          <a:ea typeface="+mn-ea"/>
-          <a:cs typeface="+mn-cs"/>
-        </a:defRPr>
-      </a:lvl7pPr>
-      <a:lvl8pPr marL="3200400" algn="l" defTabSz="457200" rtl="0" eaLnBrk="1" latinLnBrk="0" hangingPunct="1">
-        <a:defRPr sz="1800" kern="1200">
-          <a:solidFill>
-            <a:schemeClr val="tx1"/>
-          </a:solidFill>
-          <a:latin typeface="+mn-lt"/>
-          <a:ea typeface="+mn-ea"/>
-          <a:cs typeface="+mn-cs"/>
-        </a:defRPr>
-      </a:lvl8pPr>
-      <a:lvl9pPr marL="3657600" algn="l" defTabSz="457200" rtl="0" eaLnBrk="1" latinLnBrk="0" hangingPunct="1">
-        <a:defRPr sz="1800" kern="1200">
-          <a:solidFill>
-            <a:schemeClr val="tx1"/>
-          </a:solidFill>
-          <a:latin typeface="+mn-lt"/>
-          <a:ea typeface="+mn-ea"/>
-          <a:cs typeface="+mn-cs"/>
-        </a:defRPr>
-      </a:lvl9pPr>
-    </p:otherStyle>
-  </p:txStyles>
-</p:sldMaster>
-</file>
-
-<file path=ppt/slideMasters/slideMaster2.xml><?xml version="1.0" encoding="utf-8"?>
-<p:sldMaster xmlns:a="http://schemas.openxmlformats.org/drawingml/2006/main" xmlns:r="http://schemas.openxmlformats.org/officeDocument/2006/relationships" xmlns:p="http://schemas.openxmlformats.org/presentationml/2006/main">
-  <p:cSld>
-    <p:bg>
-      <p:bgRef idx="1001">
-        <a:schemeClr val="bg1"/>
-      </p:bgRef>
-    </p:bg>
-    <p:spTree>
-      <p:nvGrpSpPr>
-        <p:cNvPr id="1" name=""/>
-        <p:cNvGrpSpPr/>
-        <p:nvPr/>
-      </p:nvGrpSpPr>
-      <p:grpSpPr>
-        <a:xfrm>
-          <a:off x="0" y="0"/>
-          <a:ext cx="0" cy="0"/>
-          <a:chOff x="0" y="0"/>
-          <a:chExt cx="0" cy="0"/>
-        </a:xfrm>
-      </p:grpSpPr>
-      <p:sp>
-        <p:nvSpPr>
           <p:cNvPr id="25" name="Slide Number Placeholder 0"/>
           <p:cNvSpPr>
             <a:spLocks noGrp="1"/>
@@ -7621,7 +6868,7 @@
           </a:prstGeom>
           <a:extLst>
             <a:ext uri="{C572A759-6A51-4108-AA02-DFA0A04FC94B}">
-              <ma14:wrappingTextBoxFlag xmlns="" xmlns:ma14="http://schemas.microsoft.com/office/mac/drawingml/2011/main" val="0"/>
+              <ma14:wrappingTextBoxFlag xmlns:ma14="http://schemas.microsoft.com/office/mac/drawingml/2011/main" xmlns="" val="0"/>
             </a:ext>
           </a:extLst>
         </p:spPr>
@@ -8177,8 +7424,8 @@
         </p:nvSpPr>
         <p:spPr>
           <a:xfrm>
-            <a:off x="850392" y="1234440"/>
-            <a:ext cx="6812280" cy="1691640"/>
+            <a:off x="850391" y="1234440"/>
+            <a:ext cx="8986627" cy="1691640"/>
           </a:xfrm>
           <a:prstGeom prst="rect">
             <a:avLst/>
@@ -8196,7 +7443,7 @@
               <a:buNone/>
             </a:pPr>
             <a:r>
-              <a:rPr lang="en-US" sz="3800" b="1" dirty="0">
+              <a:rPr lang="en-US" sz="4400" b="1" dirty="0">
                 <a:solidFill>
                   <a:srgbClr val="F8FBFF"/>
                 </a:solidFill>
@@ -8204,53 +7451,37 @@
                 <a:ea typeface="Carlito" pitchFamily="34" charset="-122"/>
                 <a:cs typeface="Carlito" pitchFamily="34" charset="-120"/>
               </a:rPr>
-              <a:t>From Prototype</a:t>
-            </a:r>
-          </a:p>
+              <a:t>From Prototype to Production</a:t>
+            </a:r>
+          </a:p>
+        </p:txBody>
+      </p:sp>
+      <p:sp>
+        <p:nvSpPr>
+          <p:cNvPr id="24" name="Brand_24"/>
+          <p:cNvSpPr/>
+          <p:nvPr/>
+        </p:nvSpPr>
+        <p:spPr>
+          <a:xfrm>
+            <a:off x="850391" y="2421636"/>
+            <a:ext cx="6223000" cy="762000"/>
+          </a:xfrm>
+          <a:prstGeom prst="rect">
+            <a:avLst/>
+          </a:prstGeom>
+          <a:noFill/>
+          <a:ln/>
+        </p:spPr>
+        <p:txBody>
+          <a:bodyPr wrap="square" lIns="0" tIns="0" rIns="0" bIns="0" rtlCol="0" anchor="ctr"/>
+          <a:lstStyle/>
           <a:p>
             <a:pPr marL="0" indent="0">
               <a:buNone/>
             </a:pPr>
             <a:r>
-              <a:rPr lang="en-US" sz="3800" b="1" dirty="0">
-                <a:solidFill>
-                  <a:srgbClr val="F8FBFF"/>
-                </a:solidFill>
-                <a:latin typeface="Carlito" pitchFamily="34" charset="0"/>
-                <a:ea typeface="Carlito" pitchFamily="34" charset="-122"/>
-                <a:cs typeface="Carlito" pitchFamily="34" charset="-120"/>
-              </a:rPr>
-              <a:t>to Production</a:t>
-            </a:r>
-          </a:p>
-        </p:txBody>
-      </p:sp>
-      <p:sp>
-        <p:nvSpPr>
-          <p:cNvPr id="24" name="Brand_24"/>
-          <p:cNvSpPr/>
-          <p:nvPr/>
-        </p:nvSpPr>
-        <p:spPr>
-          <a:xfrm>
-            <a:off x="877824" y="3154680"/>
-            <a:ext cx="6223000" cy="762000"/>
-          </a:xfrm>
-          <a:prstGeom prst="rect">
-            <a:avLst/>
-          </a:prstGeom>
-          <a:noFill/>
-          <a:ln/>
-        </p:spPr>
-        <p:txBody>
-          <a:bodyPr wrap="square" lIns="0" tIns="0" rIns="0" bIns="0" rtlCol="0" anchor="ctr"/>
-          <a:lstStyle/>
-          <a:p>
-            <a:pPr marL="0" indent="0">
-              <a:buNone/>
-            </a:pPr>
-            <a:r>
-              <a:rPr lang="en-US" sz="1800" dirty="0">
+              <a:rPr lang="en-US" sz="2400" dirty="0">
                 <a:solidFill>
                   <a:srgbClr val="AAB7D8"/>
                 </a:solidFill>
@@ -8271,7 +7502,7 @@
         </p:nvSpPr>
         <p:spPr>
           <a:xfrm>
-            <a:off x="877824" y="4160520"/>
+            <a:off x="877824" y="3472334"/>
             <a:ext cx="2468880" cy="274320"/>
           </a:xfrm>
           <a:prstGeom prst="rect">
@@ -8288,7 +7519,7 @@
               <a:buNone/>
             </a:pPr>
             <a:r>
-              <a:rPr lang="en-US" sz="1300" b="1" kern="0" spc="140" dirty="0">
+              <a:rPr lang="en-US" sz="1600" b="1" kern="0" spc="140" dirty="0">
                 <a:solidFill>
                   <a:srgbClr val="68E1E8"/>
                 </a:solidFill>
@@ -8309,7 +7540,7 @@
         </p:nvSpPr>
         <p:spPr>
           <a:xfrm>
-            <a:off x="877824" y="4480560"/>
+            <a:off x="877824" y="4053880"/>
             <a:ext cx="6350000" cy="381000"/>
           </a:xfrm>
           <a:prstGeom prst="rect">
@@ -8326,7 +7557,7 @@
               <a:buNone/>
             </a:pPr>
             <a:r>
-              <a:rPr lang="en-US" sz="1300" dirty="0">
+              <a:rPr lang="en-US" sz="1600" dirty="0">
                 <a:solidFill>
                   <a:srgbClr val="F8FBFF"/>
                 </a:solidFill>
@@ -8334,8 +7565,86 @@
                 <a:ea typeface="Carlito" pitchFamily="34" charset="-122"/>
                 <a:cs typeface="Carlito" pitchFamily="34" charset="-120"/>
               </a:rPr>
-              <a:t>Principal Cloud Advocate Manager, Microsoft</a:t>
-            </a:r>
+              <a:t>Principal Cloud Advocate, </a:t>
+            </a:r>
+          </a:p>
+          <a:p>
+            <a:pPr marL="0" indent="0">
+              <a:buNone/>
+            </a:pPr>
+            <a:r>
+              <a:rPr lang="en-US" sz="1600" dirty="0">
+                <a:solidFill>
+                  <a:srgbClr val="F8FBFF"/>
+                </a:solidFill>
+                <a:latin typeface="Carlito" pitchFamily="34" charset="0"/>
+                <a:ea typeface="Carlito" pitchFamily="34" charset="-122"/>
+                <a:cs typeface="Carlito" pitchFamily="34" charset="-120"/>
+              </a:rPr>
+              <a:t>Microsoft</a:t>
+            </a:r>
+          </a:p>
+          <a:p>
+            <a:pPr marL="0" indent="0">
+              <a:buNone/>
+            </a:pPr>
+            <a:r>
+              <a:rPr lang="en-US" sz="1600" dirty="0">
+                <a:solidFill>
+                  <a:srgbClr val="F8FBFF"/>
+                </a:solidFill>
+                <a:latin typeface="Carlito" pitchFamily="34" charset="0"/>
+                <a:ea typeface="Carlito" pitchFamily="34" charset="-122"/>
+                <a:cs typeface="Carlito" pitchFamily="34" charset="-120"/>
+              </a:rPr>
+              <a:t>@lee_stott</a:t>
+            </a:r>
+          </a:p>
+          <a:p>
+            <a:pPr marL="0" indent="0">
+              <a:buNone/>
+            </a:pPr>
+            <a:r>
+              <a:rPr lang="en-US" sz="1600" dirty="0" err="1">
+                <a:solidFill>
+                  <a:srgbClr val="F8FBFF"/>
+                </a:solidFill>
+                <a:latin typeface="Carlito" pitchFamily="34" charset="0"/>
+                <a:ea typeface="Carlito" pitchFamily="34" charset="-122"/>
+                <a:cs typeface="Carlito" pitchFamily="34" charset="-120"/>
+              </a:rPr>
+              <a:t>Linkedin</a:t>
+            </a:r>
+            <a:r>
+              <a:rPr lang="en-US" sz="1600" dirty="0">
+                <a:solidFill>
+                  <a:srgbClr val="F8FBFF"/>
+                </a:solidFill>
+                <a:latin typeface="Carlito" pitchFamily="34" charset="0"/>
+                <a:ea typeface="Carlito" pitchFamily="34" charset="-122"/>
+                <a:cs typeface="Carlito" pitchFamily="34" charset="-120"/>
+              </a:rPr>
+              <a:t>/in/</a:t>
+            </a:r>
+            <a:r>
+              <a:rPr lang="en-US" sz="1600" dirty="0" err="1">
+                <a:solidFill>
+                  <a:srgbClr val="F8FBFF"/>
+                </a:solidFill>
+                <a:latin typeface="Carlito" pitchFamily="34" charset="0"/>
+                <a:ea typeface="Carlito" pitchFamily="34" charset="-122"/>
+                <a:cs typeface="Carlito" pitchFamily="34" charset="-120"/>
+              </a:rPr>
+              <a:t>leestott</a:t>
+            </a:r>
+            <a:endParaRPr lang="en-US" sz="1600" dirty="0">
+              <a:solidFill>
+                <a:srgbClr val="F8FBFF"/>
+              </a:solidFill>
+              <a:latin typeface="Carlito" pitchFamily="34" charset="0"/>
+              <a:ea typeface="Carlito" pitchFamily="34" charset="-122"/>
+              <a:cs typeface="Carlito" pitchFamily="34" charset="-120"/>
+            </a:endParaRPr>
           </a:p>
         </p:txBody>
       </p:sp>
@@ -8434,8 +7743,8 @@
         </p:blipFill>
         <p:spPr>
           <a:xfrm>
-            <a:off x="6858000" y="5230368"/>
-            <a:ext cx="4892040" cy="1143000"/>
+            <a:off x="7592862" y="5230368"/>
+            <a:ext cx="3422315" cy="1143000"/>
           </a:xfrm>
           <a:prstGeom prst="rect">
             <a:avLst/>
@@ -8462,7 +7771,7 @@
           </a:prstGeom>
           <a:extLst>
             <a:ext uri="{C572A759-6A51-4108-AA02-DFA0A04FC94B}">
-              <ma14:wrappingTextBoxFlag xmlns="" xmlns:ma14="http://schemas.microsoft.com/office/mac/drawingml/2011/main" val="0"/>
+              <ma14:wrappingTextBoxFlag xmlns:ma14="http://schemas.microsoft.com/office/mac/drawingml/2011/main" xmlns="" val="0"/>
             </a:ext>
           </a:extLst>
         </p:spPr>
@@ -8512,7 +7821,7 @@
         </p:blipFill>
         <p:spPr>
           <a:xfrm>
-            <a:off x="7723515" y="1194757"/>
+            <a:off x="8705292" y="1222189"/>
             <a:ext cx="3590661" cy="3590661"/>
           </a:xfrm>
           <a:prstGeom prst="rect">
@@ -9700,7 +9009,7 @@
           </a:prstGeom>
           <a:extLst>
             <a:ext uri="{C572A759-6A51-4108-AA02-DFA0A04FC94B}">
-              <ma14:wrappingTextBoxFlag xmlns="" xmlns:ma14="http://schemas.microsoft.com/office/mac/drawingml/2011/main" val="0"/>
+              <ma14:wrappingTextBoxFlag xmlns:ma14="http://schemas.microsoft.com/office/mac/drawingml/2011/main" xmlns="" val="0"/>
             </a:ext>
           </a:extLst>
         </p:spPr>
@@ -9771,8 +9080,8 @@
         </p:blipFill>
         <p:spPr>
           <a:xfrm>
-            <a:off x="6858000" y="5230368"/>
-            <a:ext cx="4892040" cy="1143000"/>
+            <a:off x="7592862" y="5230368"/>
+            <a:ext cx="3422315" cy="1143000"/>
           </a:xfrm>
           <a:prstGeom prst="rect">
             <a:avLst/>
@@ -10263,7 +9572,7 @@
           </a:prstGeom>
           <a:extLst>
             <a:ext uri="{C572A759-6A51-4108-AA02-DFA0A04FC94B}">
-              <ma14:wrappingTextBoxFlag xmlns="" xmlns:ma14="http://schemas.microsoft.com/office/mac/drawingml/2011/main" val="0"/>
+              <ma14:wrappingTextBoxFlag xmlns:ma14="http://schemas.microsoft.com/office/mac/drawingml/2011/main" xmlns="" val="0"/>
             </a:ext>
           </a:extLst>
         </p:spPr>
@@ -11013,7 +10322,7 @@
           </a:prstGeom>
           <a:extLst>
             <a:ext uri="{C572A759-6A51-4108-AA02-DFA0A04FC94B}">
-              <ma14:wrappingTextBoxFlag xmlns="" xmlns:ma14="http://schemas.microsoft.com/office/mac/drawingml/2011/main" val="0"/>
+              <ma14:wrappingTextBoxFlag xmlns:ma14="http://schemas.microsoft.com/office/mac/drawingml/2011/main" xmlns="" val="0"/>
             </a:ext>
           </a:extLst>
         </p:spPr>
@@ -11084,8 +10393,8 @@
         </p:blipFill>
         <p:spPr>
           <a:xfrm>
-            <a:off x="6858000" y="5230368"/>
-            <a:ext cx="4892040" cy="1143000"/>
+            <a:off x="7592862" y="5230368"/>
+            <a:ext cx="3422315" cy="1143000"/>
           </a:xfrm>
           <a:prstGeom prst="rect">
             <a:avLst/>
@@ -11576,7 +10885,7 @@
           </a:prstGeom>
           <a:extLst>
             <a:ext uri="{C572A759-6A51-4108-AA02-DFA0A04FC94B}">
-              <ma14:wrappingTextBoxFlag xmlns="" xmlns:ma14="http://schemas.microsoft.com/office/mac/drawingml/2011/main" val="0"/>
+              <ma14:wrappingTextBoxFlag xmlns:ma14="http://schemas.microsoft.com/office/mac/drawingml/2011/main" xmlns="" val="0"/>
             </a:ext>
           </a:extLst>
         </p:spPr>
@@ -11884,7 +11193,7 @@
         <p:spPr>
           <a:xfrm>
             <a:off x="566420" y="786130"/>
-            <a:ext cx="11064240" cy="777240"/>
+            <a:ext cx="11064240" cy="430887"/>
           </a:xfrm>
           <a:prstGeom prst="rect">
             <a:avLst/>
@@ -11906,7 +11215,12 @@
               </a:defRPr>
             </a:pPr>
             <a:r>
-              <a:t>Asha can approve. The model cannot.</a:t>
+              <a:rPr lang="en-GB" dirty="0"/>
+              <a:t>I</a:t>
+            </a:r>
+            <a:r>
+              <a:rPr dirty="0"/>
+              <a:t> can approve. The model cannot.</a:t>
             </a:r>
           </a:p>
         </p:txBody>
@@ -12281,7 +11595,7 @@
           </a:prstGeom>
           <a:extLst>
             <a:ext uri="{C572A759-6A51-4108-AA02-DFA0A04FC94B}">
-              <ma14:wrappingTextBoxFlag xmlns="" xmlns:ma14="http://schemas.microsoft.com/office/mac/drawingml/2011/main" val="0"/>
+              <ma14:wrappingTextBoxFlag xmlns:ma14="http://schemas.microsoft.com/office/mac/drawingml/2011/main" xmlns="" val="0"/>
             </a:ext>
           </a:extLst>
         </p:spPr>
@@ -12352,8 +11666,8 @@
         </p:blipFill>
         <p:spPr>
           <a:xfrm>
-            <a:off x="6858000" y="5230368"/>
-            <a:ext cx="4892040" cy="1143000"/>
+            <a:off x="7592862" y="5230368"/>
+            <a:ext cx="3422315" cy="1143000"/>
           </a:xfrm>
           <a:prstGeom prst="rect">
             <a:avLst/>
@@ -12844,7 +12158,7 @@
           </a:prstGeom>
           <a:extLst>
             <a:ext uri="{C572A759-6A51-4108-AA02-DFA0A04FC94B}">
-              <ma14:wrappingTextBoxFlag xmlns="" xmlns:ma14="http://schemas.microsoft.com/office/mac/drawingml/2011/main" val="0"/>
+              <ma14:wrappingTextBoxFlag xmlns:ma14="http://schemas.microsoft.com/office/mac/drawingml/2011/main" xmlns="" val="0"/>
             </a:ext>
           </a:extLst>
         </p:spPr>
@@ -13594,7 +12908,7 @@
           </a:prstGeom>
           <a:extLst>
             <a:ext uri="{C572A759-6A51-4108-AA02-DFA0A04FC94B}">
-              <ma14:wrappingTextBoxFlag xmlns="" xmlns:ma14="http://schemas.microsoft.com/office/mac/drawingml/2011/main" val="0"/>
+              <ma14:wrappingTextBoxFlag xmlns:ma14="http://schemas.microsoft.com/office/mac/drawingml/2011/main" xmlns="" val="0"/>
             </a:ext>
           </a:extLst>
         </p:spPr>
@@ -14344,7 +13658,7 @@
           </a:prstGeom>
           <a:extLst>
             <a:ext uri="{C572A759-6A51-4108-AA02-DFA0A04FC94B}">
-              <ma14:wrappingTextBoxFlag xmlns="" xmlns:ma14="http://schemas.microsoft.com/office/mac/drawingml/2011/main" val="0"/>
+              <ma14:wrappingTextBoxFlag xmlns:ma14="http://schemas.microsoft.com/office/mac/drawingml/2011/main" xmlns="" val="0"/>
             </a:ext>
           </a:extLst>
         </p:spPr>
@@ -15094,7 +14408,7 @@
           </a:prstGeom>
           <a:extLst>
             <a:ext uri="{C572A759-6A51-4108-AA02-DFA0A04FC94B}">
-              <ma14:wrappingTextBoxFlag xmlns="" xmlns:ma14="http://schemas.microsoft.com/office/mac/drawingml/2011/main" val="0"/>
+              <ma14:wrappingTextBoxFlag xmlns:ma14="http://schemas.microsoft.com/office/mac/drawingml/2011/main" xmlns="" val="0"/>
             </a:ext>
           </a:extLst>
         </p:spPr>
@@ -15844,7 +15158,7 @@
           </a:prstGeom>
           <a:extLst>
             <a:ext uri="{C572A759-6A51-4108-AA02-DFA0A04FC94B}">
-              <ma14:wrappingTextBoxFlag xmlns="" xmlns:ma14="http://schemas.microsoft.com/office/mac/drawingml/2011/main" val="0"/>
+              <ma14:wrappingTextBoxFlag xmlns:ma14="http://schemas.microsoft.com/office/mac/drawingml/2011/main" xmlns="" val="0"/>
             </a:ext>
           </a:extLst>
         </p:spPr>
@@ -16411,8 +15725,8 @@
         </p:blipFill>
         <p:spPr>
           <a:xfrm>
-            <a:off x="4251960" y="1828800"/>
-            <a:ext cx="5773921" cy="3749039"/>
+            <a:off x="4130040" y="1309878"/>
+            <a:ext cx="7315200" cy="4749800"/>
           </a:xfrm>
           <a:prstGeom prst="rect">
             <a:avLst/>
@@ -16427,7 +15741,7 @@
         </p:nvSpPr>
         <p:spPr>
           <a:xfrm>
-            <a:off x="4251960" y="5532120"/>
+            <a:off x="4206240" y="6147816"/>
             <a:ext cx="7315200" cy="365760"/>
           </a:xfrm>
           <a:prstGeom prst="rect">
@@ -16463,7 +15777,7 @@
         </p:nvSpPr>
         <p:spPr>
           <a:xfrm>
-            <a:off x="594360" y="5998464"/>
+            <a:off x="434340" y="5755386"/>
             <a:ext cx="10972800" cy="384048"/>
           </a:xfrm>
           <a:prstGeom prst="rect">
@@ -16549,7 +15863,7 @@
           </a:prstGeom>
           <a:extLst>
             <a:ext uri="{C572A759-6A51-4108-AA02-DFA0A04FC94B}">
-              <ma14:wrappingTextBoxFlag xmlns="" xmlns:ma14="http://schemas.microsoft.com/office/mac/drawingml/2011/main" val="0"/>
+              <ma14:wrappingTextBoxFlag xmlns:ma14="http://schemas.microsoft.com/office/mac/drawingml/2011/main" xmlns="" val="0"/>
             </a:ext>
           </a:extLst>
         </p:spPr>
@@ -18958,7 +18272,7 @@
           </a:prstGeom>
           <a:extLst>
             <a:ext uri="{C572A759-6A51-4108-AA02-DFA0A04FC94B}">
-              <ma14:wrappingTextBoxFlag xmlns="" xmlns:ma14="http://schemas.microsoft.com/office/mac/drawingml/2011/main" val="0"/>
+              <ma14:wrappingTextBoxFlag xmlns:ma14="http://schemas.microsoft.com/office/mac/drawingml/2011/main" xmlns="" val="0"/>
             </a:ext>
           </a:extLst>
         </p:spPr>
@@ -20363,7 +19677,7 @@
           </a:prstGeom>
           <a:extLst>
             <a:ext uri="{C572A759-6A51-4108-AA02-DFA0A04FC94B}">
-              <ma14:wrappingTextBoxFlag xmlns="" xmlns:ma14="http://schemas.microsoft.com/office/mac/drawingml/2011/main" val="0"/>
+              <ma14:wrappingTextBoxFlag xmlns:ma14="http://schemas.microsoft.com/office/mac/drawingml/2011/main" xmlns="" val="0"/>
             </a:ext>
           </a:extLst>
         </p:spPr>
@@ -21033,7 +20347,7 @@
           </a:prstGeom>
           <a:extLst>
             <a:ext uri="{C572A759-6A51-4108-AA02-DFA0A04FC94B}">
-              <ma14:wrappingTextBoxFlag xmlns="" xmlns:ma14="http://schemas.microsoft.com/office/mac/drawingml/2011/main" val="0"/>
+              <ma14:wrappingTextBoxFlag xmlns:ma14="http://schemas.microsoft.com/office/mac/drawingml/2011/main" xmlns="" val="0"/>
             </a:ext>
           </a:extLst>
         </p:spPr>
@@ -21961,7 +21275,7 @@
           </a:prstGeom>
           <a:extLst>
             <a:ext uri="{C572A759-6A51-4108-AA02-DFA0A04FC94B}">
-              <ma14:wrappingTextBoxFlag xmlns="" xmlns:ma14="http://schemas.microsoft.com/office/mac/drawingml/2011/main" val="0"/>
+              <ma14:wrappingTextBoxFlag xmlns:ma14="http://schemas.microsoft.com/office/mac/drawingml/2011/main" xmlns="" val="0"/>
             </a:ext>
           </a:extLst>
         </p:spPr>
@@ -22784,7 +22098,7 @@
           </a:prstGeom>
           <a:extLst>
             <a:ext uri="{C572A759-6A51-4108-AA02-DFA0A04FC94B}">
-              <ma14:wrappingTextBoxFlag xmlns="" xmlns:ma14="http://schemas.microsoft.com/office/mac/drawingml/2011/main" val="0"/>
+              <ma14:wrappingTextBoxFlag xmlns:ma14="http://schemas.microsoft.com/office/mac/drawingml/2011/main" xmlns="" val="0"/>
             </a:ext>
           </a:extLst>
         </p:spPr>
@@ -23565,7 +22879,7 @@
           </a:prstGeom>
           <a:extLst>
             <a:ext uri="{C572A759-6A51-4108-AA02-DFA0A04FC94B}">
-              <ma14:wrappingTextBoxFlag xmlns="" xmlns:ma14="http://schemas.microsoft.com/office/mac/drawingml/2011/main" val="0"/>
+              <ma14:wrappingTextBoxFlag xmlns:ma14="http://schemas.microsoft.com/office/mac/drawingml/2011/main" xmlns="" val="0"/>
             </a:ext>
           </a:extLst>
         </p:spPr>
@@ -23593,6 +22907,36 @@
           </a:p>
         </p:txBody>
       </p:sp>
+      <p:pic>
+        <p:nvPicPr>
+          <p:cNvPr id="2" name="Picture 1" descr="QR Code">
+            <a:extLst>
+              <a:ext uri="{FF2B5EF4-FFF2-40B4-BE49-F238E27FC236}">
+                <a16:creationId xmlns:a16="http://schemas.microsoft.com/office/drawing/2014/main" id="{5E98BE69-9867-436A-4E80-D29485DF2F69}"/>
+              </a:ext>
+            </a:extLst>
+          </p:cNvPr>
+          <p:cNvPicPr>
+            <a:picLocks noChangeAspect="1"/>
+          </p:cNvPicPr>
+          <p:nvPr/>
+        </p:nvPicPr>
+        <p:blipFill>
+          <a:blip r:embed="rId13"/>
+          <a:stretch>
+            <a:fillRect/>
+          </a:stretch>
+        </p:blipFill>
+        <p:spPr>
+          <a:xfrm>
+            <a:off x="6662737" y="1889315"/>
+            <a:ext cx="3590925" cy="3590925"/>
+          </a:xfrm>
+          <a:prstGeom prst="rect">
+            <a:avLst/>
+          </a:prstGeom>
+        </p:spPr>
+      </p:pic>
     </p:spTree>
   </p:cSld>
   <p:clrMapOvr>
@@ -24290,7 +23634,7 @@
           </a:prstGeom>
           <a:extLst>
             <a:ext uri="{C572A759-6A51-4108-AA02-DFA0A04FC94B}">
-              <ma14:wrappingTextBoxFlag xmlns="" xmlns:ma14="http://schemas.microsoft.com/office/mac/drawingml/2011/main" val="0"/>
+              <ma14:wrappingTextBoxFlag xmlns:ma14="http://schemas.microsoft.com/office/mac/drawingml/2011/main" xmlns="" val="0"/>
             </a:ext>
           </a:extLst>
         </p:spPr>
@@ -25286,7 +24630,7 @@
           </a:prstGeom>
           <a:extLst>
             <a:ext uri="{C572A759-6A51-4108-AA02-DFA0A04FC94B}">
-              <ma14:wrappingTextBoxFlag xmlns="" xmlns:ma14="http://schemas.microsoft.com/office/mac/drawingml/2011/main" val="0"/>
+              <ma14:wrappingTextBoxFlag xmlns:ma14="http://schemas.microsoft.com/office/mac/drawingml/2011/main" xmlns="" val="0"/>
             </a:ext>
           </a:extLst>
         </p:spPr>
@@ -27769,7 +27113,7 @@
           </a:prstGeom>
           <a:extLst>
             <a:ext uri="{C572A759-6A51-4108-AA02-DFA0A04FC94B}">
-              <ma14:wrappingTextBoxFlag xmlns="" xmlns:ma14="http://schemas.microsoft.com/office/mac/drawingml/2011/main" val="0"/>
+              <ma14:wrappingTextBoxFlag xmlns:ma14="http://schemas.microsoft.com/office/mac/drawingml/2011/main" xmlns="" val="0"/>
             </a:ext>
           </a:extLst>
         </p:spPr>
@@ -27897,8 +27241,8 @@
         </p:blipFill>
         <p:spPr>
           <a:xfrm>
-            <a:off x="6858000" y="5230368"/>
-            <a:ext cx="4892040" cy="1143000"/>
+            <a:off x="7592862" y="5230368"/>
+            <a:ext cx="3422315" cy="1143000"/>
           </a:xfrm>
           <a:prstGeom prst="rect">
             <a:avLst/>
@@ -28389,7 +27733,7 @@
           </a:prstGeom>
           <a:extLst>
             <a:ext uri="{C572A759-6A51-4108-AA02-DFA0A04FC94B}">
-              <ma14:wrappingTextBoxFlag xmlns="" xmlns:ma14="http://schemas.microsoft.com/office/mac/drawingml/2011/main" val="0"/>
+              <ma14:wrappingTextBoxFlag xmlns:ma14="http://schemas.microsoft.com/office/mac/drawingml/2011/main" xmlns="" val="0"/>
             </a:ext>
           </a:extLst>
         </p:spPr>
@@ -29070,7 +28414,7 @@
           </a:prstGeom>
           <a:extLst>
             <a:ext uri="{C572A759-6A51-4108-AA02-DFA0A04FC94B}">
-              <ma14:wrappingTextBoxFlag xmlns="" xmlns:ma14="http://schemas.microsoft.com/office/mac/drawingml/2011/main" val="0"/>
+              <ma14:wrappingTextBoxFlag xmlns:ma14="http://schemas.microsoft.com/office/mac/drawingml/2011/main" xmlns="" val="0"/>
             </a:ext>
           </a:extLst>
         </p:spPr>
@@ -29820,7 +29164,7 @@
           </a:prstGeom>
           <a:extLst>
             <a:ext uri="{C572A759-6A51-4108-AA02-DFA0A04FC94B}">
-              <ma14:wrappingTextBoxFlag xmlns="" xmlns:ma14="http://schemas.microsoft.com/office/mac/drawingml/2011/main" val="0"/>
+              <ma14:wrappingTextBoxFlag xmlns:ma14="http://schemas.microsoft.com/office/mac/drawingml/2011/main" xmlns="" val="0"/>
             </a:ext>
           </a:extLst>
         </p:spPr>
@@ -29891,8 +29235,8 @@
         </p:blipFill>
         <p:spPr>
           <a:xfrm>
-            <a:off x="6858000" y="5230368"/>
-            <a:ext cx="4892040" cy="1143000"/>
+            <a:off x="7592862" y="5230368"/>
+            <a:ext cx="3422315" cy="1143000"/>
           </a:xfrm>
           <a:prstGeom prst="rect">
             <a:avLst/>
@@ -30383,7 +29727,7 @@
           </a:prstGeom>
           <a:extLst>
             <a:ext uri="{C572A759-6A51-4108-AA02-DFA0A04FC94B}">
-              <ma14:wrappingTextBoxFlag xmlns="" xmlns:ma14="http://schemas.microsoft.com/office/mac/drawingml/2011/main" val="0"/>
+              <ma14:wrappingTextBoxFlag xmlns:ma14="http://schemas.microsoft.com/office/mac/drawingml/2011/main" xmlns="" val="0"/>
             </a:ext>
           </a:extLst>
         </p:spPr>
@@ -30420,326 +29764,6 @@
 </file>
 
 <file path=ppt/theme/theme1.xml><?xml version="1.0" encoding="utf-8"?>
-<a:theme xmlns:a="http://schemas.openxmlformats.org/drawingml/2006/main" name="Office Theme">
-  <a:themeElements>
-    <a:clrScheme name="Office">
-      <a:dk1>
-        <a:sysClr val="windowText" lastClr="000000"/>
-      </a:dk1>
-      <a:lt1>
-        <a:sysClr val="window" lastClr="FFFFFF"/>
-      </a:lt1>
-      <a:dk2>
-        <a:srgbClr val="1F497D"/>
-      </a:dk2>
-      <a:lt2>
-        <a:srgbClr val="EEECE1"/>
-      </a:lt2>
-      <a:accent1>
-        <a:srgbClr val="4F81BD"/>
-      </a:accent1>
-      <a:accent2>
-        <a:srgbClr val="C0504D"/>
-      </a:accent2>
-      <a:accent3>
-        <a:srgbClr val="9BBB59"/>
-      </a:accent3>
-      <a:accent4>
-        <a:srgbClr val="8064A2"/>
-      </a:accent4>
-      <a:accent5>
-        <a:srgbClr val="4BACC6"/>
-      </a:accent5>
-      <a:accent6>
-        <a:srgbClr val="F79646"/>
-      </a:accent6>
-      <a:hlink>
-        <a:srgbClr val="0000FF"/>
-      </a:hlink>
-      <a:folHlink>
-        <a:srgbClr val="800080"/>
-      </a:folHlink>
-    </a:clrScheme>
-    <a:fontScheme name="Office">
-      <a:majorFont>
-        <a:latin typeface="Calibri"/>
-        <a:ea typeface=""/>
-        <a:cs typeface=""/>
-        <a:font script="Jpan" typeface="ＭＳ Ｐゴシック"/>
-        <a:font script="Hang" typeface="맑은 고딕"/>
-        <a:font script="Hans" typeface="宋体"/>
-        <a:font script="Hant" typeface="新細明體"/>
-        <a:font script="Arab" typeface="Times New Roman"/>
-        <a:font script="Hebr" typeface="Times New Roman"/>
-        <a:font script="Thai" typeface="Angsana New"/>
-        <a:font script="Ethi" typeface="Nyala"/>
-        <a:font script="Beng" typeface="Vrinda"/>
-        <a:font script="Gujr" typeface="Shruti"/>
-        <a:font script="Khmr" typeface="MoolBoran"/>
-        <a:font script="Knda" typeface="Tunga"/>
-        <a:font script="Guru" typeface="Raavi"/>
-        <a:font script="Cans" typeface="Euphemia"/>
-        <a:font script="Cher" typeface="Plantagenet Cherokee"/>
-        <a:font script="Yiii" typeface="Microsoft Yi Baiti"/>
-        <a:font script="Tibt" typeface="Microsoft Himalaya"/>
-        <a:font script="Thaa" typeface="MV Boli"/>
-        <a:font script="Deva" typeface="Mangal"/>
-        <a:font script="Telu" typeface="Gautami"/>
-        <a:font script="Taml" typeface="Latha"/>
-        <a:font script="Syrc" typeface="Estrangelo Edessa"/>
-        <a:font script="Orya" typeface="Kalinga"/>
-        <a:font script="Mlym" typeface="Kartika"/>
-        <a:font script="Laoo" typeface="DokChampa"/>
-        <a:font script="Sinh" typeface="Iskoola Pota"/>
-        <a:font script="Mong" typeface="Mongolian Baiti"/>
-        <a:font script="Viet" typeface="Times New Roman"/>
-        <a:font script="Uigh" typeface="Microsoft Uighur"/>
-        <a:font script="Geor" typeface="Sylfaen"/>
-      </a:majorFont>
-      <a:minorFont>
-        <a:latin typeface="Calibri"/>
-        <a:ea typeface=""/>
-        <a:cs typeface=""/>
-        <a:font script="Jpan" typeface="ＭＳ Ｐゴシック"/>
-        <a:font script="Hang" typeface="맑은 고딕"/>
-        <a:font script="Hans" typeface="宋体"/>
-        <a:font script="Hant" typeface="新細明體"/>
-        <a:font script="Arab" typeface="Arial"/>
-        <a:font script="Hebr" typeface="Arial"/>
-        <a:font script="Thai" typeface="Cordia New"/>
-        <a:font script="Ethi" typeface="Nyala"/>
-        <a:font script="Beng" typeface="Vrinda"/>
-        <a:font script="Gujr" typeface="Shruti"/>
-        <a:font script="Khmr" typeface="DaunPenh"/>
-        <a:font script="Knda" typeface="Tunga"/>
-        <a:font script="Guru" typeface="Raavi"/>
-        <a:font script="Cans" typeface="Euphemia"/>
-        <a:font script="Cher" typeface="Plantagenet Cherokee"/>
-        <a:font script="Yiii" typeface="Microsoft Yi Baiti"/>
-        <a:font script="Tibt" typeface="Microsoft Himalaya"/>
-        <a:font script="Thaa" typeface="MV Boli"/>
-        <a:font script="Deva" typeface="Mangal"/>
-        <a:font script="Telu" typeface="Gautami"/>
-        <a:font script="Taml" typeface="Latha"/>
-        <a:font script="Syrc" typeface="Estrangelo Edessa"/>
-        <a:font script="Orya" typeface="Kalinga"/>
-        <a:font script="Mlym" typeface="Kartika"/>
-        <a:font script="Laoo" typeface="DokChampa"/>
-        <a:font script="Sinh" typeface="Iskoola Pota"/>
-        <a:font script="Mong" typeface="Mongolian Baiti"/>
-        <a:font script="Viet" typeface="Arial"/>
-        <a:font script="Uigh" typeface="Microsoft Uighur"/>
-        <a:font script="Geor" typeface="Sylfaen"/>
-      </a:minorFont>
-    </a:fontScheme>
-    <a:fmtScheme name="Office">
-      <a:fillStyleLst>
-        <a:solidFill>
-          <a:schemeClr val="phClr"/>
-        </a:solidFill>
-        <a:gradFill rotWithShape="1">
-          <a:gsLst>
-            <a:gs pos="0">
-              <a:schemeClr val="phClr">
-                <a:tint val="50000"/>
-                <a:satMod val="300000"/>
-              </a:schemeClr>
-            </a:gs>
-            <a:gs pos="35000">
-              <a:schemeClr val="phClr">
-                <a:tint val="37000"/>
-                <a:satMod val="300000"/>
-              </a:schemeClr>
-            </a:gs>
-            <a:gs pos="100000">
-              <a:schemeClr val="phClr">
-                <a:tint val="15000"/>
-                <a:satMod val="350000"/>
-              </a:schemeClr>
-            </a:gs>
-          </a:gsLst>
-          <a:lin ang="16200000" scaled="1"/>
-        </a:gradFill>
-        <a:gradFill rotWithShape="1">
-          <a:gsLst>
-            <a:gs pos="0">
-              <a:schemeClr val="phClr">
-                <a:tint val="100000"/>
-                <a:shade val="100000"/>
-                <a:satMod val="130000"/>
-              </a:schemeClr>
-            </a:gs>
-            <a:gs pos="100000">
-              <a:schemeClr val="phClr">
-                <a:tint val="50000"/>
-                <a:shade val="100000"/>
-                <a:satMod val="350000"/>
-              </a:schemeClr>
-            </a:gs>
-          </a:gsLst>
-          <a:lin ang="16200000" scaled="0"/>
-        </a:gradFill>
-      </a:fillStyleLst>
-      <a:lnStyleLst>
-        <a:ln w="9525" cap="flat" cmpd="sng" algn="ctr">
-          <a:solidFill>
-            <a:schemeClr val="phClr">
-              <a:shade val="95000"/>
-              <a:satMod val="105000"/>
-            </a:schemeClr>
-          </a:solidFill>
-          <a:prstDash val="solid"/>
-        </a:ln>
-        <a:ln w="25400" cap="flat" cmpd="sng" algn="ctr">
-          <a:solidFill>
-            <a:schemeClr val="phClr"/>
-          </a:solidFill>
-          <a:prstDash val="solid"/>
-        </a:ln>
-        <a:ln w="38100" cap="flat" cmpd="sng" algn="ctr">
-          <a:solidFill>
-            <a:schemeClr val="phClr"/>
-          </a:solidFill>
-          <a:prstDash val="solid"/>
-        </a:ln>
-      </a:lnStyleLst>
-      <a:effectStyleLst>
-        <a:effectStyle>
-          <a:effectLst>
-            <a:outerShdw blurRad="40000" dist="20000" dir="5400000" rotWithShape="0">
-              <a:srgbClr val="000000">
-                <a:alpha val="38000"/>
-              </a:srgbClr>
-            </a:outerShdw>
-          </a:effectLst>
-        </a:effectStyle>
-        <a:effectStyle>
-          <a:effectLst>
-            <a:outerShdw blurRad="40000" dist="23000" dir="5400000" rotWithShape="0">
-              <a:srgbClr val="000000">
-                <a:alpha val="35000"/>
-              </a:srgbClr>
-            </a:outerShdw>
-          </a:effectLst>
-        </a:effectStyle>
-        <a:effectStyle>
-          <a:effectLst>
-            <a:outerShdw blurRad="40000" dist="23000" dir="5400000" rotWithShape="0">
-              <a:srgbClr val="000000">
-                <a:alpha val="35000"/>
-              </a:srgbClr>
-            </a:outerShdw>
-          </a:effectLst>
-          <a:scene3d>
-            <a:camera prst="orthographicFront">
-              <a:rot lat="0" lon="0" rev="0"/>
-            </a:camera>
-            <a:lightRig rig="threePt" dir="t">
-              <a:rot lat="0" lon="0" rev="1200000"/>
-            </a:lightRig>
-          </a:scene3d>
-          <a:sp3d>
-            <a:bevelT w="63500" h="25400"/>
-          </a:sp3d>
-        </a:effectStyle>
-      </a:effectStyleLst>
-      <a:bgFillStyleLst>
-        <a:solidFill>
-          <a:schemeClr val="phClr"/>
-        </a:solidFill>
-        <a:gradFill rotWithShape="1">
-          <a:gsLst>
-            <a:gs pos="0">
-              <a:schemeClr val="phClr">
-                <a:tint val="40000"/>
-                <a:satMod val="350000"/>
-              </a:schemeClr>
-            </a:gs>
-            <a:gs pos="40000">
-              <a:schemeClr val="phClr">
-                <a:tint val="45000"/>
-                <a:shade val="99000"/>
-                <a:satMod val="350000"/>
-              </a:schemeClr>
-            </a:gs>
-            <a:gs pos="100000">
-              <a:schemeClr val="phClr">
-                <a:shade val="20000"/>
-                <a:satMod val="255000"/>
-              </a:schemeClr>
-            </a:gs>
-          </a:gsLst>
-          <a:path path="circle">
-            <a:fillToRect l="50000" t="-80000" r="50000" b="180000"/>
-          </a:path>
-        </a:gradFill>
-        <a:gradFill rotWithShape="1">
-          <a:gsLst>
-            <a:gs pos="0">
-              <a:schemeClr val="phClr">
-                <a:tint val="80000"/>
-                <a:satMod val="300000"/>
-              </a:schemeClr>
-            </a:gs>
-            <a:gs pos="100000">
-              <a:schemeClr val="phClr">
-                <a:shade val="30000"/>
-                <a:satMod val="200000"/>
-              </a:schemeClr>
-            </a:gs>
-          </a:gsLst>
-          <a:path path="circle">
-            <a:fillToRect l="50000" t="50000" r="50000" b="50000"/>
-          </a:path>
-        </a:gradFill>
-      </a:bgFillStyleLst>
-    </a:fmtScheme>
-  </a:themeElements>
-  <a:objectDefaults>
-    <a:spDef>
-      <a:spPr/>
-      <a:bodyPr/>
-      <a:lstStyle/>
-      <a:style>
-        <a:lnRef idx="1">
-          <a:schemeClr val="accent1"/>
-        </a:lnRef>
-        <a:fillRef idx="3">
-          <a:schemeClr val="accent1"/>
-        </a:fillRef>
-        <a:effectRef idx="2">
-          <a:schemeClr val="accent1"/>
-        </a:effectRef>
-        <a:fontRef idx="minor">
-          <a:schemeClr val="lt1"/>
-        </a:fontRef>
-      </a:style>
-    </a:spDef>
-    <a:lnDef>
-      <a:spPr/>
-      <a:bodyPr/>
-      <a:lstStyle/>
-      <a:style>
-        <a:lnRef idx="2">
-          <a:schemeClr val="accent1"/>
-        </a:lnRef>
-        <a:fillRef idx="0">
-          <a:schemeClr val="accent1"/>
-        </a:fillRef>
-        <a:effectRef idx="1">
-          <a:schemeClr val="accent1"/>
-        </a:effectRef>
-        <a:fontRef idx="minor">
-          <a:schemeClr val="tx1"/>
-        </a:fontRef>
-      </a:style>
-    </a:lnDef>
-  </a:objectDefaults>
-  <a:extraClrSchemeLst/>
-</a:theme>
-</file>
-
-<file path=ppt/theme/theme2.xml><?xml version="1.0" encoding="utf-8"?>
 <a:theme xmlns:a="http://schemas.openxmlformats.org/drawingml/2006/main" name="Office Theme">
   <a:themeElements>
     <a:clrScheme name="Office">
@@ -31034,7 +30058,7 @@
 </a:theme>
 </file>
 
-<file path=ppt/theme/theme3.xml><?xml version="1.0" encoding="utf-8"?>
+<file path=ppt/theme/theme2.xml><?xml version="1.0" encoding="utf-8"?>
 <a:theme xmlns:a="http://schemas.openxmlformats.org/drawingml/2006/main" name="Office Theme">
   <a:themeElements>
     <a:clrScheme name="Office">
